--- a/submission/solution.pptx
+++ b/submission/solution.pptx
@@ -3110,77 +3110,7 @@
         </p:nvSpPr>
         <p:spPr>
           <a:xfrm>
-            <a:off x="914400" y="1371600"/>
-            <a:ext cx="10058400" cy="1371600"/>
-          </a:xfrm>
-          <a:prstGeom prst="rect">
-            <a:avLst/>
-          </a:prstGeom>
-          <a:noFill/>
-        </p:spPr>
-        <p:txBody>
-          <a:bodyPr wrap="square">
-            <a:spAutoFit/>
-          </a:bodyPr>
-          <a:lstStyle/>
-          <a:p>
-            <a:pPr algn="ctr">
-              <a:defRPr sz="4000" b="1">
-                <a:solidFill>
-                  <a:srgbClr val="FFFFFF"/>
-                </a:solidFill>
-              </a:defRPr>
-            </a:pPr>
-            <a:r>
-              <a:t>EXAONE-4.0-1.2B 모델 경량화</a:t>
-            </a:r>
-          </a:p>
-        </p:txBody>
-      </p:sp>
-      <p:sp>
-        <p:nvSpPr>
-          <p:cNvPr id="3" name="TextBox 2"/>
-          <p:cNvSpPr txBox="1"/>
-          <p:nvPr/>
-        </p:nvSpPr>
-        <p:spPr>
-          <a:xfrm>
-            <a:off x="914400" y="2926080"/>
-            <a:ext cx="10058400" cy="914400"/>
-          </a:xfrm>
-          <a:prstGeom prst="rect">
-            <a:avLst/>
-          </a:prstGeom>
-          <a:noFill/>
-        </p:spPr>
-        <p:txBody>
-          <a:bodyPr wrap="square">
-            <a:spAutoFit/>
-          </a:bodyPr>
-          <a:lstStyle/>
-          <a:p>
-            <a:pPr algn="ctr">
-              <a:defRPr sz="2400" b="0">
-                <a:solidFill>
-                  <a:srgbClr val="88BBFF"/>
-                </a:solidFill>
-              </a:defRPr>
-            </a:pPr>
-            <a:r>
-              <a:t>QuantizationModifier W8A8 + Context Window 축소</a:t>
-            </a:r>
-          </a:p>
-        </p:txBody>
-      </p:sp>
-      <p:sp>
-        <p:nvSpPr>
-          <p:cNvPr id="4" name="TextBox 3"/>
-          <p:cNvSpPr txBox="1"/>
-          <p:nvPr/>
-        </p:nvSpPr>
-        <p:spPr>
-          <a:xfrm>
-            <a:off x="914400" y="4572000"/>
+            <a:off x="914400" y="914400"/>
             <a:ext cx="10058400" cy="731520"/>
           </a:xfrm>
           <a:prstGeom prst="rect">
@@ -3195,27 +3125,64 @@
           <a:lstStyle/>
           <a:p>
             <a:pPr algn="ctr">
-              <a:defRPr sz="2800" b="1">
-                <a:solidFill>
-                  <a:srgbClr val="00AA55"/>
-                </a:solidFill>
-              </a:defRPr>
-            </a:pPr>
-            <a:r>
-              <a:t>Public Score: 0.6295</a:t>
-            </a:r>
-          </a:p>
-        </p:txBody>
-      </p:sp>
-      <p:sp>
-        <p:nvSpPr>
-          <p:cNvPr id="5" name="TextBox 4"/>
+              <a:defRPr sz="2000" b="0">
+                <a:solidFill>
+                  <a:srgbClr val="7F8C8D"/>
+                </a:solidFill>
+                <a:latin typeface="맑은 고딕"/>
+              </a:defRPr>
+            </a:pPr>
+            <a:r>
+              <a:t>LG Aimers Phase 2 — LLM 경량화 해커톤</a:t>
+            </a:r>
+          </a:p>
+        </p:txBody>
+      </p:sp>
+      <p:sp>
+        <p:nvSpPr>
+          <p:cNvPr id="3" name="TextBox 2"/>
           <p:cNvSpPr txBox="1"/>
           <p:nvPr/>
         </p:nvSpPr>
         <p:spPr>
           <a:xfrm>
-            <a:off x="914400" y="5486400"/>
+            <a:off x="914400" y="1828800"/>
+            <a:ext cx="10058400" cy="1097280"/>
+          </a:xfrm>
+          <a:prstGeom prst="rect">
+            <a:avLst/>
+          </a:prstGeom>
+          <a:noFill/>
+        </p:spPr>
+        <p:txBody>
+          <a:bodyPr wrap="square">
+            <a:spAutoFit/>
+          </a:bodyPr>
+          <a:lstStyle/>
+          <a:p>
+            <a:pPr algn="ctr">
+              <a:defRPr sz="4000" b="1">
+                <a:solidFill>
+                  <a:srgbClr val="FFFFFF"/>
+                </a:solidFill>
+                <a:latin typeface="맑은 고딕"/>
+              </a:defRPr>
+            </a:pPr>
+            <a:r>
+              <a:t>EXAONE-4.0-1.2B 모델 경량화</a:t>
+            </a:r>
+          </a:p>
+        </p:txBody>
+      </p:sp>
+      <p:sp>
+        <p:nvSpPr>
+          <p:cNvPr id="4" name="TextBox 3"/>
+          <p:cNvSpPr txBox="1"/>
+          <p:nvPr/>
+        </p:nvSpPr>
+        <p:spPr>
+          <a:xfrm>
+            <a:off x="914400" y="3108960"/>
             <a:ext cx="10058400" cy="731520"/>
           </a:xfrm>
           <a:prstGeom prst="rect">
@@ -3230,14 +3197,140 @@
           <a:lstStyle/>
           <a:p>
             <a:pPr algn="ctr">
-              <a:defRPr sz="2000" b="0">
+              <a:defRPr sz="2200" b="0">
+                <a:solidFill>
+                  <a:srgbClr val="85C1E9"/>
+                </a:solidFill>
+                <a:latin typeface="맑은 고딕"/>
+              </a:defRPr>
+            </a:pPr>
+            <a:r>
+              <a:t>QuantizationModifier W8A8 + Context Window 축소</a:t>
+            </a:r>
+          </a:p>
+        </p:txBody>
+      </p:sp>
+      <p:sp>
+        <p:nvSpPr>
+          <p:cNvPr id="5" name="Rounded Rectangle 4"/>
+          <p:cNvSpPr/>
+          <p:nvPr/>
+        </p:nvSpPr>
+        <p:spPr>
+          <a:xfrm>
+            <a:off x="3840480" y="4206240"/>
+            <a:ext cx="4480560" cy="1097280"/>
+          </a:xfrm>
+          <a:prstGeom prst="roundRect">
+            <a:avLst/>
+          </a:prstGeom>
+          <a:solidFill>
+            <a:srgbClr val="E84D3D"/>
+          </a:solidFill>
+          <a:ln>
+            <a:noFill/>
+          </a:ln>
+        </p:spPr>
+        <p:style>
+          <a:lnRef idx="1">
+            <a:schemeClr val="accent1"/>
+          </a:lnRef>
+          <a:fillRef idx="3">
+            <a:schemeClr val="accent1"/>
+          </a:fillRef>
+          <a:effectRef idx="2">
+            <a:schemeClr val="accent1"/>
+          </a:effectRef>
+          <a:fontRef idx="minor">
+            <a:schemeClr val="lt1"/>
+          </a:fontRef>
+        </p:style>
+        <p:txBody>
+          <a:bodyPr rtlCol="0" anchor="ctr" wrap="square"/>
+          <a:lstStyle/>
+          <a:p>
+            <a:pPr algn="ctr">
+              <a:defRPr sz="3400" b="1">
+                <a:solidFill>
+                  <a:srgbClr val="FFFFFF"/>
+                </a:solidFill>
+                <a:latin typeface="맑은 고딕"/>
+              </a:defRPr>
+            </a:pPr>
+            <a:r>
+              <a:t>Final Score: 0.6295</a:t>
+            </a:r>
+          </a:p>
+        </p:txBody>
+      </p:sp>
+      <p:sp>
+        <p:nvSpPr>
+          <p:cNvPr id="6" name="TextBox 5"/>
+          <p:cNvSpPr txBox="1"/>
+          <p:nvPr/>
+        </p:nvSpPr>
+        <p:spPr>
+          <a:xfrm>
+            <a:off x="914400" y="5486400"/>
+            <a:ext cx="10058400" cy="457200"/>
+          </a:xfrm>
+          <a:prstGeom prst="rect">
+            <a:avLst/>
+          </a:prstGeom>
+          <a:noFill/>
+        </p:spPr>
+        <p:txBody>
+          <a:bodyPr wrap="square">
+            <a:spAutoFit/>
+          </a:bodyPr>
+          <a:lstStyle/>
+          <a:p>
+            <a:pPr algn="ctr">
+              <a:defRPr sz="1600" b="0">
                 <a:solidFill>
                   <a:srgbClr val="AAAABB"/>
                 </a:solidFill>
-              </a:defRPr>
-            </a:pPr>
-            <a:r>
-              <a:t>모델 크기: 2.4GB → 1.4GB (42% 감소)</a:t>
+                <a:latin typeface="맑은 고딕"/>
+              </a:defRPr>
+            </a:pPr>
+            <a:r>
+              <a:t>모델 크기: 2.4GB → 1.4GB (42% 감소)  |  추론 속도: 1,811 → 2,435 tok/s</a:t>
+            </a:r>
+          </a:p>
+        </p:txBody>
+      </p:sp>
+      <p:sp>
+        <p:nvSpPr>
+          <p:cNvPr id="7" name="TextBox 6"/>
+          <p:cNvSpPr txBox="1"/>
+          <p:nvPr/>
+        </p:nvSpPr>
+        <p:spPr>
+          <a:xfrm>
+            <a:off x="914400" y="6035040"/>
+            <a:ext cx="10058400" cy="457200"/>
+          </a:xfrm>
+          <a:prstGeom prst="rect">
+            <a:avLst/>
+          </a:prstGeom>
+          <a:noFill/>
+        </p:spPr>
+        <p:txBody>
+          <a:bodyPr wrap="square">
+            <a:spAutoFit/>
+          </a:bodyPr>
+          <a:lstStyle/>
+          <a:p>
+            <a:pPr algn="ctr">
+              <a:defRPr sz="1400" b="0">
+                <a:solidFill>
+                  <a:srgbClr val="7F8C8D"/>
+                </a:solidFill>
+                <a:latin typeface="맑은 고딕"/>
+              </a:defRPr>
+            </a:pPr>
+            <a:r>
+              <a:t>팀원: [이름 직접 기재]  |  오프라인 참가 여부: [직접 기재]</a:t>
             </a:r>
           </a:p>
         </p:txBody>
@@ -3268,8 +3361,8 @@
         </p:nvSpPr>
         <p:spPr>
           <a:xfrm>
-            <a:off x="731520" y="365760"/>
-            <a:ext cx="10058400" cy="731520"/>
+            <a:off x="457200" y="274320"/>
+            <a:ext cx="10972800" cy="548640"/>
           </a:xfrm>
           <a:prstGeom prst="rect">
             <a:avLst/>
@@ -3283,10 +3376,11 @@
           <a:lstStyle/>
           <a:p>
             <a:pPr algn="l">
-              <a:defRPr sz="3200" b="1">
-                <a:solidFill>
-                  <a:srgbClr val="0066FF"/>
-                </a:solidFill>
+              <a:defRPr sz="3000" b="1">
+                <a:solidFill>
+                  <a:srgbClr val="2D5AA0"/>
+                </a:solidFill>
+                <a:latin typeface="맑은 고딕"/>
               </a:defRPr>
             </a:pPr>
             <a:r>
@@ -3297,14 +3391,57 @@
       </p:sp>
       <p:sp>
         <p:nvSpPr>
-          <p:cNvPr id="3" name="TextBox 2"/>
+          <p:cNvPr id="3" name="Rectangle 2"/>
+          <p:cNvSpPr/>
+          <p:nvPr/>
+        </p:nvSpPr>
+        <p:spPr>
+          <a:xfrm>
+            <a:off x="457200" y="868680"/>
+            <a:ext cx="11247120" cy="38100"/>
+          </a:xfrm>
+          <a:prstGeom prst="rect">
+            <a:avLst/>
+          </a:prstGeom>
+          <a:solidFill>
+            <a:srgbClr val="2D5AA0"/>
+          </a:solidFill>
+          <a:ln>
+            <a:noFill/>
+          </a:ln>
+        </p:spPr>
+        <p:style>
+          <a:lnRef idx="1">
+            <a:schemeClr val="accent1"/>
+          </a:lnRef>
+          <a:fillRef idx="3">
+            <a:schemeClr val="accent1"/>
+          </a:fillRef>
+          <a:effectRef idx="2">
+            <a:schemeClr val="accent1"/>
+          </a:effectRef>
+          <a:fontRef idx="minor">
+            <a:schemeClr val="lt1"/>
+          </a:fontRef>
+        </p:style>
+        <p:txBody>
+          <a:bodyPr rtlCol="0" anchor="ctr"/>
+          <a:lstStyle/>
+          <a:p>
+            <a:pPr algn="ctr"/>
+          </a:p>
+        </p:txBody>
+      </p:sp>
+      <p:sp>
+        <p:nvSpPr>
+          <p:cNvPr id="4" name="TextBox 3"/>
           <p:cNvSpPr txBox="1"/>
           <p:nvPr/>
         </p:nvSpPr>
         <p:spPr>
           <a:xfrm>
-            <a:off x="731520" y="1280160"/>
-            <a:ext cx="5029200" cy="4572000"/>
+            <a:off x="457200" y="1188720"/>
+            <a:ext cx="5303520" cy="4114800"/>
           </a:xfrm>
           <a:prstGeom prst="rect">
             <a:avLst/>
@@ -3320,8 +3457,9 @@
             <a:pPr algn="l">
               <a:defRPr sz="2000" b="1">
                 <a:solidFill>
-                  <a:srgbClr val="1A1A2E"/>
-                </a:solidFill>
+                  <a:srgbClr val="2D5AA0"/>
+                </a:solidFill>
+                <a:latin typeface="맑은 고딕"/>
               </a:defRPr>
             </a:pPr>
             <a:r>
@@ -3332,8 +3470,9 @@
             <a:pPr algn="l">
               <a:defRPr sz="1600" b="0">
                 <a:solidFill>
-                  <a:srgbClr val="1A1A2E"/>
-                </a:solidFill>
+                  <a:srgbClr val="2C3E50"/>
+                </a:solidFill>
+                <a:latin typeface="맑은 고딕"/>
               </a:defRPr>
             </a:pPr>
           </a:p>
@@ -3341,8 +3480,9 @@
             <a:pPr algn="l">
               <a:defRPr sz="1600" b="1">
                 <a:solidFill>
-                  <a:srgbClr val="0066FF"/>
-                </a:solidFill>
+                  <a:srgbClr val="2D5AA0"/>
+                </a:solidFill>
+                <a:latin typeface="맑은 고딕"/>
               </a:defRPr>
             </a:pPr>
             <a:r>
@@ -3353,8 +3493,9 @@
             <a:pPr algn="l">
               <a:defRPr sz="1600" b="0">
                 <a:solidFill>
-                  <a:srgbClr val="1A1A2E"/>
-                </a:solidFill>
+                  <a:srgbClr val="2C3E50"/>
+                </a:solidFill>
+                <a:latin typeface="맑은 고딕"/>
               </a:defRPr>
             </a:pPr>
           </a:p>
@@ -3362,8 +3503,9 @@
             <a:pPr algn="l">
               <a:defRPr sz="1400" b="0">
                 <a:solidFill>
-                  <a:srgbClr val="1A1A2E"/>
-                </a:solidFill>
+                  <a:srgbClr val="2C3E50"/>
+                </a:solidFill>
+                <a:latin typeface="맑은 고딕"/>
               </a:defRPr>
             </a:pPr>
             <a:r>
@@ -3374,20 +3516,58 @@
             <a:pPr algn="l">
               <a:defRPr sz="1400" b="0">
                 <a:solidFill>
-                  <a:srgbClr val="1A1A2E"/>
-                </a:solidFill>
-              </a:defRPr>
-            </a:pPr>
-            <a:r>
-              <a:t>• SpeedNorm = 1 − (압축모델 spt / 베이스모델 spt)</a:t>
+                  <a:srgbClr val="2C3E50"/>
+                </a:solidFill>
+                <a:latin typeface="맑은 고딕"/>
+              </a:defRPr>
+            </a:pPr>
+            <a:r>
+              <a:t>• SpeedNorm = 1 − (압축 time/tok / 베이스 time/tok)</a:t>
             </a:r>
           </a:p>
           <a:p>
             <a:pPr algn="l">
               <a:defRPr sz="1600" b="0">
                 <a:solidFill>
-                  <a:srgbClr val="1A1A2E"/>
-                </a:solidFill>
+                  <a:srgbClr val="2C3E50"/>
+                </a:solidFill>
+                <a:latin typeface="맑은 고딕"/>
+              </a:defRPr>
+            </a:pPr>
+          </a:p>
+          <a:p>
+            <a:pPr algn="l">
+              <a:defRPr sz="1300" b="0">
+                <a:solidFill>
+                  <a:srgbClr val="7F8C8D"/>
+                </a:solidFill>
+                <a:latin typeface="맑은 고딕"/>
+              </a:defRPr>
+            </a:pPr>
+            <a:r>
+              <a:t>→ 비압축 모델: Score = 0.5 (PerfNorm=1, SpeedNorm=0)</a:t>
+            </a:r>
+          </a:p>
+          <a:p>
+            <a:pPr algn="l">
+              <a:defRPr sz="1400" b="1">
+                <a:solidFill>
+                  <a:srgbClr val="E84D3D"/>
+                </a:solidFill>
+                <a:latin typeface="맑은 고딕"/>
+              </a:defRPr>
+            </a:pPr>
+            <a:r>
+              <a:t>→ 성능 유지 + 속도 향상이 핵심</a:t>
+            </a:r>
+          </a:p>
+          <a:p>
+            <a:pPr algn="l">
+              <a:defRPr sz="1600" b="0">
+                <a:solidFill>
+                  <a:srgbClr val="2C3E50"/>
+                </a:solidFill>
+                <a:latin typeface="맑은 고딕"/>
               </a:defRPr>
             </a:pPr>
           </a:p>
@@ -3395,8 +3575,9 @@
             <a:pPr algn="l">
               <a:defRPr sz="2000" b="1">
                 <a:solidFill>
-                  <a:srgbClr val="1A1A2E"/>
-                </a:solidFill>
+                  <a:srgbClr val="2D5AA0"/>
+                </a:solidFill>
+                <a:latin typeface="맑은 고딕"/>
               </a:defRPr>
             </a:pPr>
             <a:r>
@@ -3407,8 +3588,9 @@
             <a:pPr algn="l">
               <a:defRPr sz="1600" b="0">
                 <a:solidFill>
-                  <a:srgbClr val="1A1A2E"/>
-                </a:solidFill>
+                  <a:srgbClr val="2C3E50"/>
+                </a:solidFill>
+                <a:latin typeface="맑은 고딕"/>
               </a:defRPr>
             </a:pPr>
           </a:p>
@@ -3416,50 +3598,66 @@
             <a:pPr algn="l">
               <a:defRPr sz="1400" b="0">
                 <a:solidFill>
-                  <a:srgbClr val="1A1A2E"/>
-                </a:solidFill>
-              </a:defRPr>
-            </a:pPr>
-            <a:r>
-              <a:t>• 서버 GPU: L4 (24GB, Ada Lovelace)</a:t>
+                  <a:srgbClr val="2C3E50"/>
+                </a:solidFill>
+                <a:latin typeface="맑은 고딕"/>
+              </a:defRPr>
+            </a:pPr>
+            <a:r>
+              <a:t>• 서버 GPU: NVIDIA L4 (24GB, Ada Lovelace)</a:t>
             </a:r>
           </a:p>
           <a:p>
             <a:pPr algn="l">
               <a:defRPr sz="1400" b="0">
                 <a:solidFill>
-                  <a:srgbClr val="1A1A2E"/>
-                </a:solidFill>
-              </a:defRPr>
-            </a:pPr>
-            <a:r>
-              <a:t>• vLLM 기반 추론</a:t>
+                  <a:srgbClr val="2C3E50"/>
+                </a:solidFill>
+                <a:latin typeface="맑은 고딕"/>
+              </a:defRPr>
+            </a:pPr>
+            <a:r>
+              <a:t>• 추론 엔진: vLLM 0.14.1</a:t>
             </a:r>
           </a:p>
           <a:p>
             <a:pPr algn="l">
               <a:defRPr sz="1400" b="0">
                 <a:solidFill>
-                  <a:srgbClr val="1A1A2E"/>
-                </a:solidFill>
-              </a:defRPr>
-            </a:pPr>
-            <a:r>
-              <a:t>• W8A8 → CutlassScaledMM 커널 사용</a:t>
-            </a:r>
-          </a:p>
-        </p:txBody>
-      </p:sp>
-      <p:sp>
-        <p:nvSpPr>
-          <p:cNvPr id="4" name="TextBox 3"/>
+                  <a:srgbClr val="2C3E50"/>
+                </a:solidFill>
+                <a:latin typeface="맑은 고딕"/>
+              </a:defRPr>
+            </a:pPr>
+            <a:r>
+              <a:t>• 베이스 모델: EXAONE-4.0-1.2B (2.4GB, BF16)</a:t>
+            </a:r>
+          </a:p>
+          <a:p>
+            <a:pPr algn="l">
+              <a:defRPr sz="1400" b="0">
+                <a:solidFill>
+                  <a:srgbClr val="2C3E50"/>
+                </a:solidFill>
+                <a:latin typeface="맑은 고딕"/>
+              </a:defRPr>
+            </a:pPr>
+            <a:r>
+              <a:t>• 제출 제한: 압축 10GB / 비압축 32GB</a:t>
+            </a:r>
+          </a:p>
+        </p:txBody>
+      </p:sp>
+      <p:sp>
+        <p:nvSpPr>
+          <p:cNvPr id="5" name="TextBox 4"/>
           <p:cNvSpPr txBox="1"/>
           <p:nvPr/>
         </p:nvSpPr>
         <p:spPr>
           <a:xfrm>
-            <a:off x="6400800" y="1280160"/>
-            <a:ext cx="5029200" cy="4572000"/>
+            <a:off x="6400800" y="1188720"/>
+            <a:ext cx="5303520" cy="2286000"/>
           </a:xfrm>
           <a:prstGeom prst="rect">
             <a:avLst/>
@@ -3475,20 +3673,22 @@
             <a:pPr algn="l">
               <a:defRPr sz="2000" b="1">
                 <a:solidFill>
-                  <a:srgbClr val="1A1A2E"/>
-                </a:solidFill>
-              </a:defRPr>
-            </a:pPr>
-            <a:r>
-              <a:t>벤치마크</a:t>
+                  <a:srgbClr val="2D5AA0"/>
+                </a:solidFill>
+                <a:latin typeface="맑은 고딕"/>
+              </a:defRPr>
+            </a:pPr>
+            <a:r>
+              <a:t>평가 벤치마크</a:t>
             </a:r>
           </a:p>
           <a:p>
             <a:pPr algn="l">
               <a:defRPr sz="1600" b="0">
                 <a:solidFill>
-                  <a:srgbClr val="1A1A2E"/>
-                </a:solidFill>
+                  <a:srgbClr val="2C3E50"/>
+                </a:solidFill>
+                <a:latin typeface="맑은 고딕"/>
               </a:defRPr>
             </a:pPr>
           </a:p>
@@ -3496,77 +3696,97 @@
             <a:pPr algn="l">
               <a:defRPr sz="1400" b="0">
                 <a:solidFill>
-                  <a:srgbClr val="1A1A2E"/>
-                </a:solidFill>
-              </a:defRPr>
-            </a:pPr>
-            <a:r>
-              <a:t>• KMMLU-Pro (MCQA, 2822문항)</a:t>
+                  <a:srgbClr val="2C3E50"/>
+                </a:solidFill>
+                <a:latin typeface="맑은 고딕"/>
+              </a:defRPr>
+            </a:pPr>
+            <a:r>
+              <a:t>• KMMLU-Pro (한국어 MCQA, 2,822문항)</a:t>
             </a:r>
           </a:p>
           <a:p>
             <a:pPr algn="l">
               <a:defRPr sz="1400" b="0">
                 <a:solidFill>
-                  <a:srgbClr val="1A1A2E"/>
-                </a:solidFill>
-              </a:defRPr>
-            </a:pPr>
-            <a:r>
-              <a:t>• KMMLU-Redux (MCQA, 2587문항)</a:t>
+                  <a:srgbClr val="2C3E50"/>
+                </a:solidFill>
+                <a:latin typeface="맑은 고딕"/>
+              </a:defRPr>
+            </a:pPr>
+            <a:r>
+              <a:t>• KMMLU-Redux (한국어 MCQA, 2,587문항)</a:t>
             </a:r>
           </a:p>
           <a:p>
             <a:pPr algn="l">
               <a:defRPr sz="1400" b="0">
                 <a:solidFill>
-                  <a:srgbClr val="1A1A2E"/>
-                </a:solidFill>
-              </a:defRPr>
-            </a:pPr>
-            <a:r>
-              <a:t>• Ko-LongRAG (QA, 600문항)</a:t>
+                  <a:srgbClr val="2C3E50"/>
+                </a:solidFill>
+                <a:latin typeface="맑은 고딕"/>
+              </a:defRPr>
+            </a:pPr>
+            <a:r>
+              <a:t>• Ko-LongRAG (긴 문맥 QA, 600문항)</a:t>
             </a:r>
           </a:p>
           <a:p>
             <a:pPr algn="l">
               <a:defRPr sz="1400" b="0">
                 <a:solidFill>
-                  <a:srgbClr val="1A1A2E"/>
-                </a:solidFill>
-              </a:defRPr>
-            </a:pPr>
-            <a:r>
-              <a:t>• KoMT-Bench (생성, 80문항)</a:t>
+                  <a:srgbClr val="2C3E50"/>
+                </a:solidFill>
+                <a:latin typeface="맑은 고딕"/>
+              </a:defRPr>
+            </a:pPr>
+            <a:r>
+              <a:t>• KoMT-Bench (GPT-4 채점, 80문항)</a:t>
+            </a:r>
+          </a:p>
+        </p:txBody>
+      </p:sp>
+      <p:sp>
+        <p:nvSpPr>
+          <p:cNvPr id="6" name="TextBox 5"/>
+          <p:cNvSpPr txBox="1"/>
+          <p:nvPr/>
+        </p:nvSpPr>
+        <p:spPr>
+          <a:xfrm>
+            <a:off x="6400800" y="3657600"/>
+            <a:ext cx="5303520" cy="2743200"/>
+          </a:xfrm>
+          <a:prstGeom prst="rect">
+            <a:avLst/>
+          </a:prstGeom>
+          <a:noFill/>
+        </p:spPr>
+        <p:txBody>
+          <a:bodyPr wrap="square">
+            <a:spAutoFit/>
+          </a:bodyPr>
+          <a:lstStyle/>
+          <a:p>
+            <a:pPr algn="l">
+              <a:defRPr sz="2000" b="1">
+                <a:solidFill>
+                  <a:srgbClr val="2D5AA0"/>
+                </a:solidFill>
+                <a:latin typeface="맑은 고딕"/>
+              </a:defRPr>
+            </a:pPr>
+            <a:r>
+              <a:t>핵심 제약</a:t>
             </a:r>
           </a:p>
           <a:p>
             <a:pPr algn="l">
               <a:defRPr sz="1600" b="0">
                 <a:solidFill>
-                  <a:srgbClr val="1A1A2E"/>
-                </a:solidFill>
-              </a:defRPr>
-            </a:pPr>
-          </a:p>
-          <a:p>
-            <a:pPr algn="l">
-              <a:defRPr sz="2000" b="1">
-                <a:solidFill>
-                  <a:srgbClr val="1A1A2E"/>
-                </a:solidFill>
-              </a:defRPr>
-            </a:pPr>
-            <a:r>
-              <a:t>핵심 제약</a:t>
-            </a:r>
-          </a:p>
-          <a:p>
-            <a:pPr algn="l">
-              <a:defRPr sz="1600" b="0">
-                <a:solidFill>
-                  <a:srgbClr val="1A1A2E"/>
-                </a:solidFill>
+                  <a:srgbClr val="2C3E50"/>
+                </a:solidFill>
+                <a:latin typeface="맑은 고딕"/>
               </a:defRPr>
             </a:pPr>
           </a:p>
@@ -3574,8 +3794,9 @@
             <a:pPr algn="l">
               <a:defRPr sz="1400" b="0">
                 <a:solidFill>
-                  <a:srgbClr val="1A1A2E"/>
-                </a:solidFill>
+                  <a:srgbClr val="2C3E50"/>
+                </a:solidFill>
+                <a:latin typeface="맑은 고딕"/>
               </a:defRPr>
             </a:pPr>
             <a:r>
@@ -3586,24 +3807,39 @@
             <a:pPr algn="l">
               <a:defRPr sz="1400" b="0">
                 <a:solidFill>
-                  <a:srgbClr val="1A1A2E"/>
-                </a:solidFill>
-              </a:defRPr>
-            </a:pPr>
-            <a:r>
-              <a:t>• 로컬(RTX 4090)과 서버(L4)의 최적 방식 상이</a:t>
+                  <a:srgbClr val="2C3E50"/>
+                </a:solidFill>
+                <a:latin typeface="맑은 고딕"/>
+              </a:defRPr>
+            </a:pPr>
+            <a:r>
+              <a:t>• 로컬(RTX 5060Ti)과 서버(L4)의 최적 방식 상이</a:t>
             </a:r>
           </a:p>
           <a:p>
             <a:pPr algn="l">
               <a:defRPr sz="1400" b="0">
                 <a:solidFill>
-                  <a:srgbClr val="1A1A2E"/>
-                </a:solidFill>
-              </a:defRPr>
-            </a:pPr>
-            <a:r>
-              <a:t>• L4에서 W8A8만 유효 (W8A16, FP8 등 비효율)</a:t>
+                  <a:srgbClr val="2C3E50"/>
+                </a:solidFill>
+                <a:latin typeface="맑은 고딕"/>
+              </a:defRPr>
+            </a:pPr>
+            <a:r>
+              <a:t>• L4에서 W8A8(INT8)만 실질적 속도 향상</a:t>
+            </a:r>
+          </a:p>
+          <a:p>
+            <a:pPr algn="l">
+              <a:defRPr sz="1400" b="0">
+                <a:solidFill>
+                  <a:srgbClr val="2C3E50"/>
+                </a:solidFill>
+                <a:latin typeface="맑은 고딕"/>
+              </a:defRPr>
+            </a:pPr>
+            <a:r>
+              <a:t>• W8A16, FP8 등은 커널 비효율로 속도 이득 미미</a:t>
             </a:r>
           </a:p>
         </p:txBody>
@@ -3634,8 +3870,8 @@
         </p:nvSpPr>
         <p:spPr>
           <a:xfrm>
-            <a:off x="731520" y="365760"/>
-            <a:ext cx="10058400" cy="731520"/>
+            <a:off x="457200" y="274320"/>
+            <a:ext cx="10972800" cy="548640"/>
           </a:xfrm>
           <a:prstGeom prst="rect">
             <a:avLst/>
@@ -3649,29 +3885,109 @@
           <a:lstStyle/>
           <a:p>
             <a:pPr algn="l">
-              <a:defRPr sz="3200" b="1">
-                <a:solidFill>
-                  <a:srgbClr val="0066FF"/>
-                </a:solidFill>
-              </a:defRPr>
-            </a:pPr>
-            <a:r>
-              <a:t>최종 솔루션: QuantizationModifier W8A8</a:t>
+              <a:defRPr sz="3000" b="1">
+                <a:solidFill>
+                  <a:srgbClr val="2D5AA0"/>
+                </a:solidFill>
+                <a:latin typeface="맑은 고딕"/>
+              </a:defRPr>
+            </a:pPr>
+            <a:r>
+              <a:t>최종 솔루션 — QuantizationModifier W8A8</a:t>
+            </a:r>
+          </a:p>
+        </p:txBody>
+      </p:sp>
+      <p:sp>
+        <p:nvSpPr>
+          <p:cNvPr id="3" name="Rectangle 2"/>
+          <p:cNvSpPr/>
+          <p:nvPr/>
+        </p:nvSpPr>
+        <p:spPr>
+          <a:xfrm>
+            <a:off x="457200" y="868680"/>
+            <a:ext cx="11247120" cy="38100"/>
+          </a:xfrm>
+          <a:prstGeom prst="rect">
+            <a:avLst/>
+          </a:prstGeom>
+          <a:solidFill>
+            <a:srgbClr val="2D5AA0"/>
+          </a:solidFill>
+          <a:ln>
+            <a:noFill/>
+          </a:ln>
+        </p:spPr>
+        <p:style>
+          <a:lnRef idx="1">
+            <a:schemeClr val="accent1"/>
+          </a:lnRef>
+          <a:fillRef idx="3">
+            <a:schemeClr val="accent1"/>
+          </a:fillRef>
+          <a:effectRef idx="2">
+            <a:schemeClr val="accent1"/>
+          </a:effectRef>
+          <a:fontRef idx="minor">
+            <a:schemeClr val="lt1"/>
+          </a:fontRef>
+        </p:style>
+        <p:txBody>
+          <a:bodyPr rtlCol="0" anchor="ctr"/>
+          <a:lstStyle/>
+          <a:p>
+            <a:pPr algn="ctr"/>
+          </a:p>
+        </p:txBody>
+      </p:sp>
+      <p:sp>
+        <p:nvSpPr>
+          <p:cNvPr id="4" name="TextBox 3"/>
+          <p:cNvSpPr txBox="1"/>
+          <p:nvPr/>
+        </p:nvSpPr>
+        <p:spPr>
+          <a:xfrm>
+            <a:off x="457200" y="1097280"/>
+            <a:ext cx="5486400" cy="365760"/>
+          </a:xfrm>
+          <a:prstGeom prst="rect">
+            <a:avLst/>
+          </a:prstGeom>
+          <a:noFill/>
+        </p:spPr>
+        <p:txBody>
+          <a:bodyPr wrap="square">
+            <a:spAutoFit/>
+          </a:bodyPr>
+          <a:lstStyle/>
+          <a:p>
+            <a:pPr algn="l">
+              <a:defRPr sz="1800" b="1">
+                <a:solidFill>
+                  <a:srgbClr val="2D5AA0"/>
+                </a:solidFill>
+                <a:latin typeface="맑은 고딕"/>
+              </a:defRPr>
+            </a:pPr>
+            <a:r>
+              <a:t>양자화 설정</a:t>
             </a:r>
           </a:p>
         </p:txBody>
       </p:sp>
       <p:graphicFrame>
         <p:nvGraphicFramePr>
-          <p:cNvPr id="3" name="Table 2"/>
+          <p:cNvPr id="5" name="Table 4"/>
           <p:cNvGraphicFramePr>
             <a:graphicFrameLocks noGrp="1"/>
           </p:cNvGraphicFramePr>
           <p:nvPr/>
         </p:nvGraphicFramePr>
         <p:xfrm>
-          <a:off x="1371600" y="1371600"/>
-          <a:ext cx="9144000" cy="4114800"/>
+          <a:off x="457200" y="1554480"/>
+          <a:ext cx="5486400" cy="3291840"/>
         </p:xfrm>
         <a:graphic>
           <a:graphicData uri="http://schemas.openxmlformats.org/drawingml/2006/table">
@@ -3680,20 +3996,21 @@
                 <a:tableStyleId>{5C22544A-7EE6-4342-B048-85BDC9FD1C3A}</a:tableStyleId>
               </a:tblPr>
               <a:tblGrid>
-                <a:gridCol w="4572000"/>
-                <a:gridCol w="4572000"/>
+                <a:gridCol w="2011680"/>
+                <a:gridCol w="3474720"/>
               </a:tblGrid>
-              <a:tr h="514350">
-                <a:tc>
-                  <a:txBody>
-                    <a:bodyPr/>
-                    <a:lstStyle/>
-                    <a:p>
-                      <a:pPr algn="ctr">
-                        <a:defRPr sz="1300" b="1">
+              <a:tr h="411480">
+                <a:tc>
+                  <a:txBody>
+                    <a:bodyPr/>
+                    <a:lstStyle/>
+                    <a:p>
+                      <a:pPr algn="ctr">
+                        <a:defRPr sz="1200" b="1">
                           <a:solidFill>
                             <a:srgbClr val="FFFFFF"/>
                           </a:solidFill>
+                          <a:latin typeface="맑은 고딕"/>
                         </a:defRPr>
                       </a:pPr>
                       <a:r>
@@ -3703,7 +4020,7 @@
                   </a:txBody>
                   <a:tcPr>
                     <a:solidFill>
-                      <a:srgbClr val="0066FF"/>
+                      <a:srgbClr val="2D5AA0"/>
                     </a:solidFill>
                   </a:tcPr>
                 </a:tc>
@@ -3713,10 +4030,11 @@
                     <a:lstStyle/>
                     <a:p>
                       <a:pPr algn="ctr">
-                        <a:defRPr sz="1300" b="1">
+                        <a:defRPr sz="1200" b="1">
                           <a:solidFill>
                             <a:srgbClr val="FFFFFF"/>
                           </a:solidFill>
+                          <a:latin typeface="맑은 고딕"/>
                         </a:defRPr>
                       </a:pPr>
                       <a:r>
@@ -3726,19 +4044,24 @@
                   </a:txBody>
                   <a:tcPr>
                     <a:solidFill>
-                      <a:srgbClr val="0066FF"/>
+                      <a:srgbClr val="2D5AA0"/>
                     </a:solidFill>
                   </a:tcPr>
                 </a:tc>
               </a:tr>
-              <a:tr h="514350">
-                <a:tc>
-                  <a:txBody>
-                    <a:bodyPr/>
-                    <a:lstStyle/>
-                    <a:p>
-                      <a:pPr algn="ctr">
-                        <a:defRPr sz="1200"/>
+              <a:tr h="411480">
+                <a:tc>
+                  <a:txBody>
+                    <a:bodyPr/>
+                    <a:lstStyle/>
+                    <a:p>
+                      <a:pPr algn="ctr">
+                        <a:defRPr sz="1100">
+                          <a:solidFill>
+                            <a:srgbClr val="2C3E50"/>
+                          </a:solidFill>
+                          <a:latin typeface="맑은 고딕"/>
+                        </a:defRPr>
                       </a:pPr>
                       <a:r>
                         <a:t>양자화 도구</a:t>
@@ -3753,24 +4076,34 @@
                     <a:lstStyle/>
                     <a:p>
                       <a:pPr algn="ctr">
-                        <a:defRPr sz="1200"/>
-                      </a:pPr>
-                      <a:r>
-                        <a:t>llmcompressor QuantizationModifier</a:t>
+                        <a:defRPr sz="1100">
+                          <a:solidFill>
+                            <a:srgbClr val="2C3E50"/>
+                          </a:solidFill>
+                          <a:latin typeface="맑은 고딕"/>
+                        </a:defRPr>
+                      </a:pPr>
+                      <a:r>
+                        <a:t>llmcompressor 0.9.0.1 (QuantizationModifier)</a:t>
                       </a:r>
                     </a:p>
                   </a:txBody>
                   <a:tcPr/>
                 </a:tc>
               </a:tr>
-              <a:tr h="514350">
-                <a:tc>
-                  <a:txBody>
-                    <a:bodyPr/>
-                    <a:lstStyle/>
-                    <a:p>
-                      <a:pPr algn="ctr">
-                        <a:defRPr sz="1200"/>
+              <a:tr h="411480">
+                <a:tc>
+                  <a:txBody>
+                    <a:bodyPr/>
+                    <a:lstStyle/>
+                    <a:p>
+                      <a:pPr algn="ctr">
+                        <a:defRPr sz="1100">
+                          <a:solidFill>
+                            <a:srgbClr val="2C3E50"/>
+                          </a:solidFill>
+                          <a:latin typeface="맑은 고딕"/>
+                        </a:defRPr>
                       </a:pPr>
                       <a:r>
                         <a:t>양자화 스킴</a:t>
@@ -3789,7 +4122,12 @@
                     <a:lstStyle/>
                     <a:p>
                       <a:pPr algn="ctr">
-                        <a:defRPr sz="1200"/>
+                        <a:defRPr sz="1100">
+                          <a:solidFill>
+                            <a:srgbClr val="2C3E50"/>
+                          </a:solidFill>
+                          <a:latin typeface="맑은 고딕"/>
+                        </a:defRPr>
                       </a:pPr>
                       <a:r>
                         <a:t>W8A8 (INT8 weight + INT8 activation)</a:t>
@@ -3803,17 +4141,22 @@
                   </a:tcPr>
                 </a:tc>
               </a:tr>
-              <a:tr h="514350">
-                <a:tc>
-                  <a:txBody>
-                    <a:bodyPr/>
-                    <a:lstStyle/>
-                    <a:p>
-                      <a:pPr algn="ctr">
-                        <a:defRPr sz="1200"/>
-                      </a:pPr>
-                      <a:r>
-                        <a:t>Weight</a:t>
+              <a:tr h="411480">
+                <a:tc>
+                  <a:txBody>
+                    <a:bodyPr/>
+                    <a:lstStyle/>
+                    <a:p>
+                      <a:pPr algn="ctr">
+                        <a:defRPr sz="1100">
+                          <a:solidFill>
+                            <a:srgbClr val="2C3E50"/>
+                          </a:solidFill>
+                          <a:latin typeface="맑은 고딕"/>
+                        </a:defRPr>
+                      </a:pPr>
+                      <a:r>
+                        <a:t>Weight 양자화</a:t>
                       </a:r>
                     </a:p>
                   </a:txBody>
@@ -3825,7 +4168,12 @@
                     <a:lstStyle/>
                     <a:p>
                       <a:pPr algn="ctr">
-                        <a:defRPr sz="1200"/>
+                        <a:defRPr sz="1100">
+                          <a:solidFill>
+                            <a:srgbClr val="2C3E50"/>
+                          </a:solidFill>
+                          <a:latin typeface="맑은 고딕"/>
+                        </a:defRPr>
                       </a:pPr>
                       <a:r>
                         <a:t>per-channel, symmetric, static (minmax)</a:t>
@@ -3835,17 +4183,22 @@
                   <a:tcPr/>
                 </a:tc>
               </a:tr>
-              <a:tr h="514350">
-                <a:tc>
-                  <a:txBody>
-                    <a:bodyPr/>
-                    <a:lstStyle/>
-                    <a:p>
-                      <a:pPr algn="ctr">
-                        <a:defRPr sz="1200"/>
-                      </a:pPr>
-                      <a:r>
-                        <a:t>Activation</a:t>
+              <a:tr h="411480">
+                <a:tc>
+                  <a:txBody>
+                    <a:bodyPr/>
+                    <a:lstStyle/>
+                    <a:p>
+                      <a:pPr algn="ctr">
+                        <a:defRPr sz="1100">
+                          <a:solidFill>
+                            <a:srgbClr val="2C3E50"/>
+                          </a:solidFill>
+                          <a:latin typeface="맑은 고딕"/>
+                        </a:defRPr>
+                      </a:pPr>
+                      <a:r>
+                        <a:t>Activation 양자화</a:t>
                       </a:r>
                     </a:p>
                   </a:txBody>
@@ -3861,7 +4214,12 @@
                     <a:lstStyle/>
                     <a:p>
                       <a:pPr algn="ctr">
-                        <a:defRPr sz="1200"/>
+                        <a:defRPr sz="1100">
+                          <a:solidFill>
+                            <a:srgbClr val="2C3E50"/>
+                          </a:solidFill>
+                          <a:latin typeface="맑은 고딕"/>
+                        </a:defRPr>
                       </a:pPr>
                       <a:r>
                         <a:t>per-token, symmetric, dynamic</a:t>
@@ -3875,49 +4233,64 @@
                   </a:tcPr>
                 </a:tc>
               </a:tr>
-              <a:tr h="514350">
-                <a:tc>
-                  <a:txBody>
-                    <a:bodyPr/>
-                    <a:lstStyle/>
-                    <a:p>
-                      <a:pPr algn="ctr">
-                        <a:defRPr sz="1200"/>
+              <a:tr h="411480">
+                <a:tc>
+                  <a:txBody>
+                    <a:bodyPr/>
+                    <a:lstStyle/>
+                    <a:p>
+                      <a:pPr algn="ctr">
+                        <a:defRPr sz="1100">
+                          <a:solidFill>
+                            <a:srgbClr val="2C3E50"/>
+                          </a:solidFill>
+                          <a:latin typeface="맑은 고딕"/>
+                        </a:defRPr>
+                      </a:pPr>
+                      <a:r>
+                        <a:t>대상 레이어</a:t>
+                      </a:r>
+                    </a:p>
+                  </a:txBody>
+                  <a:tcPr/>
+                </a:tc>
+                <a:tc>
+                  <a:txBody>
+                    <a:bodyPr/>
+                    <a:lstStyle/>
+                    <a:p>
+                      <a:pPr algn="ctr">
+                        <a:defRPr sz="1100">
+                          <a:solidFill>
+                            <a:srgbClr val="2C3E50"/>
+                          </a:solidFill>
+                          <a:latin typeface="맑은 고딕"/>
+                        </a:defRPr>
+                      </a:pPr>
+                      <a:r>
+                        <a:t>모든 Linear</a:t>
+                      </a:r>
+                    </a:p>
+                  </a:txBody>
+                  <a:tcPr/>
+                </a:tc>
+              </a:tr>
+              <a:tr h="411480">
+                <a:tc>
+                  <a:txBody>
+                    <a:bodyPr/>
+                    <a:lstStyle/>
+                    <a:p>
+                      <a:pPr algn="ctr">
+                        <a:defRPr sz="1100">
+                          <a:solidFill>
+                            <a:srgbClr val="2C3E50"/>
+                          </a:solidFill>
+                          <a:latin typeface="맑은 고딕"/>
+                        </a:defRPr>
                       </a:pPr>
                       <a:r>
                         <a:t>제외 레이어</a:t>
-                      </a:r>
-                    </a:p>
-                  </a:txBody>
-                  <a:tcPr/>
-                </a:tc>
-                <a:tc>
-                  <a:txBody>
-                    <a:bodyPr/>
-                    <a:lstStyle/>
-                    <a:p>
-                      <a:pPr algn="ctr">
-                        <a:defRPr sz="1200"/>
-                      </a:pPr>
-                      <a:r>
-                        <a:t>embed_tokens, lm_head</a:t>
-                      </a:r>
-                    </a:p>
-                  </a:txBody>
-                  <a:tcPr/>
-                </a:tc>
-              </a:tr>
-              <a:tr h="514350">
-                <a:tc>
-                  <a:txBody>
-                    <a:bodyPr/>
-                    <a:lstStyle/>
-                    <a:p>
-                      <a:pPr algn="ctr">
-                        <a:defRPr sz="1200"/>
-                      </a:pPr>
-                      <a:r>
-                        <a:t>max_position_embeddings</a:t>
                       </a:r>
                     </a:p>
                   </a:txBody>
@@ -3933,10 +4306,15 @@
                     <a:lstStyle/>
                     <a:p>
                       <a:pPr algn="ctr">
-                        <a:defRPr sz="1200"/>
-                      </a:pPr>
-                      <a:r>
-                        <a:t>65536 → 16384</a:t>
+                        <a:defRPr sz="1100">
+                          <a:solidFill>
+                            <a:srgbClr val="2C3E50"/>
+                          </a:solidFill>
+                          <a:latin typeface="맑은 고딕"/>
+                        </a:defRPr>
+                      </a:pPr>
+                      <a:r>
+                        <a:t>embed_tokens, lm_head</a:t>
                       </a:r>
                     </a:p>
                   </a:txBody>
@@ -3947,14 +4325,19 @@
                   </a:tcPr>
                 </a:tc>
               </a:tr>
-              <a:tr h="514350">
-                <a:tc>
-                  <a:txBody>
-                    <a:bodyPr/>
-                    <a:lstStyle/>
-                    <a:p>
-                      <a:pPr algn="ctr">
-                        <a:defRPr sz="1200"/>
+              <a:tr h="411480">
+                <a:tc>
+                  <a:txBody>
+                    <a:bodyPr/>
+                    <a:lstStyle/>
+                    <a:p>
+                      <a:pPr algn="ctr">
+                        <a:defRPr sz="1100">
+                          <a:solidFill>
+                            <a:srgbClr val="2C3E50"/>
+                          </a:solidFill>
+                          <a:latin typeface="맑은 고딕"/>
+                        </a:defRPr>
                       </a:pPr>
                       <a:r>
                         <a:t>캘리브레이션</a:t>
@@ -3969,10 +4352,15 @@
                     <a:lstStyle/>
                     <a:p>
                       <a:pPr algn="ctr">
-                        <a:defRPr sz="1200"/>
-                      </a:pPr>
-                      <a:r>
-                        <a:t>MANTA-1M, 2048 샘플, seq=2048</a:t>
+                        <a:defRPr sz="1100">
+                          <a:solidFill>
+                            <a:srgbClr val="2C3E50"/>
+                          </a:solidFill>
+                          <a:latin typeface="맑은 고딕"/>
+                        </a:defRPr>
+                      </a:pPr>
+                      <a:r>
+                        <a:t>MANTA-1M 2,048 샘플, seq_len=2048</a:t>
                       </a:r>
                     </a:p>
                   </a:txBody>
@@ -3985,14 +4373,14 @@
       </p:graphicFrame>
       <p:sp>
         <p:nvSpPr>
-          <p:cNvPr id="4" name="TextBox 3"/>
+          <p:cNvPr id="6" name="TextBox 5"/>
           <p:cNvSpPr txBox="1"/>
           <p:nvPr/>
         </p:nvSpPr>
         <p:spPr>
           <a:xfrm>
-            <a:off x="914400" y="5669280"/>
-            <a:ext cx="10058400" cy="914400"/>
+            <a:off x="6400800" y="1097280"/>
+            <a:ext cx="5029200" cy="365760"/>
           </a:xfrm>
           <a:prstGeom prst="rect">
             <a:avLst/>
@@ -4006,35 +4394,267 @@
           <a:lstStyle/>
           <a:p>
             <a:pPr algn="l">
-              <a:defRPr sz="1400" b="0">
-                <a:solidFill>
-                  <a:srgbClr val="1A1A2E"/>
-                </a:solidFill>
-              </a:defRPr>
-            </a:pPr>
-          </a:p>
+              <a:defRPr sz="1800" b="1">
+                <a:solidFill>
+                  <a:srgbClr val="2D5AA0"/>
+                </a:solidFill>
+                <a:latin typeface="맑은 고딕"/>
+              </a:defRPr>
+            </a:pPr>
+            <a:r>
+              <a:t>Context Window 최적화</a:t>
+            </a:r>
+          </a:p>
+        </p:txBody>
+      </p:sp>
+      <p:sp>
+        <p:nvSpPr>
+          <p:cNvPr id="7" name="TextBox 6"/>
+          <p:cNvSpPr txBox="1"/>
+          <p:nvPr/>
+        </p:nvSpPr>
+        <p:spPr>
+          <a:xfrm>
+            <a:off x="6400800" y="1554480"/>
+            <a:ext cx="5029200" cy="1828800"/>
+          </a:xfrm>
+          <a:prstGeom prst="rect">
+            <a:avLst/>
+          </a:prstGeom>
+          <a:noFill/>
+        </p:spPr>
+        <p:txBody>
+          <a:bodyPr wrap="square">
+            <a:spAutoFit/>
+          </a:bodyPr>
+          <a:lstStyle/>
           <a:p>
             <a:pPr algn="l">
               <a:defRPr sz="1400" b="0">
                 <a:solidFill>
-                  <a:srgbClr val="00AA55"/>
-                </a:solidFill>
-              </a:defRPr>
-            </a:pPr>
-            <a:r>
-              <a:t>✓ Data-Free 양자화 (Hessian 계산 없음) → 캘리브레이션 과적합 방지</a:t>
+                  <a:srgbClr val="2C3E50"/>
+                </a:solidFill>
+                <a:latin typeface="맑은 고딕"/>
+              </a:defRPr>
+            </a:pPr>
+          </a:p>
+          <a:p>
+            <a:pPr algn="l">
+              <a:defRPr sz="1400" b="1">
+                <a:solidFill>
+                  <a:srgbClr val="2C3E50"/>
+                </a:solidFill>
+                <a:latin typeface="맑은 고딕"/>
+              </a:defRPr>
+            </a:pPr>
+            <a:r>
+              <a:t>max_position_embeddings:</a:t>
+            </a:r>
+          </a:p>
+          <a:p>
+            <a:pPr algn="l">
+              <a:defRPr sz="1600" b="1">
+                <a:solidFill>
+                  <a:srgbClr val="E84D3D"/>
+                </a:solidFill>
+                <a:latin typeface="맑은 고딕"/>
+              </a:defRPr>
+            </a:pPr>
+            <a:r>
+              <a:t>65,536 → 16,384 (4배 축소)</a:t>
+            </a:r>
+          </a:p>
+          <a:p>
+            <a:pPr algn="l">
+              <a:defRPr sz="1600" b="0">
+                <a:solidFill>
+                  <a:srgbClr val="2C3E50"/>
+                </a:solidFill>
+                <a:latin typeface="맑은 고딕"/>
+              </a:defRPr>
+            </a:pPr>
+          </a:p>
+          <a:p>
+            <a:pPr algn="l">
+              <a:defRPr sz="1300" b="0">
+                <a:solidFill>
+                  <a:srgbClr val="2C3E50"/>
+                </a:solidFill>
+                <a:latin typeface="맑은 고딕"/>
+              </a:defRPr>
+            </a:pPr>
+            <a:r>
+              <a:t>• KV Cache 메모리 4배 절감</a:t>
+            </a:r>
+          </a:p>
+          <a:p>
+            <a:pPr algn="l">
+              <a:defRPr sz="1300" b="0">
+                <a:solidFill>
+                  <a:srgbClr val="2C3E50"/>
+                </a:solidFill>
+                <a:latin typeface="맑은 고딕"/>
+              </a:defRPr>
+            </a:pPr>
+            <a:r>
+              <a:t>• 더 큰 배치 처리 → 추론 속도 향상</a:t>
+            </a:r>
+          </a:p>
+          <a:p>
+            <a:pPr algn="l">
+              <a:defRPr sz="1300" b="0">
+                <a:solidFill>
+                  <a:srgbClr val="27AE60"/>
+                </a:solidFill>
+                <a:latin typeface="맑은 고딕"/>
+              </a:defRPr>
+            </a:pPr>
+            <a:r>
+              <a:t>• 벤치마크 최대 입력 ~16k → 품질 손실 없음</a:t>
+            </a:r>
+          </a:p>
+        </p:txBody>
+      </p:sp>
+      <p:sp>
+        <p:nvSpPr>
+          <p:cNvPr id="8" name="TextBox 7"/>
+          <p:cNvSpPr txBox="1"/>
+          <p:nvPr/>
+        </p:nvSpPr>
+        <p:spPr>
+          <a:xfrm>
+            <a:off x="6400800" y="3657600"/>
+            <a:ext cx="5029200" cy="365760"/>
+          </a:xfrm>
+          <a:prstGeom prst="rect">
+            <a:avLst/>
+          </a:prstGeom>
+          <a:noFill/>
+        </p:spPr>
+        <p:txBody>
+          <a:bodyPr wrap="square">
+            <a:spAutoFit/>
+          </a:bodyPr>
+          <a:lstStyle/>
+          <a:p>
+            <a:pPr algn="l">
+              <a:defRPr sz="1800" b="1">
+                <a:solidFill>
+                  <a:srgbClr val="2D5AA0"/>
+                </a:solidFill>
+                <a:latin typeface="맑은 고딕"/>
+              </a:defRPr>
+            </a:pPr>
+            <a:r>
+              <a:t>QuantMod vs GPTQ 비교</a:t>
+            </a:r>
+          </a:p>
+        </p:txBody>
+      </p:sp>
+      <p:sp>
+        <p:nvSpPr>
+          <p:cNvPr id="9" name="TextBox 8"/>
+          <p:cNvSpPr txBox="1"/>
+          <p:nvPr/>
+        </p:nvSpPr>
+        <p:spPr>
+          <a:xfrm>
+            <a:off x="6400800" y="4114800"/>
+            <a:ext cx="5029200" cy="2286000"/>
+          </a:xfrm>
+          <a:prstGeom prst="rect">
+            <a:avLst/>
+          </a:prstGeom>
+          <a:noFill/>
+        </p:spPr>
+        <p:txBody>
+          <a:bodyPr wrap="square">
+            <a:spAutoFit/>
+          </a:bodyPr>
+          <a:lstStyle/>
+          <a:p>
+            <a:pPr algn="l">
+              <a:defRPr sz="1300" b="0">
+                <a:solidFill>
+                  <a:srgbClr val="2C3E50"/>
+                </a:solidFill>
+                <a:latin typeface="맑은 고딕"/>
+              </a:defRPr>
+            </a:pPr>
+          </a:p>
+          <a:p>
+            <a:pPr algn="l">
+              <a:defRPr sz="1400" b="1">
+                <a:solidFill>
+                  <a:srgbClr val="27AE60"/>
+                </a:solidFill>
+                <a:latin typeface="맑은 고딕"/>
+              </a:defRPr>
+            </a:pPr>
+            <a:r>
+              <a:t>QuantMod (min-max): 0.6295 ← 최종 선택</a:t>
             </a:r>
           </a:p>
           <a:p>
             <a:pPr algn="l">
               <a:defRPr sz="1400" b="0">
                 <a:solidFill>
-                  <a:srgbClr val="00AA55"/>
-                </a:solidFill>
-              </a:defRPr>
-            </a:pPr>
-            <a:r>
-              <a:t>✓ Dynamic activation → 입력별 최적 스케일 → 품질 유지</a:t>
+                  <a:srgbClr val="2C3E50"/>
+                </a:solidFill>
+                <a:latin typeface="맑은 고딕"/>
+              </a:defRPr>
+            </a:pPr>
+            <a:r>
+              <a:t>GPTQ (Hessian): 0.6208</a:t>
+            </a:r>
+          </a:p>
+          <a:p>
+            <a:pPr algn="l">
+              <a:defRPr sz="1600" b="0">
+                <a:solidFill>
+                  <a:srgbClr val="2C3E50"/>
+                </a:solidFill>
+                <a:latin typeface="맑은 고딕"/>
+              </a:defRPr>
+            </a:pPr>
+          </a:p>
+          <a:p>
+            <a:pPr algn="l">
+              <a:defRPr sz="1300" b="1">
+                <a:solidFill>
+                  <a:srgbClr val="E84D3D"/>
+                </a:solidFill>
+                <a:latin typeface="맑은 고딕"/>
+              </a:defRPr>
+            </a:pPr>
+            <a:r>
+              <a:t>→ 역설적으로 단순한 방식이 더 높은 점수</a:t>
+            </a:r>
+          </a:p>
+          <a:p>
+            <a:pPr algn="l">
+              <a:defRPr sz="1200" b="0">
+                <a:solidFill>
+                  <a:srgbClr val="7F8C8D"/>
+                </a:solidFill>
+                <a:latin typeface="맑은 고딕"/>
+              </a:defRPr>
+            </a:pPr>
+            <a:r>
+              <a:t>• GPTQ Hessian이 캘리브레이션 데이터에 과적합</a:t>
+            </a:r>
+          </a:p>
+          <a:p>
+            <a:pPr algn="l">
+              <a:defRPr sz="1200" b="0">
+                <a:solidFill>
+                  <a:srgbClr val="7F8C8D"/>
+                </a:solidFill>
+                <a:latin typeface="맑은 고딕"/>
+              </a:defRPr>
+            </a:pPr>
+            <a:r>
+              <a:t>• min-max 방식이 분포 변화에 더 robust</a:t>
             </a:r>
           </a:p>
         </p:txBody>
@@ -4065,8 +4685,8 @@
         </p:nvSpPr>
         <p:spPr>
           <a:xfrm>
-            <a:off x="731520" y="365760"/>
-            <a:ext cx="10058400" cy="731520"/>
+            <a:off x="457200" y="274320"/>
+            <a:ext cx="10972800" cy="548640"/>
           </a:xfrm>
           <a:prstGeom prst="rect">
             <a:avLst/>
@@ -4080,29 +4700,73 @@
           <a:lstStyle/>
           <a:p>
             <a:pPr algn="l">
-              <a:defRPr sz="3200" b="1">
-                <a:solidFill>
-                  <a:srgbClr val="0066FF"/>
-                </a:solidFill>
-              </a:defRPr>
-            </a:pPr>
-            <a:r>
-              <a:t>양자화 방식별 서버 제출 결과</a:t>
-            </a:r>
+              <a:defRPr sz="3000" b="1">
+                <a:solidFill>
+                  <a:srgbClr val="2D5AA0"/>
+                </a:solidFill>
+                <a:latin typeface="맑은 고딕"/>
+              </a:defRPr>
+            </a:pPr>
+            <a:r>
+              <a:t>양자화 방식별 서버 결과 비교</a:t>
+            </a:r>
+          </a:p>
+        </p:txBody>
+      </p:sp>
+      <p:sp>
+        <p:nvSpPr>
+          <p:cNvPr id="3" name="Rectangle 2"/>
+          <p:cNvSpPr/>
+          <p:nvPr/>
+        </p:nvSpPr>
+        <p:spPr>
+          <a:xfrm>
+            <a:off x="457200" y="868680"/>
+            <a:ext cx="11247120" cy="38100"/>
+          </a:xfrm>
+          <a:prstGeom prst="rect">
+            <a:avLst/>
+          </a:prstGeom>
+          <a:solidFill>
+            <a:srgbClr val="2D5AA0"/>
+          </a:solidFill>
+          <a:ln>
+            <a:noFill/>
+          </a:ln>
+        </p:spPr>
+        <p:style>
+          <a:lnRef idx="1">
+            <a:schemeClr val="accent1"/>
+          </a:lnRef>
+          <a:fillRef idx="3">
+            <a:schemeClr val="accent1"/>
+          </a:fillRef>
+          <a:effectRef idx="2">
+            <a:schemeClr val="accent1"/>
+          </a:effectRef>
+          <a:fontRef idx="minor">
+            <a:schemeClr val="lt1"/>
+          </a:fontRef>
+        </p:style>
+        <p:txBody>
+          <a:bodyPr rtlCol="0" anchor="ctr"/>
+          <a:lstStyle/>
+          <a:p>
+            <a:pPr algn="ctr"/>
           </a:p>
         </p:txBody>
       </p:sp>
       <p:graphicFrame>
         <p:nvGraphicFramePr>
-          <p:cNvPr id="3" name="Table 2"/>
+          <p:cNvPr id="4" name="Table 3"/>
           <p:cNvGraphicFramePr>
             <a:graphicFrameLocks noGrp="1"/>
           </p:cNvGraphicFramePr>
           <p:nvPr/>
         </p:nvGraphicFramePr>
         <p:xfrm>
-          <a:off x="1371600" y="1371600"/>
-          <a:ext cx="9144000" cy="3200400"/>
+          <a:off x="457200" y="1097280"/>
+          <a:ext cx="11247120" cy="4572000"/>
         </p:xfrm>
         <a:graphic>
           <a:graphicData uri="http://schemas.openxmlformats.org/drawingml/2006/table">
@@ -4111,31 +4775,34 @@
                 <a:tableStyleId>{5C22544A-7EE6-4342-B048-85BDC9FD1C3A}</a:tableStyleId>
               </a:tblPr>
               <a:tblGrid>
-                <a:gridCol w="3048000"/>
-                <a:gridCol w="3048000"/>
-                <a:gridCol w="3048000"/>
+                <a:gridCol w="640080"/>
+                <a:gridCol w="3840480"/>
+                <a:gridCol w="1371600"/>
+                <a:gridCol w="1097280"/>
+                <a:gridCol w="4297680"/>
               </a:tblGrid>
-              <a:tr h="457200">
-                <a:tc>
-                  <a:txBody>
-                    <a:bodyPr/>
-                    <a:lstStyle/>
-                    <a:p>
-                      <a:pPr algn="ctr">
-                        <a:defRPr sz="1300" b="1">
+              <a:tr h="351692">
+                <a:tc>
+                  <a:txBody>
+                    <a:bodyPr/>
+                    <a:lstStyle/>
+                    <a:p>
+                      <a:pPr algn="ctr">
+                        <a:defRPr sz="1200" b="1">
                           <a:solidFill>
                             <a:srgbClr val="FFFFFF"/>
                           </a:solidFill>
-                        </a:defRPr>
-                      </a:pPr>
-                      <a:r>
-                        <a:t>방법</a:t>
+                          <a:latin typeface="맑은 고딕"/>
+                        </a:defRPr>
+                      </a:pPr>
+                      <a:r>
+                        <a:t>순위</a:t>
                       </a:r>
                     </a:p>
                   </a:txBody>
                   <a:tcPr>
                     <a:solidFill>
-                      <a:srgbClr val="0066FF"/>
+                      <a:srgbClr val="2D5AA0"/>
                     </a:solidFill>
                   </a:tcPr>
                 </a:tc>
@@ -4145,20 +4812,21 @@
                     <a:lstStyle/>
                     <a:p>
                       <a:pPr algn="ctr">
-                        <a:defRPr sz="1300" b="1">
+                        <a:defRPr sz="1200" b="1">
                           <a:solidFill>
                             <a:srgbClr val="FFFFFF"/>
                           </a:solidFill>
-                        </a:defRPr>
-                      </a:pPr>
-                      <a:r>
-                        <a:t>서버 Score</a:t>
+                          <a:latin typeface="맑은 고딕"/>
+                        </a:defRPr>
+                      </a:pPr>
+                      <a:r>
+                        <a:t>방법</a:t>
                       </a:r>
                     </a:p>
                   </a:txBody>
                   <a:tcPr>
                     <a:solidFill>
-                      <a:srgbClr val="0066FF"/>
+                      <a:srgbClr val="2D5AA0"/>
                     </a:solidFill>
                   </a:tcPr>
                 </a:tc>
@@ -4168,82 +4836,211 @@
                     <a:lstStyle/>
                     <a:p>
                       <a:pPr algn="ctr">
-                        <a:defRPr sz="1300" b="1">
+                        <a:defRPr sz="1200" b="1">
                           <a:solidFill>
                             <a:srgbClr val="FFFFFF"/>
                           </a:solidFill>
-                        </a:defRPr>
-                      </a:pPr>
-                      <a:r>
-                        <a:t>비고</a:t>
+                          <a:latin typeface="맑은 고딕"/>
+                        </a:defRPr>
+                      </a:pPr>
+                      <a:r>
+                        <a:t>서버 Score</a:t>
                       </a:r>
                     </a:p>
                   </a:txBody>
                   <a:tcPr>
                     <a:solidFill>
-                      <a:srgbClr val="0066FF"/>
+                      <a:srgbClr val="2D5AA0"/>
                     </a:solidFill>
                   </a:tcPr>
                 </a:tc>
+                <a:tc>
+                  <a:txBody>
+                    <a:bodyPr/>
+                    <a:lstStyle/>
+                    <a:p>
+                      <a:pPr algn="ctr">
+                        <a:defRPr sz="1200" b="1">
+                          <a:solidFill>
+                            <a:srgbClr val="FFFFFF"/>
+                          </a:solidFill>
+                          <a:latin typeface="맑은 고딕"/>
+                        </a:defRPr>
+                      </a:pPr>
+                      <a:r>
+                        <a:t>모델 크기</a:t>
+                      </a:r>
+                    </a:p>
+                  </a:txBody>
+                  <a:tcPr>
+                    <a:solidFill>
+                      <a:srgbClr val="2D5AA0"/>
+                    </a:solidFill>
+                  </a:tcPr>
+                </a:tc>
+                <a:tc>
+                  <a:txBody>
+                    <a:bodyPr/>
+                    <a:lstStyle/>
+                    <a:p>
+                      <a:pPr algn="ctr">
+                        <a:defRPr sz="1200" b="1">
+                          <a:solidFill>
+                            <a:srgbClr val="FFFFFF"/>
+                          </a:solidFill>
+                          <a:latin typeface="맑은 고딕"/>
+                        </a:defRPr>
+                      </a:pPr>
+                      <a:r>
+                        <a:t>비고</a:t>
+                      </a:r>
+                    </a:p>
+                  </a:txBody>
+                  <a:tcPr>
+                    <a:solidFill>
+                      <a:srgbClr val="2D5AA0"/>
+                    </a:solidFill>
+                  </a:tcPr>
+                </a:tc>
               </a:tr>
-              <a:tr h="457200">
-                <a:tc>
-                  <a:txBody>
-                    <a:bodyPr/>
-                    <a:lstStyle/>
-                    <a:p>
-                      <a:pPr algn="ctr">
-                        <a:defRPr sz="1200"/>
-                      </a:pPr>
-                      <a:r>
-                        <a:t>QuantizationModifier W8A8</a:t>
-                      </a:r>
-                    </a:p>
-                  </a:txBody>
-                  <a:tcPr/>
-                </a:tc>
-                <a:tc>
-                  <a:txBody>
-                    <a:bodyPr/>
-                    <a:lstStyle/>
-                    <a:p>
-                      <a:pPr algn="ctr">
-                        <a:defRPr sz="1200"/>
-                      </a:pPr>
-                      <a:r>
-                        <a:t>0.6295 ✅</a:t>
-                      </a:r>
-                    </a:p>
-                  </a:txBody>
-                  <a:tcPr/>
-                </a:tc>
-                <a:tc>
-                  <a:txBody>
-                    <a:bodyPr/>
-                    <a:lstStyle/>
-                    <a:p>
-                      <a:pPr algn="ctr">
-                        <a:defRPr sz="1200"/>
-                      </a:pPr>
-                      <a:r>
-                        <a:t>최종 선택</a:t>
-                      </a:r>
-                    </a:p>
-                  </a:txBody>
-                  <a:tcPr/>
+              <a:tr h="351692">
+                <a:tc>
+                  <a:txBody>
+                    <a:bodyPr/>
+                    <a:lstStyle/>
+                    <a:p>
+                      <a:pPr algn="ctr">
+                        <a:defRPr sz="1100" b="1">
+                          <a:solidFill>
+                            <a:srgbClr val="2D5AA0"/>
+                          </a:solidFill>
+                          <a:latin typeface="맑은 고딕"/>
+                        </a:defRPr>
+                      </a:pPr>
+                      <a:r>
+                        <a:t>1</a:t>
+                      </a:r>
+                    </a:p>
+                  </a:txBody>
+                  <a:tcPr>
+                    <a:solidFill>
+                      <a:srgbClr val="E8F4FD"/>
+                    </a:solidFill>
+                  </a:tcPr>
+                </a:tc>
+                <a:tc>
+                  <a:txBody>
+                    <a:bodyPr/>
+                    <a:lstStyle/>
+                    <a:p>
+                      <a:pPr algn="ctr">
+                        <a:defRPr sz="1100" b="1">
+                          <a:solidFill>
+                            <a:srgbClr val="2D5AA0"/>
+                          </a:solidFill>
+                          <a:latin typeface="맑은 고딕"/>
+                        </a:defRPr>
+                      </a:pPr>
+                      <a:r>
+                        <a:t>QuantMod W8A8 + ctx16k</a:t>
+                      </a:r>
+                    </a:p>
+                  </a:txBody>
+                  <a:tcPr>
+                    <a:solidFill>
+                      <a:srgbClr val="E8F4FD"/>
+                    </a:solidFill>
+                  </a:tcPr>
+                </a:tc>
+                <a:tc>
+                  <a:txBody>
+                    <a:bodyPr/>
+                    <a:lstStyle/>
+                    <a:p>
+                      <a:pPr algn="ctr">
+                        <a:defRPr sz="1100" b="1">
+                          <a:solidFill>
+                            <a:srgbClr val="2D5AA0"/>
+                          </a:solidFill>
+                          <a:latin typeface="맑은 고딕"/>
+                        </a:defRPr>
+                      </a:pPr>
+                      <a:r>
+                        <a:t>0.6295</a:t>
+                      </a:r>
+                    </a:p>
+                  </a:txBody>
+                  <a:tcPr>
+                    <a:solidFill>
+                      <a:srgbClr val="E8F4FD"/>
+                    </a:solidFill>
+                  </a:tcPr>
+                </a:tc>
+                <a:tc>
+                  <a:txBody>
+                    <a:bodyPr/>
+                    <a:lstStyle/>
+                    <a:p>
+                      <a:pPr algn="ctr">
+                        <a:defRPr sz="1100" b="1">
+                          <a:solidFill>
+                            <a:srgbClr val="2D5AA0"/>
+                          </a:solidFill>
+                          <a:latin typeface="맑은 고딕"/>
+                        </a:defRPr>
+                      </a:pPr>
+                      <a:r>
+                        <a:t>1.4 GB</a:t>
+                      </a:r>
+                    </a:p>
+                  </a:txBody>
+                  <a:tcPr>
+                    <a:solidFill>
+                      <a:srgbClr val="E8F4FD"/>
+                    </a:solidFill>
+                  </a:tcPr>
+                </a:tc>
+                <a:tc>
+                  <a:txBody>
+                    <a:bodyPr/>
+                    <a:lstStyle/>
+                    <a:p>
+                      <a:pPr algn="ctr">
+                        <a:defRPr sz="1100" b="1">
+                          <a:solidFill>
+                            <a:srgbClr val="2D5AA0"/>
+                          </a:solidFill>
+                          <a:latin typeface="맑은 고딕"/>
+                        </a:defRPr>
+                      </a:pPr>
+                      <a:r>
+                        <a:t>최종 제출</a:t>
+                      </a:r>
+                    </a:p>
+                  </a:txBody>
+                  <a:tcPr>
+                    <a:solidFill>
+                      <a:srgbClr val="E8F4FD"/>
+                    </a:solidFill>
+                  </a:tcPr>
                 </a:tc>
               </a:tr>
-              <a:tr h="457200">
-                <a:tc>
-                  <a:txBody>
-                    <a:bodyPr/>
-                    <a:lstStyle/>
-                    <a:p>
-                      <a:pPr algn="ctr">
-                        <a:defRPr sz="1200"/>
-                      </a:pPr>
-                      <a:r>
-                        <a:t>GPTQ W8A8 + SparseGPT 10%</a:t>
+              <a:tr h="351692">
+                <a:tc>
+                  <a:txBody>
+                    <a:bodyPr/>
+                    <a:lstStyle/>
+                    <a:p>
+                      <a:pPr algn="ctr">
+                        <a:defRPr sz="1100">
+                          <a:solidFill>
+                            <a:srgbClr val="2C3E50"/>
+                          </a:solidFill>
+                          <a:latin typeface="맑은 고딕"/>
+                        </a:defRPr>
+                      </a:pPr>
+                      <a:r>
+                        <a:t>2</a:t>
                       </a:r>
                     </a:p>
                   </a:txBody>
@@ -4259,10 +5056,15 @@
                     <a:lstStyle/>
                     <a:p>
                       <a:pPr algn="ctr">
-                        <a:defRPr sz="1200"/>
-                      </a:pPr>
-                      <a:r>
-                        <a:t>0.6246</a:t>
+                        <a:defRPr sz="1100">
+                          <a:solidFill>
+                            <a:srgbClr val="2C3E50"/>
+                          </a:solidFill>
+                          <a:latin typeface="맑은 고딕"/>
+                        </a:defRPr>
+                      </a:pPr>
+                      <a:r>
+                        <a:t>GPTQ W8A8 + SparseGPT 10%</a:t>
                       </a:r>
                     </a:p>
                   </a:txBody>
@@ -4278,10 +5080,15 @@
                     <a:lstStyle/>
                     <a:p>
                       <a:pPr algn="ctr">
-                        <a:defRPr sz="1200"/>
-                      </a:pPr>
-                      <a:r>
-                        <a:t>비정형 스파시티</a:t>
+                        <a:defRPr sz="1100">
+                          <a:solidFill>
+                            <a:srgbClr val="2C3E50"/>
+                          </a:solidFill>
+                          <a:latin typeface="맑은 고딕"/>
+                        </a:defRPr>
+                      </a:pPr>
+                      <a:r>
+                        <a:t>0.6246</a:t>
                       </a:r>
                     </a:p>
                   </a:txBody>
@@ -4291,65 +5098,21 @@
                     </a:solidFill>
                   </a:tcPr>
                 </a:tc>
-              </a:tr>
-              <a:tr h="457200">
-                <a:tc>
-                  <a:txBody>
-                    <a:bodyPr/>
-                    <a:lstStyle/>
-                    <a:p>
-                      <a:pPr algn="ctr">
-                        <a:defRPr sz="1200"/>
-                      </a:pPr>
-                      <a:r>
-                        <a:t>GPTQ W8A8 (damp=0.02)</a:t>
-                      </a:r>
-                    </a:p>
-                  </a:txBody>
-                  <a:tcPr/>
-                </a:tc>
-                <a:tc>
-                  <a:txBody>
-                    <a:bodyPr/>
-                    <a:lstStyle/>
-                    <a:p>
-                      <a:pPr algn="ctr">
-                        <a:defRPr sz="1200"/>
-                      </a:pPr>
-                      <a:r>
-                        <a:t>0.6208</a:t>
-                      </a:r>
-                    </a:p>
-                  </a:txBody>
-                  <a:tcPr/>
-                </a:tc>
-                <a:tc>
-                  <a:txBody>
-                    <a:bodyPr/>
-                    <a:lstStyle/>
-                    <a:p>
-                      <a:pPr algn="ctr">
-                        <a:defRPr sz="1200"/>
-                      </a:pPr>
-                      <a:r>
-                        <a:t>Hessian 캘리브레이션</a:t>
-                      </a:r>
-                    </a:p>
-                  </a:txBody>
-                  <a:tcPr/>
-                </a:tc>
-              </a:tr>
-              <a:tr h="457200">
-                <a:tc>
-                  <a:txBody>
-                    <a:bodyPr/>
-                    <a:lstStyle/>
-                    <a:p>
-                      <a:pPr algn="ctr">
-                        <a:defRPr sz="1200"/>
-                      </a:pPr>
-                      <a:r>
-                        <a:t>GPTQ W8A16</a:t>
+                <a:tc>
+                  <a:txBody>
+                    <a:bodyPr/>
+                    <a:lstStyle/>
+                    <a:p>
+                      <a:pPr algn="ctr">
+                        <a:defRPr sz="1100">
+                          <a:solidFill>
+                            <a:srgbClr val="2C3E50"/>
+                          </a:solidFill>
+                          <a:latin typeface="맑은 고딕"/>
+                        </a:defRPr>
+                      </a:pPr>
+                      <a:r>
+                        <a:t>1.3 GB</a:t>
                       </a:r>
                     </a:p>
                   </a:txBody>
@@ -4365,10 +5128,15 @@
                     <a:lstStyle/>
                     <a:p>
                       <a:pPr algn="ctr">
-                        <a:defRPr sz="1200"/>
-                      </a:pPr>
-                      <a:r>
-                        <a:t>~0.52</a:t>
+                        <a:defRPr sz="1100">
+                          <a:solidFill>
+                            <a:srgbClr val="2C3E50"/>
+                          </a:solidFill>
+                          <a:latin typeface="맑은 고딕"/>
+                        </a:defRPr>
+                      </a:pPr>
+                      <a:r>
+                        <a:t>비정형 스파시티</a:t>
                       </a:r>
                     </a:p>
                   </a:txBody>
@@ -4378,16 +5146,125 @@
                     </a:solidFill>
                   </a:tcPr>
                 </a:tc>
-                <a:tc>
-                  <a:txBody>
-                    <a:bodyPr/>
-                    <a:lstStyle/>
-                    <a:p>
-                      <a:pPr algn="ctr">
-                        <a:defRPr sz="1200"/>
-                      </a:pPr>
-                      <a:r>
-                        <a:t>L4에서 느린 커널</a:t>
+              </a:tr>
+              <a:tr h="351692">
+                <a:tc>
+                  <a:txBody>
+                    <a:bodyPr/>
+                    <a:lstStyle/>
+                    <a:p>
+                      <a:pPr algn="ctr">
+                        <a:defRPr sz="1100">
+                          <a:solidFill>
+                            <a:srgbClr val="2C3E50"/>
+                          </a:solidFill>
+                          <a:latin typeface="맑은 고딕"/>
+                        </a:defRPr>
+                      </a:pPr>
+                      <a:r>
+                        <a:t>3</a:t>
+                      </a:r>
+                    </a:p>
+                  </a:txBody>
+                  <a:tcPr/>
+                </a:tc>
+                <a:tc>
+                  <a:txBody>
+                    <a:bodyPr/>
+                    <a:lstStyle/>
+                    <a:p>
+                      <a:pPr algn="ctr">
+                        <a:defRPr sz="1100">
+                          <a:solidFill>
+                            <a:srgbClr val="2C3E50"/>
+                          </a:solidFill>
+                          <a:latin typeface="맑은 고딕"/>
+                        </a:defRPr>
+                      </a:pPr>
+                      <a:r>
+                        <a:t>GPTQ W8A8 (cal=2048, d=0.02)</a:t>
+                      </a:r>
+                    </a:p>
+                  </a:txBody>
+                  <a:tcPr/>
+                </a:tc>
+                <a:tc>
+                  <a:txBody>
+                    <a:bodyPr/>
+                    <a:lstStyle/>
+                    <a:p>
+                      <a:pPr algn="ctr">
+                        <a:defRPr sz="1100">
+                          <a:solidFill>
+                            <a:srgbClr val="2C3E50"/>
+                          </a:solidFill>
+                          <a:latin typeface="맑은 고딕"/>
+                        </a:defRPr>
+                      </a:pPr>
+                      <a:r>
+                        <a:t>0.6208</a:t>
+                      </a:r>
+                    </a:p>
+                  </a:txBody>
+                  <a:tcPr/>
+                </a:tc>
+                <a:tc>
+                  <a:txBody>
+                    <a:bodyPr/>
+                    <a:lstStyle/>
+                    <a:p>
+                      <a:pPr algn="ctr">
+                        <a:defRPr sz="1100">
+                          <a:solidFill>
+                            <a:srgbClr val="2C3E50"/>
+                          </a:solidFill>
+                          <a:latin typeface="맑은 고딕"/>
+                        </a:defRPr>
+                      </a:pPr>
+                      <a:r>
+                        <a:t>1.8 GB</a:t>
+                      </a:r>
+                    </a:p>
+                  </a:txBody>
+                  <a:tcPr/>
+                </a:tc>
+                <a:tc>
+                  <a:txBody>
+                    <a:bodyPr/>
+                    <a:lstStyle/>
+                    <a:p>
+                      <a:pPr algn="ctr">
+                        <a:defRPr sz="1100">
+                          <a:solidFill>
+                            <a:srgbClr val="2C3E50"/>
+                          </a:solidFill>
+                          <a:latin typeface="맑은 고딕"/>
+                        </a:defRPr>
+                      </a:pPr>
+                      <a:r>
+                        <a:t>Hessian 캘리브레이션</a:t>
+                      </a:r>
+                    </a:p>
+                  </a:txBody>
+                  <a:tcPr/>
+                </a:tc>
+              </a:tr>
+              <a:tr h="351692">
+                <a:tc>
+                  <a:txBody>
+                    <a:bodyPr/>
+                    <a:lstStyle/>
+                    <a:p>
+                      <a:pPr algn="ctr">
+                        <a:defRPr sz="1100">
+                          <a:solidFill>
+                            <a:srgbClr val="2C3E50"/>
+                          </a:solidFill>
+                          <a:latin typeface="맑은 고딕"/>
+                        </a:defRPr>
+                      </a:pPr>
+                      <a:r>
+                        <a:t>4</a:t>
                       </a:r>
                     </a:p>
                   </a:txBody>
@@ -4397,65 +5274,21 @@
                     </a:solidFill>
                   </a:tcPr>
                 </a:tc>
-              </a:tr>
-              <a:tr h="457200">
-                <a:tc>
-                  <a:txBody>
-                    <a:bodyPr/>
-                    <a:lstStyle/>
-                    <a:p>
-                      <a:pPr algn="ctr">
-                        <a:defRPr sz="1200"/>
-                      </a:pPr>
-                      <a:r>
-                        <a:t>FP8 Dynamic</a:t>
-                      </a:r>
-                    </a:p>
-                  </a:txBody>
-                  <a:tcPr/>
-                </a:tc>
-                <a:tc>
-                  <a:txBody>
-                    <a:bodyPr/>
-                    <a:lstStyle/>
-                    <a:p>
-                      <a:pPr algn="ctr">
-                        <a:defRPr sz="1200"/>
-                      </a:pPr>
-                      <a:r>
-                        <a:t>~0.50</a:t>
-                      </a:r>
-                    </a:p>
-                  </a:txBody>
-                  <a:tcPr/>
-                </a:tc>
-                <a:tc>
-                  <a:txBody>
-                    <a:bodyPr/>
-                    <a:lstStyle/>
-                    <a:p>
-                      <a:pPr algn="ctr">
-                        <a:defRPr sz="1200"/>
-                      </a:pPr>
-                      <a:r>
-                        <a:t>FP8 커널 비효율</a:t>
-                      </a:r>
-                    </a:p>
-                  </a:txBody>
-                  <a:tcPr/>
-                </a:tc>
-              </a:tr>
-              <a:tr h="457200">
-                <a:tc>
-                  <a:txBody>
-                    <a:bodyPr/>
-                    <a:lstStyle/>
-                    <a:p>
-                      <a:pPr algn="ctr">
-                        <a:defRPr sz="1200"/>
-                      </a:pPr>
-                      <a:r>
-                        <a:t>GPTQ W4A16</a:t>
+                <a:tc>
+                  <a:txBody>
+                    <a:bodyPr/>
+                    <a:lstStyle/>
+                    <a:p>
+                      <a:pPr algn="ctr">
+                        <a:defRPr sz="1100">
+                          <a:solidFill>
+                            <a:srgbClr val="2C3E50"/>
+                          </a:solidFill>
+                          <a:latin typeface="맑은 고딕"/>
+                        </a:defRPr>
+                      </a:pPr>
+                      <a:r>
+                        <a:t>GPTQ W8A8 (d=0.05)</a:t>
                       </a:r>
                     </a:p>
                   </a:txBody>
@@ -4471,10 +5304,15 @@
                     <a:lstStyle/>
                     <a:p>
                       <a:pPr algn="ctr">
-                        <a:defRPr sz="1200"/>
-                      </a:pPr>
-                      <a:r>
-                        <a:t>~0.49</a:t>
+                        <a:defRPr sz="1100">
+                          <a:solidFill>
+                            <a:srgbClr val="2C3E50"/>
+                          </a:solidFill>
+                          <a:latin typeface="맑은 고딕"/>
+                        </a:defRPr>
+                      </a:pPr>
+                      <a:r>
+                        <a:t>0.6077</a:t>
                       </a:r>
                     </a:p>
                   </a:txBody>
@@ -4490,10 +5328,15 @@
                     <a:lstStyle/>
                     <a:p>
                       <a:pPr algn="ctr">
-                        <a:defRPr sz="1200"/>
-                      </a:pPr>
-                      <a:r>
-                        <a:t>1.2B에 INT4 과도한 손실</a:t>
+                        <a:defRPr sz="1100">
+                          <a:solidFill>
+                            <a:srgbClr val="2C3E50"/>
+                          </a:solidFill>
+                          <a:latin typeface="맑은 고딕"/>
+                        </a:defRPr>
+                      </a:pPr>
+                      <a:r>
+                        <a:t>1.8 GB</a:t>
                       </a:r>
                     </a:p>
                   </a:txBody>
@@ -4503,6 +5346,926 @@
                     </a:solidFill>
                   </a:tcPr>
                 </a:tc>
+                <a:tc>
+                  <a:txBody>
+                    <a:bodyPr/>
+                    <a:lstStyle/>
+                    <a:p>
+                      <a:pPr algn="ctr">
+                        <a:defRPr sz="1100">
+                          <a:solidFill>
+                            <a:srgbClr val="2C3E50"/>
+                          </a:solidFill>
+                          <a:latin typeface="맑은 고딕"/>
+                        </a:defRPr>
+                      </a:pPr>
+                      <a:r>
+                        <a:t>dampening 과다</a:t>
+                      </a:r>
+                    </a:p>
+                  </a:txBody>
+                  <a:tcPr>
+                    <a:solidFill>
+                      <a:srgbClr val="F0F0F5"/>
+                    </a:solidFill>
+                  </a:tcPr>
+                </a:tc>
+              </a:tr>
+              <a:tr h="351692">
+                <a:tc>
+                  <a:txBody>
+                    <a:bodyPr/>
+                    <a:lstStyle/>
+                    <a:p>
+                      <a:pPr algn="ctr">
+                        <a:defRPr sz="1100">
+                          <a:solidFill>
+                            <a:srgbClr val="2C3E50"/>
+                          </a:solidFill>
+                          <a:latin typeface="맑은 고딕"/>
+                        </a:defRPr>
+                      </a:pPr>
+                      <a:r>
+                        <a:t>5</a:t>
+                      </a:r>
+                    </a:p>
+                  </a:txBody>
+                  <a:tcPr/>
+                </a:tc>
+                <a:tc>
+                  <a:txBody>
+                    <a:bodyPr/>
+                    <a:lstStyle/>
+                    <a:p>
+                      <a:pPr algn="ctr">
+                        <a:defRPr sz="1100">
+                          <a:solidFill>
+                            <a:srgbClr val="2C3E50"/>
+                          </a:solidFill>
+                          <a:latin typeface="맑은 고딕"/>
+                        </a:defRPr>
+                      </a:pPr>
+                      <a:r>
+                        <a:t>GPTQ W8A8 기본 (d=0.01)</a:t>
+                      </a:r>
+                    </a:p>
+                  </a:txBody>
+                  <a:tcPr/>
+                </a:tc>
+                <a:tc>
+                  <a:txBody>
+                    <a:bodyPr/>
+                    <a:lstStyle/>
+                    <a:p>
+                      <a:pPr algn="ctr">
+                        <a:defRPr sz="1100">
+                          <a:solidFill>
+                            <a:srgbClr val="2C3E50"/>
+                          </a:solidFill>
+                          <a:latin typeface="맑은 고딕"/>
+                        </a:defRPr>
+                      </a:pPr>
+                      <a:r>
+                        <a:t>0.6042</a:t>
+                      </a:r>
+                    </a:p>
+                  </a:txBody>
+                  <a:tcPr/>
+                </a:tc>
+                <a:tc>
+                  <a:txBody>
+                    <a:bodyPr/>
+                    <a:lstStyle/>
+                    <a:p>
+                      <a:pPr algn="ctr">
+                        <a:defRPr sz="1100">
+                          <a:solidFill>
+                            <a:srgbClr val="2C3E50"/>
+                          </a:solidFill>
+                          <a:latin typeface="맑은 고딕"/>
+                        </a:defRPr>
+                      </a:pPr>
+                      <a:r>
+                        <a:t>1.8 GB</a:t>
+                      </a:r>
+                    </a:p>
+                  </a:txBody>
+                  <a:tcPr/>
+                </a:tc>
+                <a:tc>
+                  <a:txBody>
+                    <a:bodyPr/>
+                    <a:lstStyle/>
+                    <a:p>
+                      <a:pPr algn="ctr">
+                        <a:defRPr sz="1100">
+                          <a:solidFill>
+                            <a:srgbClr val="2C3E50"/>
+                          </a:solidFill>
+                          <a:latin typeface="맑은 고딕"/>
+                        </a:defRPr>
+                      </a:pPr>
+                      <a:r>
+                        <a:t>기본 설정</a:t>
+                      </a:r>
+                    </a:p>
+                  </a:txBody>
+                  <a:tcPr/>
+                </a:tc>
+              </a:tr>
+              <a:tr h="351692">
+                <a:tc>
+                  <a:txBody>
+                    <a:bodyPr/>
+                    <a:lstStyle/>
+                    <a:p>
+                      <a:pPr algn="ctr">
+                        <a:defRPr sz="1100">
+                          <a:solidFill>
+                            <a:srgbClr val="2C3E50"/>
+                          </a:solidFill>
+                          <a:latin typeface="맑은 고딕"/>
+                        </a:defRPr>
+                      </a:pPr>
+                      <a:r>
+                        <a:t>6</a:t>
+                      </a:r>
+                    </a:p>
+                  </a:txBody>
+                  <a:tcPr>
+                    <a:solidFill>
+                      <a:srgbClr val="F0F0F5"/>
+                    </a:solidFill>
+                  </a:tcPr>
+                </a:tc>
+                <a:tc>
+                  <a:txBody>
+                    <a:bodyPr/>
+                    <a:lstStyle/>
+                    <a:p>
+                      <a:pPr algn="ctr">
+                        <a:defRPr sz="1100">
+                          <a:solidFill>
+                            <a:srgbClr val="2C3E50"/>
+                          </a:solidFill>
+                          <a:latin typeface="맑은 고딕"/>
+                        </a:defRPr>
+                      </a:pPr>
+                      <a:r>
+                        <a:t>W4A16 GPTQ (n=512)</a:t>
+                      </a:r>
+                    </a:p>
+                  </a:txBody>
+                  <a:tcPr>
+                    <a:solidFill>
+                      <a:srgbClr val="F0F0F5"/>
+                    </a:solidFill>
+                  </a:tcPr>
+                </a:tc>
+                <a:tc>
+                  <a:txBody>
+                    <a:bodyPr/>
+                    <a:lstStyle/>
+                    <a:p>
+                      <a:pPr algn="ctr">
+                        <a:defRPr sz="1100">
+                          <a:solidFill>
+                            <a:srgbClr val="2C3E50"/>
+                          </a:solidFill>
+                          <a:latin typeface="맑은 고딕"/>
+                        </a:defRPr>
+                      </a:pPr>
+                      <a:r>
+                        <a:t>0.5099</a:t>
+                      </a:r>
+                    </a:p>
+                  </a:txBody>
+                  <a:tcPr>
+                    <a:solidFill>
+                      <a:srgbClr val="F0F0F5"/>
+                    </a:solidFill>
+                  </a:tcPr>
+                </a:tc>
+                <a:tc>
+                  <a:txBody>
+                    <a:bodyPr/>
+                    <a:lstStyle/>
+                    <a:p>
+                      <a:pPr algn="ctr">
+                        <a:defRPr sz="1100">
+                          <a:solidFill>
+                            <a:srgbClr val="2C3E50"/>
+                          </a:solidFill>
+                          <a:latin typeface="맑은 고딕"/>
+                        </a:defRPr>
+                      </a:pPr>
+                      <a:r>
+                        <a:t>1.3 GB</a:t>
+                      </a:r>
+                    </a:p>
+                  </a:txBody>
+                  <a:tcPr>
+                    <a:solidFill>
+                      <a:srgbClr val="F0F0F5"/>
+                    </a:solidFill>
+                  </a:tcPr>
+                </a:tc>
+                <a:tc>
+                  <a:txBody>
+                    <a:bodyPr/>
+                    <a:lstStyle/>
+                    <a:p>
+                      <a:pPr algn="ctr">
+                        <a:defRPr sz="1100">
+                          <a:solidFill>
+                            <a:srgbClr val="2C3E50"/>
+                          </a:solidFill>
+                          <a:latin typeface="맑은 고딕"/>
+                        </a:defRPr>
+                      </a:pPr>
+                      <a:r>
+                        <a:t>4비트 품질 손실</a:t>
+                      </a:r>
+                    </a:p>
+                  </a:txBody>
+                  <a:tcPr>
+                    <a:solidFill>
+                      <a:srgbClr val="F0F0F5"/>
+                    </a:solidFill>
+                  </a:tcPr>
+                </a:tc>
+              </a:tr>
+              <a:tr h="351692">
+                <a:tc>
+                  <a:txBody>
+                    <a:bodyPr/>
+                    <a:lstStyle/>
+                    <a:p>
+                      <a:pPr algn="ctr">
+                        <a:defRPr sz="1100">
+                          <a:solidFill>
+                            <a:srgbClr val="2C3E50"/>
+                          </a:solidFill>
+                          <a:latin typeface="맑은 고딕"/>
+                        </a:defRPr>
+                      </a:pPr>
+                      <a:r>
+                        <a:t>7</a:t>
+                      </a:r>
+                    </a:p>
+                  </a:txBody>
+                  <a:tcPr/>
+                </a:tc>
+                <a:tc>
+                  <a:txBody>
+                    <a:bodyPr/>
+                    <a:lstStyle/>
+                    <a:p>
+                      <a:pPr algn="ctr">
+                        <a:defRPr sz="1100">
+                          <a:solidFill>
+                            <a:srgbClr val="2C3E50"/>
+                          </a:solidFill>
+                          <a:latin typeface="맑은 고딕"/>
+                        </a:defRPr>
+                      </a:pPr>
+                      <a:r>
+                        <a:t>GPTQ W8A8 actorder=group</a:t>
+                      </a:r>
+                    </a:p>
+                  </a:txBody>
+                  <a:tcPr/>
+                </a:tc>
+                <a:tc>
+                  <a:txBody>
+                    <a:bodyPr/>
+                    <a:lstStyle/>
+                    <a:p>
+                      <a:pPr algn="ctr">
+                        <a:defRPr sz="1100">
+                          <a:solidFill>
+                            <a:srgbClr val="2C3E50"/>
+                          </a:solidFill>
+                          <a:latin typeface="맑은 고딕"/>
+                        </a:defRPr>
+                      </a:pPr>
+                      <a:r>
+                        <a:t>0.5085</a:t>
+                      </a:r>
+                    </a:p>
+                  </a:txBody>
+                  <a:tcPr/>
+                </a:tc>
+                <a:tc>
+                  <a:txBody>
+                    <a:bodyPr/>
+                    <a:lstStyle/>
+                    <a:p>
+                      <a:pPr algn="ctr">
+                        <a:defRPr sz="1100">
+                          <a:solidFill>
+                            <a:srgbClr val="2C3E50"/>
+                          </a:solidFill>
+                          <a:latin typeface="맑은 고딕"/>
+                        </a:defRPr>
+                      </a:pPr>
+                      <a:r>
+                        <a:t>1.8 GB</a:t>
+                      </a:r>
+                    </a:p>
+                  </a:txBody>
+                  <a:tcPr/>
+                </a:tc>
+                <a:tc>
+                  <a:txBody>
+                    <a:bodyPr/>
+                    <a:lstStyle/>
+                    <a:p>
+                      <a:pPr algn="ctr">
+                        <a:defRPr sz="1100">
+                          <a:solidFill>
+                            <a:srgbClr val="2C3E50"/>
+                          </a:solidFill>
+                          <a:latin typeface="맑은 고딕"/>
+                        </a:defRPr>
+                      </a:pPr>
+                      <a:r>
+                        <a:t>커널 비효율</a:t>
+                      </a:r>
+                    </a:p>
+                  </a:txBody>
+                  <a:tcPr/>
+                </a:tc>
+              </a:tr>
+              <a:tr h="351692">
+                <a:tc>
+                  <a:txBody>
+                    <a:bodyPr/>
+                    <a:lstStyle/>
+                    <a:p>
+                      <a:pPr algn="ctr">
+                        <a:defRPr sz="1100">
+                          <a:solidFill>
+                            <a:srgbClr val="2C3E50"/>
+                          </a:solidFill>
+                          <a:latin typeface="맑은 고딕"/>
+                        </a:defRPr>
+                      </a:pPr>
+                      <a:r>
+                        <a:t>8</a:t>
+                      </a:r>
+                    </a:p>
+                  </a:txBody>
+                  <a:tcPr>
+                    <a:solidFill>
+                      <a:srgbClr val="F0F0F5"/>
+                    </a:solidFill>
+                  </a:tcPr>
+                </a:tc>
+                <a:tc>
+                  <a:txBody>
+                    <a:bodyPr/>
+                    <a:lstStyle/>
+                    <a:p>
+                      <a:pPr algn="ctr">
+                        <a:defRPr sz="1100">
+                          <a:solidFill>
+                            <a:srgbClr val="2C3E50"/>
+                          </a:solidFill>
+                          <a:latin typeface="맑은 고딕"/>
+                        </a:defRPr>
+                      </a:pPr>
+                      <a:r>
+                        <a:t>FP8 Dynamic</a:t>
+                      </a:r>
+                    </a:p>
+                  </a:txBody>
+                  <a:tcPr>
+                    <a:solidFill>
+                      <a:srgbClr val="F0F0F5"/>
+                    </a:solidFill>
+                  </a:tcPr>
+                </a:tc>
+                <a:tc>
+                  <a:txBody>
+                    <a:bodyPr/>
+                    <a:lstStyle/>
+                    <a:p>
+                      <a:pPr algn="ctr">
+                        <a:defRPr sz="1100">
+                          <a:solidFill>
+                            <a:srgbClr val="2C3E50"/>
+                          </a:solidFill>
+                          <a:latin typeface="맑은 고딕"/>
+                        </a:defRPr>
+                      </a:pPr>
+                      <a:r>
+                        <a:t>0.4936</a:t>
+                      </a:r>
+                    </a:p>
+                  </a:txBody>
+                  <a:tcPr>
+                    <a:solidFill>
+                      <a:srgbClr val="F0F0F5"/>
+                    </a:solidFill>
+                  </a:tcPr>
+                </a:tc>
+                <a:tc>
+                  <a:txBody>
+                    <a:bodyPr/>
+                    <a:lstStyle/>
+                    <a:p>
+                      <a:pPr algn="ctr">
+                        <a:defRPr sz="1100">
+                          <a:solidFill>
+                            <a:srgbClr val="2C3E50"/>
+                          </a:solidFill>
+                          <a:latin typeface="맑은 고딕"/>
+                        </a:defRPr>
+                      </a:pPr>
+                      <a:r>
+                        <a:t>1.4 GB</a:t>
+                      </a:r>
+                    </a:p>
+                  </a:txBody>
+                  <a:tcPr>
+                    <a:solidFill>
+                      <a:srgbClr val="F0F0F5"/>
+                    </a:solidFill>
+                  </a:tcPr>
+                </a:tc>
+                <a:tc>
+                  <a:txBody>
+                    <a:bodyPr/>
+                    <a:lstStyle/>
+                    <a:p>
+                      <a:pPr algn="ctr">
+                        <a:defRPr sz="1100">
+                          <a:solidFill>
+                            <a:srgbClr val="2C3E50"/>
+                          </a:solidFill>
+                          <a:latin typeface="맑은 고딕"/>
+                        </a:defRPr>
+                      </a:pPr>
+                      <a:r>
+                        <a:t>L4 FP8 커널 미흡</a:t>
+                      </a:r>
+                    </a:p>
+                  </a:txBody>
+                  <a:tcPr>
+                    <a:solidFill>
+                      <a:srgbClr val="F0F0F5"/>
+                    </a:solidFill>
+                  </a:tcPr>
+                </a:tc>
+              </a:tr>
+              <a:tr h="351692">
+                <a:tc>
+                  <a:txBody>
+                    <a:bodyPr/>
+                    <a:lstStyle/>
+                    <a:p>
+                      <a:pPr algn="ctr">
+                        <a:defRPr sz="1100">
+                          <a:solidFill>
+                            <a:srgbClr val="2C3E50"/>
+                          </a:solidFill>
+                          <a:latin typeface="맑은 고딕"/>
+                        </a:defRPr>
+                      </a:pPr>
+                      <a:r>
+                        <a:t>9</a:t>
+                      </a:r>
+                    </a:p>
+                  </a:txBody>
+                  <a:tcPr/>
+                </a:tc>
+                <a:tc>
+                  <a:txBody>
+                    <a:bodyPr/>
+                    <a:lstStyle/>
+                    <a:p>
+                      <a:pPr algn="ctr">
+                        <a:defRPr sz="1100">
+                          <a:solidFill>
+                            <a:srgbClr val="2C3E50"/>
+                          </a:solidFill>
+                          <a:latin typeface="맑은 고딕"/>
+                        </a:defRPr>
+                      </a:pPr>
+                      <a:r>
+                        <a:t>W4A16 + SFT</a:t>
+                      </a:r>
+                    </a:p>
+                  </a:txBody>
+                  <a:tcPr/>
+                </a:tc>
+                <a:tc>
+                  <a:txBody>
+                    <a:bodyPr/>
+                    <a:lstStyle/>
+                    <a:p>
+                      <a:pPr algn="ctr">
+                        <a:defRPr sz="1100">
+                          <a:solidFill>
+                            <a:srgbClr val="2C3E50"/>
+                          </a:solidFill>
+                          <a:latin typeface="맑은 고딕"/>
+                        </a:defRPr>
+                      </a:pPr>
+                      <a:r>
+                        <a:t>0.4825</a:t>
+                      </a:r>
+                    </a:p>
+                  </a:txBody>
+                  <a:tcPr/>
+                </a:tc>
+                <a:tc>
+                  <a:txBody>
+                    <a:bodyPr/>
+                    <a:lstStyle/>
+                    <a:p>
+                      <a:pPr algn="ctr">
+                        <a:defRPr sz="1100">
+                          <a:solidFill>
+                            <a:srgbClr val="2C3E50"/>
+                          </a:solidFill>
+                          <a:latin typeface="맑은 고딕"/>
+                        </a:defRPr>
+                      </a:pPr>
+                      <a:r>
+                        <a:t>1.3 GB</a:t>
+                      </a:r>
+                    </a:p>
+                  </a:txBody>
+                  <a:tcPr/>
+                </a:tc>
+                <a:tc>
+                  <a:txBody>
+                    <a:bodyPr/>
+                    <a:lstStyle/>
+                    <a:p>
+                      <a:pPr algn="ctr">
+                        <a:defRPr sz="1100">
+                          <a:solidFill>
+                            <a:srgbClr val="2C3E50"/>
+                          </a:solidFill>
+                          <a:latin typeface="맑은 고딕"/>
+                        </a:defRPr>
+                      </a:pPr>
+                      <a:r>
+                        <a:t>SFT 효과 미미</a:t>
+                      </a:r>
+                    </a:p>
+                  </a:txBody>
+                  <a:tcPr/>
+                </a:tc>
+              </a:tr>
+              <a:tr h="351692">
+                <a:tc>
+                  <a:txBody>
+                    <a:bodyPr/>
+                    <a:lstStyle/>
+                    <a:p>
+                      <a:pPr algn="ctr">
+                        <a:defRPr sz="1100">
+                          <a:solidFill>
+                            <a:srgbClr val="2C3E50"/>
+                          </a:solidFill>
+                          <a:latin typeface="맑은 고딕"/>
+                        </a:defRPr>
+                      </a:pPr>
+                      <a:r>
+                        <a:t>10</a:t>
+                      </a:r>
+                    </a:p>
+                  </a:txBody>
+                  <a:tcPr>
+                    <a:solidFill>
+                      <a:srgbClr val="F0F0F5"/>
+                    </a:solidFill>
+                  </a:tcPr>
+                </a:tc>
+                <a:tc>
+                  <a:txBody>
+                    <a:bodyPr/>
+                    <a:lstStyle/>
+                    <a:p>
+                      <a:pPr algn="ctr">
+                        <a:defRPr sz="1100">
+                          <a:solidFill>
+                            <a:srgbClr val="2C3E50"/>
+                          </a:solidFill>
+                          <a:latin typeface="맑은 고딕"/>
+                        </a:defRPr>
+                      </a:pPr>
+                      <a:r>
+                        <a:t>W8A8 Selective (5L BF16)</a:t>
+                      </a:r>
+                    </a:p>
+                  </a:txBody>
+                  <a:tcPr>
+                    <a:solidFill>
+                      <a:srgbClr val="F0F0F5"/>
+                    </a:solidFill>
+                  </a:tcPr>
+                </a:tc>
+                <a:tc>
+                  <a:txBody>
+                    <a:bodyPr/>
+                    <a:lstStyle/>
+                    <a:p>
+                      <a:pPr algn="ctr">
+                        <a:defRPr sz="1100">
+                          <a:solidFill>
+                            <a:srgbClr val="2C3E50"/>
+                          </a:solidFill>
+                          <a:latin typeface="맑은 고딕"/>
+                        </a:defRPr>
+                      </a:pPr>
+                      <a:r>
+                        <a:t>0.4718</a:t>
+                      </a:r>
+                    </a:p>
+                  </a:txBody>
+                  <a:tcPr>
+                    <a:solidFill>
+                      <a:srgbClr val="F0F0F5"/>
+                    </a:solidFill>
+                  </a:tcPr>
+                </a:tc>
+                <a:tc>
+                  <a:txBody>
+                    <a:bodyPr/>
+                    <a:lstStyle/>
+                    <a:p>
+                      <a:pPr algn="ctr">
+                        <a:defRPr sz="1100">
+                          <a:solidFill>
+                            <a:srgbClr val="2C3E50"/>
+                          </a:solidFill>
+                          <a:latin typeface="맑은 고딕"/>
+                        </a:defRPr>
+                      </a:pPr>
+                      <a:r>
+                        <a:t>1.8 GB</a:t>
+                      </a:r>
+                    </a:p>
+                  </a:txBody>
+                  <a:tcPr>
+                    <a:solidFill>
+                      <a:srgbClr val="F0F0F5"/>
+                    </a:solidFill>
+                  </a:tcPr>
+                </a:tc>
+                <a:tc>
+                  <a:txBody>
+                    <a:bodyPr/>
+                    <a:lstStyle/>
+                    <a:p>
+                      <a:pPr algn="ctr">
+                        <a:defRPr sz="1100">
+                          <a:solidFill>
+                            <a:srgbClr val="2C3E50"/>
+                          </a:solidFill>
+                          <a:latin typeface="맑은 고딕"/>
+                        </a:defRPr>
+                      </a:pPr>
+                      <a:r>
+                        <a:t>혼합 정밀도 페널티</a:t>
+                      </a:r>
+                    </a:p>
+                  </a:txBody>
+                  <a:tcPr>
+                    <a:solidFill>
+                      <a:srgbClr val="F0F0F5"/>
+                    </a:solidFill>
+                  </a:tcPr>
+                </a:tc>
+              </a:tr>
+              <a:tr h="351692">
+                <a:tc>
+                  <a:txBody>
+                    <a:bodyPr/>
+                    <a:lstStyle/>
+                    <a:p>
+                      <a:pPr algn="ctr">
+                        <a:defRPr sz="1100">
+                          <a:solidFill>
+                            <a:srgbClr val="2C3E50"/>
+                          </a:solidFill>
+                          <a:latin typeface="맑은 고딕"/>
+                        </a:defRPr>
+                      </a:pPr>
+                      <a:r>
+                        <a:t>11</a:t>
+                      </a:r>
+                    </a:p>
+                  </a:txBody>
+                  <a:tcPr/>
+                </a:tc>
+                <a:tc>
+                  <a:txBody>
+                    <a:bodyPr/>
+                    <a:lstStyle/>
+                    <a:p>
+                      <a:pPr algn="ctr">
+                        <a:defRPr sz="1100">
+                          <a:solidFill>
+                            <a:srgbClr val="2C3E50"/>
+                          </a:solidFill>
+                          <a:latin typeface="맑은 고딕"/>
+                        </a:defRPr>
+                      </a:pPr>
+                      <a:r>
+                        <a:t>SFT + W4A16</a:t>
+                      </a:r>
+                    </a:p>
+                  </a:txBody>
+                  <a:tcPr/>
+                </a:tc>
+                <a:tc>
+                  <a:txBody>
+                    <a:bodyPr/>
+                    <a:lstStyle/>
+                    <a:p>
+                      <a:pPr algn="ctr">
+                        <a:defRPr sz="1100">
+                          <a:solidFill>
+                            <a:srgbClr val="2C3E50"/>
+                          </a:solidFill>
+                          <a:latin typeface="맑은 고딕"/>
+                        </a:defRPr>
+                      </a:pPr>
+                      <a:r>
+                        <a:t>0.3202</a:t>
+                      </a:r>
+                    </a:p>
+                  </a:txBody>
+                  <a:tcPr/>
+                </a:tc>
+                <a:tc>
+                  <a:txBody>
+                    <a:bodyPr/>
+                    <a:lstStyle/>
+                    <a:p>
+                      <a:pPr algn="ctr">
+                        <a:defRPr sz="1100">
+                          <a:solidFill>
+                            <a:srgbClr val="2C3E50"/>
+                          </a:solidFill>
+                          <a:latin typeface="맑은 고딕"/>
+                        </a:defRPr>
+                      </a:pPr>
+                      <a:r>
+                        <a:t>1.3 GB</a:t>
+                      </a:r>
+                    </a:p>
+                  </a:txBody>
+                  <a:tcPr/>
+                </a:tc>
+                <a:tc>
+                  <a:txBody>
+                    <a:bodyPr/>
+                    <a:lstStyle/>
+                    <a:p>
+                      <a:pPr algn="ctr">
+                        <a:defRPr sz="1100">
+                          <a:solidFill>
+                            <a:srgbClr val="2C3E50"/>
+                          </a:solidFill>
+                          <a:latin typeface="맑은 고딕"/>
+                        </a:defRPr>
+                      </a:pPr>
+                      <a:r>
+                        <a:t>SFT 성능 저하</a:t>
+                      </a:r>
+                    </a:p>
+                  </a:txBody>
+                  <a:tcPr/>
+                </a:tc>
+              </a:tr>
+              <a:tr h="351696">
+                <a:tc>
+                  <a:txBody>
+                    <a:bodyPr/>
+                    <a:lstStyle/>
+                    <a:p>
+                      <a:pPr algn="ctr">
+                        <a:defRPr sz="1100">
+                          <a:solidFill>
+                            <a:srgbClr val="2C3E50"/>
+                          </a:solidFill>
+                          <a:latin typeface="맑은 고딕"/>
+                        </a:defRPr>
+                      </a:pPr>
+                      <a:r>
+                        <a:t>12</a:t>
+                      </a:r>
+                    </a:p>
+                  </a:txBody>
+                  <a:tcPr>
+                    <a:solidFill>
+                      <a:srgbClr val="F0F0F5"/>
+                    </a:solidFill>
+                  </a:tcPr>
+                </a:tc>
+                <a:tc>
+                  <a:txBody>
+                    <a:bodyPr/>
+                    <a:lstStyle/>
+                    <a:p>
+                      <a:pPr algn="ctr">
+                        <a:defRPr sz="1100">
+                          <a:solidFill>
+                            <a:srgbClr val="2C3E50"/>
+                          </a:solidFill>
+                          <a:latin typeface="맑은 고딕"/>
+                        </a:defRPr>
+                      </a:pPr>
+                      <a:r>
+                        <a:t>3.5세대 KD + W4A16</a:t>
+                      </a:r>
+                    </a:p>
+                  </a:txBody>
+                  <a:tcPr>
+                    <a:solidFill>
+                      <a:srgbClr val="F0F0F5"/>
+                    </a:solidFill>
+                  </a:tcPr>
+                </a:tc>
+                <a:tc>
+                  <a:txBody>
+                    <a:bodyPr/>
+                    <a:lstStyle/>
+                    <a:p>
+                      <a:pPr algn="ctr">
+                        <a:defRPr sz="1100">
+                          <a:solidFill>
+                            <a:srgbClr val="2C3E50"/>
+                          </a:solidFill>
+                          <a:latin typeface="맑은 고딕"/>
+                        </a:defRPr>
+                      </a:pPr>
+                      <a:r>
+                        <a:t>0.2632</a:t>
+                      </a:r>
+                    </a:p>
+                  </a:txBody>
+                  <a:tcPr>
+                    <a:solidFill>
+                      <a:srgbClr val="F0F0F5"/>
+                    </a:solidFill>
+                  </a:tcPr>
+                </a:tc>
+                <a:tc>
+                  <a:txBody>
+                    <a:bodyPr/>
+                    <a:lstStyle/>
+                    <a:p>
+                      <a:pPr algn="ctr">
+                        <a:defRPr sz="1100">
+                          <a:solidFill>
+                            <a:srgbClr val="2C3E50"/>
+                          </a:solidFill>
+                          <a:latin typeface="맑은 고딕"/>
+                        </a:defRPr>
+                      </a:pPr>
+                      <a:r>
+                        <a:t>1.3 GB</a:t>
+                      </a:r>
+                    </a:p>
+                  </a:txBody>
+                  <a:tcPr>
+                    <a:solidFill>
+                      <a:srgbClr val="F0F0F5"/>
+                    </a:solidFill>
+                  </a:tcPr>
+                </a:tc>
+                <a:tc>
+                  <a:txBody>
+                    <a:bodyPr/>
+                    <a:lstStyle/>
+                    <a:p>
+                      <a:pPr algn="ctr">
+                        <a:defRPr sz="1100">
+                          <a:solidFill>
+                            <a:srgbClr val="2C3E50"/>
+                          </a:solidFill>
+                          <a:latin typeface="맑은 고딕"/>
+                        </a:defRPr>
+                      </a:pPr>
+                      <a:r>
+                        <a:t>세대 불일치</a:t>
+                      </a:r>
+                    </a:p>
+                  </a:txBody>
+                  <a:tcPr>
+                    <a:solidFill>
+                      <a:srgbClr val="F0F0F5"/>
+                    </a:solidFill>
+                  </a:tcPr>
+                </a:tc>
               </a:tr>
             </a:tbl>
           </a:graphicData>
@@ -4510,14 +6273,14 @@
       </p:graphicFrame>
       <p:sp>
         <p:nvSpPr>
-          <p:cNvPr id="4" name="TextBox 3"/>
+          <p:cNvPr id="5" name="TextBox 4"/>
           <p:cNvSpPr txBox="1"/>
           <p:nvPr/>
         </p:nvSpPr>
         <p:spPr>
           <a:xfrm>
-            <a:off x="914400" y="5029200"/>
-            <a:ext cx="10058400" cy="1371600"/>
+            <a:off x="457200" y="5852160"/>
+            <a:ext cx="10972800" cy="457200"/>
           </a:xfrm>
           <a:prstGeom prst="rect">
             <a:avLst/>
@@ -4530,36 +6293,16 @@
           </a:bodyPr>
           <a:lstStyle/>
           <a:p>
-            <a:pPr algn="l">
-              <a:defRPr sz="1400" b="0">
-                <a:solidFill>
-                  <a:srgbClr val="1A1A2E"/>
-                </a:solidFill>
-              </a:defRPr>
-            </a:pPr>
-          </a:p>
-          <a:p>
-            <a:pPr algn="l">
-              <a:defRPr sz="1500" b="1">
-                <a:solidFill>
-                  <a:srgbClr val="1A1A2E"/>
-                </a:solidFill>
-              </a:defRPr>
-            </a:pPr>
-            <a:r>
-              <a:t>핵심 발견: 단순한 min-max 양자화(QuantMod)가 복잡한 GPTQ보다 서버에서 우수</a:t>
-            </a:r>
-          </a:p>
-          <a:p>
-            <a:pPr algn="l">
-              <a:defRPr sz="1400" b="0">
-                <a:solidFill>
-                  <a:srgbClr val="666666"/>
-                </a:solidFill>
-              </a:defRPr>
-            </a:pPr>
-            <a:r>
-              <a:t>→ GPTQ의 Hessian 최적화가 캘리브레이션 데이터에 과적합되어 실제 평가에서 일반화 저하</a:t>
+            <a:pPr algn="ctr">
+              <a:defRPr sz="1200" b="0">
+                <a:solidFill>
+                  <a:srgbClr val="7F8C8D"/>
+                </a:solidFill>
+                <a:latin typeface="맑은 고딕"/>
+              </a:defRPr>
+            </a:pPr>
+            <a:r>
+              <a:t>W8A8: PerfNorm≈0.99, SpeedNorm≈0.12  |  W4A16: PerfNorm≈0.50~0.57  |  FP8: SpeedNorm≈0.002</a:t>
             </a:r>
           </a:p>
         </p:txBody>
@@ -4590,8 +6333,8 @@
         </p:nvSpPr>
         <p:spPr>
           <a:xfrm>
-            <a:off x="731520" y="365760"/>
-            <a:ext cx="10058400" cy="731520"/>
+            <a:off x="457200" y="274320"/>
+            <a:ext cx="8686800" cy="548640"/>
           </a:xfrm>
           <a:prstGeom prst="rect">
             <a:avLst/>
@@ -4605,29 +6348,109 @@
           <a:lstStyle/>
           <a:p>
             <a:pPr algn="l">
-              <a:defRPr sz="3200" b="1">
-                <a:solidFill>
-                  <a:srgbClr val="0066FF"/>
-                </a:solidFill>
-              </a:defRPr>
-            </a:pPr>
-            <a:r>
-              <a:t>시도했으나 효과 없었던 방법들</a:t>
-            </a:r>
+              <a:defRPr sz="3000" b="1">
+                <a:solidFill>
+                  <a:srgbClr val="2D5AA0"/>
+                </a:solidFill>
+                <a:latin typeface="맑은 고딕"/>
+              </a:defRPr>
+            </a:pPr>
+            <a:r>
+              <a:t>시도했으나 실패한 방법들</a:t>
+            </a:r>
+          </a:p>
+        </p:txBody>
+      </p:sp>
+      <p:sp>
+        <p:nvSpPr>
+          <p:cNvPr id="3" name="TextBox 2"/>
+          <p:cNvSpPr txBox="1"/>
+          <p:nvPr/>
+        </p:nvSpPr>
+        <p:spPr>
+          <a:xfrm>
+            <a:off x="8686800" y="347472"/>
+            <a:ext cx="3200400" cy="365760"/>
+          </a:xfrm>
+          <a:prstGeom prst="rect">
+            <a:avLst/>
+          </a:prstGeom>
+          <a:noFill/>
+        </p:spPr>
+        <p:txBody>
+          <a:bodyPr wrap="square">
+            <a:spAutoFit/>
+          </a:bodyPr>
+          <a:lstStyle/>
+          <a:p>
+            <a:pPr algn="r">
+              <a:defRPr sz="1400" b="1">
+                <a:solidFill>
+                  <a:srgbClr val="E84D3D"/>
+                </a:solidFill>
+                <a:latin typeface="맑은 고딕"/>
+              </a:defRPr>
+            </a:pPr>
+            <a:r>
+              <a:t>총 110+ 모델 실험, 15+ 서버 제출</a:t>
+            </a:r>
+          </a:p>
+        </p:txBody>
+      </p:sp>
+      <p:sp>
+        <p:nvSpPr>
+          <p:cNvPr id="4" name="Rectangle 3"/>
+          <p:cNvSpPr/>
+          <p:nvPr/>
+        </p:nvSpPr>
+        <p:spPr>
+          <a:xfrm>
+            <a:off x="457200" y="868680"/>
+            <a:ext cx="11247120" cy="38100"/>
+          </a:xfrm>
+          <a:prstGeom prst="rect">
+            <a:avLst/>
+          </a:prstGeom>
+          <a:solidFill>
+            <a:srgbClr val="2D5AA0"/>
+          </a:solidFill>
+          <a:ln>
+            <a:noFill/>
+          </a:ln>
+        </p:spPr>
+        <p:style>
+          <a:lnRef idx="1">
+            <a:schemeClr val="accent1"/>
+          </a:lnRef>
+          <a:fillRef idx="3">
+            <a:schemeClr val="accent1"/>
+          </a:fillRef>
+          <a:effectRef idx="2">
+            <a:schemeClr val="accent1"/>
+          </a:effectRef>
+          <a:fontRef idx="minor">
+            <a:schemeClr val="lt1"/>
+          </a:fontRef>
+        </p:style>
+        <p:txBody>
+          <a:bodyPr rtlCol="0" anchor="ctr"/>
+          <a:lstStyle/>
+          <a:p>
+            <a:pPr algn="ctr"/>
           </a:p>
         </p:txBody>
       </p:sp>
       <p:graphicFrame>
         <p:nvGraphicFramePr>
-          <p:cNvPr id="3" name="Table 2"/>
+          <p:cNvPr id="5" name="Table 4"/>
           <p:cNvGraphicFramePr>
             <a:graphicFrameLocks noGrp="1"/>
           </p:cNvGraphicFramePr>
           <p:nvPr/>
         </p:nvGraphicFramePr>
         <p:xfrm>
-          <a:off x="731520" y="1371600"/>
-          <a:ext cx="10515600" cy="4114800"/>
+          <a:off x="274320" y="1097280"/>
+          <a:ext cx="11612880" cy="5303520"/>
         </p:xfrm>
         <a:graphic>
           <a:graphicData uri="http://schemas.openxmlformats.org/drawingml/2006/table">
@@ -4636,31 +6459,33 @@
                 <a:tableStyleId>{5C22544A-7EE6-4342-B048-85BDC9FD1C3A}</a:tableStyleId>
               </a:tblPr>
               <a:tblGrid>
-                <a:gridCol w="3505200"/>
-                <a:gridCol w="3505200"/>
-                <a:gridCol w="3505200"/>
+                <a:gridCol w="1645920"/>
+                <a:gridCol w="3474720"/>
+                <a:gridCol w="1828800"/>
+                <a:gridCol w="4663440"/>
               </a:tblGrid>
-              <a:tr h="514350">
-                <a:tc>
-                  <a:txBody>
-                    <a:bodyPr/>
-                    <a:lstStyle/>
-                    <a:p>
-                      <a:pPr algn="ctr">
-                        <a:defRPr sz="1300" b="1">
+              <a:tr h="378822">
+                <a:tc>
+                  <a:txBody>
+                    <a:bodyPr/>
+                    <a:lstStyle/>
+                    <a:p>
+                      <a:pPr algn="ctr">
+                        <a:defRPr sz="1200" b="1">
                           <a:solidFill>
                             <a:srgbClr val="FFFFFF"/>
                           </a:solidFill>
-                        </a:defRPr>
-                      </a:pPr>
-                      <a:r>
-                        <a:t>방법</a:t>
+                          <a:latin typeface="맑은 고딕"/>
+                        </a:defRPr>
+                      </a:pPr>
+                      <a:r>
+                        <a:t>카테고리</a:t>
                       </a:r>
                     </a:p>
                   </a:txBody>
                   <a:tcPr>
                     <a:solidFill>
-                      <a:srgbClr val="0066FF"/>
+                      <a:srgbClr val="2D5AA0"/>
                     </a:solidFill>
                   </a:tcPr>
                 </a:tc>
@@ -4670,20 +6495,21 @@
                     <a:lstStyle/>
                     <a:p>
                       <a:pPr algn="ctr">
-                        <a:defRPr sz="1300" b="1">
+                        <a:defRPr sz="1200" b="1">
                           <a:solidFill>
                             <a:srgbClr val="FFFFFF"/>
                           </a:solidFill>
-                        </a:defRPr>
-                      </a:pPr>
-                      <a:r>
-                        <a:t>결과</a:t>
+                          <a:latin typeface="맑은 고딕"/>
+                        </a:defRPr>
+                      </a:pPr>
+                      <a:r>
+                        <a:t>시도한 방법</a:t>
                       </a:r>
                     </a:p>
                   </a:txBody>
                   <a:tcPr>
                     <a:solidFill>
-                      <a:srgbClr val="0066FF"/>
+                      <a:srgbClr val="2D5AA0"/>
                     </a:solidFill>
                   </a:tcPr>
                 </a:tc>
@@ -4693,35 +6519,65 @@
                     <a:lstStyle/>
                     <a:p>
                       <a:pPr algn="ctr">
-                        <a:defRPr sz="1300" b="1">
+                        <a:defRPr sz="1200" b="1">
                           <a:solidFill>
                             <a:srgbClr val="FFFFFF"/>
                           </a:solidFill>
-                        </a:defRPr>
-                      </a:pPr>
-                      <a:r>
-                        <a:t>원인</a:t>
+                          <a:latin typeface="맑은 고딕"/>
+                        </a:defRPr>
+                      </a:pPr>
+                      <a:r>
+                        <a:t>결과</a:t>
                       </a:r>
                     </a:p>
                   </a:txBody>
                   <a:tcPr>
                     <a:solidFill>
-                      <a:srgbClr val="0066FF"/>
+                      <a:srgbClr val="2D5AA0"/>
                     </a:solidFill>
                   </a:tcPr>
                 </a:tc>
+                <a:tc>
+                  <a:txBody>
+                    <a:bodyPr/>
+                    <a:lstStyle/>
+                    <a:p>
+                      <a:pPr algn="ctr">
+                        <a:defRPr sz="1200" b="1">
+                          <a:solidFill>
+                            <a:srgbClr val="FFFFFF"/>
+                          </a:solidFill>
+                          <a:latin typeface="맑은 고딕"/>
+                        </a:defRPr>
+                      </a:pPr>
+                      <a:r>
+                        <a:t>실패 원인</a:t>
+                      </a:r>
+                    </a:p>
+                  </a:txBody>
+                  <a:tcPr>
+                    <a:solidFill>
+                      <a:srgbClr val="2D5AA0"/>
+                    </a:solidFill>
+                  </a:tcPr>
+                </a:tc>
               </a:tr>
-              <a:tr h="514350">
-                <a:tc>
-                  <a:txBody>
-                    <a:bodyPr/>
-                    <a:lstStyle/>
-                    <a:p>
-                      <a:pPr algn="ctr">
-                        <a:defRPr sz="1200"/>
-                      </a:pPr>
-                      <a:r>
-                        <a:t>SFT (LoRA) → 양자화</a:t>
+              <a:tr h="378822">
+                <a:tc>
+                  <a:txBody>
+                    <a:bodyPr/>
+                    <a:lstStyle/>
+                    <a:p>
+                      <a:pPr algn="ctr">
+                        <a:defRPr sz="1100">
+                          <a:solidFill>
+                            <a:srgbClr val="2C3E50"/>
+                          </a:solidFill>
+                          <a:latin typeface="맑은 고딕"/>
+                        </a:defRPr>
+                      </a:pPr>
+                      <a:r>
+                        <a:t>4비트 양자화</a:t>
                       </a:r>
                     </a:p>
                   </a:txBody>
@@ -4733,10 +6589,15 @@
                     <a:lstStyle/>
                     <a:p>
                       <a:pPr algn="ctr">
-                        <a:defRPr sz="1200"/>
-                      </a:pPr>
-                      <a:r>
-                        <a:t>perf 하락</a:t>
+                        <a:defRPr sz="1100">
+                          <a:solidFill>
+                            <a:srgbClr val="2C3E50"/>
+                          </a:solidFill>
+                          <a:latin typeface="맑은 고딕"/>
+                        </a:defRPr>
+                      </a:pPr>
+                      <a:r>
+                        <a:t>W4A16 GPTQ (256/512/1024 샘플)</a:t>
                       </a:r>
                     </a:p>
                   </a:txBody>
@@ -4748,27 +6609,57 @@
                     <a:lstStyle/>
                     <a:p>
                       <a:pPr algn="ctr">
-                        <a:defRPr sz="1200"/>
-                      </a:pPr>
-                      <a:r>
-                        <a:t>1.2B에 MANTA SFT 오히려 성능 저하</a:t>
+                        <a:defRPr sz="1100">
+                          <a:solidFill>
+                            <a:srgbClr val="2C3E50"/>
+                          </a:solidFill>
+                          <a:latin typeface="맑은 고딕"/>
+                        </a:defRPr>
+                      </a:pPr>
+                      <a:r>
+                        <a:t>Score 0.47~0.51</a:t>
                       </a:r>
                     </a:p>
                   </a:txBody>
                   <a:tcPr/>
                 </a:tc>
+                <a:tc>
+                  <a:txBody>
+                    <a:bodyPr/>
+                    <a:lstStyle/>
+                    <a:p>
+                      <a:pPr algn="ctr">
+                        <a:defRPr sz="1100">
+                          <a:solidFill>
+                            <a:srgbClr val="2C3E50"/>
+                          </a:solidFill>
+                          <a:latin typeface="맑은 고딕"/>
+                        </a:defRPr>
+                      </a:pPr>
+                      <a:r>
+                        <a:t>1.2B에 INT4 품질 손실 과도</a:t>
+                      </a:r>
+                    </a:p>
+                  </a:txBody>
+                  <a:tcPr/>
+                </a:tc>
               </a:tr>
-              <a:tr h="514350">
-                <a:tc>
-                  <a:txBody>
-                    <a:bodyPr/>
-                    <a:lstStyle/>
-                    <a:p>
-                      <a:pPr algn="ctr">
-                        <a:defRPr sz="1200"/>
-                      </a:pPr>
-                      <a:r>
-                        <a:t>Post-quant SFT (norm만)</a:t>
+              <a:tr h="378822">
+                <a:tc>
+                  <a:txBody>
+                    <a:bodyPr/>
+                    <a:lstStyle/>
+                    <a:p>
+                      <a:pPr algn="ctr">
+                        <a:defRPr sz="1100">
+                          <a:solidFill>
+                            <a:srgbClr val="2C3E50"/>
+                          </a:solidFill>
+                          <a:latin typeface="맑은 고딕"/>
+                        </a:defRPr>
+                      </a:pPr>
+                      <a:r>
+                        <a:t>FP8 양자화</a:t>
                       </a:r>
                     </a:p>
                   </a:txBody>
@@ -4784,10 +6675,15 @@
                     <a:lstStyle/>
                     <a:p>
                       <a:pPr algn="ctr">
-                        <a:defRPr sz="1200"/>
-                      </a:pPr>
-                      <a:r>
-                        <a:t>변화 없음</a:t>
+                        <a:defRPr sz="1100">
+                          <a:solidFill>
+                            <a:srgbClr val="2C3E50"/>
+                          </a:solidFill>
+                          <a:latin typeface="맑은 고딕"/>
+                        </a:defRPr>
+                      </a:pPr>
+                      <a:r>
+                        <a:t>FP8 Dynamic / Static</a:t>
                       </a:r>
                     </a:p>
                   </a:txBody>
@@ -4803,10 +6699,15 @@
                     <a:lstStyle/>
                     <a:p>
                       <a:pPr algn="ctr">
-                        <a:defRPr sz="1200"/>
-                      </a:pPr>
-                      <a:r>
-                        <a:t>학습 파라미터 &lt;5%로 불충분</a:t>
+                        <a:defRPr sz="1100">
+                          <a:solidFill>
+                            <a:srgbClr val="2C3E50"/>
+                          </a:solidFill>
+                          <a:latin typeface="맑은 고딕"/>
+                        </a:defRPr>
+                      </a:pPr>
+                      <a:r>
+                        <a:t>Score ~0.49</a:t>
                       </a:r>
                     </a:p>
                   </a:txBody>
@@ -4816,65 +6717,21 @@
                     </a:solidFill>
                   </a:tcPr>
                 </a:tc>
-              </a:tr>
-              <a:tr h="514350">
-                <a:tc>
-                  <a:txBody>
-                    <a:bodyPr/>
-                    <a:lstStyle/>
-                    <a:p>
-                      <a:pPr algn="ctr">
-                        <a:defRPr sz="1200"/>
-                      </a:pPr>
-                      <a:r>
-                        <a:t>레이어 프루닝 (30→28L)</a:t>
-                      </a:r>
-                    </a:p>
-                  </a:txBody>
-                  <a:tcPr/>
-                </a:tc>
-                <a:tc>
-                  <a:txBody>
-                    <a:bodyPr/>
-                    <a:lstStyle/>
-                    <a:p>
-                      <a:pPr algn="ctr">
-                        <a:defRPr sz="1200"/>
-                      </a:pPr>
-                      <a:r>
-                        <a:t>perf 0.325→0.308</a:t>
-                      </a:r>
-                    </a:p>
-                  </a:txBody>
-                  <a:tcPr/>
-                </a:tc>
-                <a:tc>
-                  <a:txBody>
-                    <a:bodyPr/>
-                    <a:lstStyle/>
-                    <a:p>
-                      <a:pPr algn="ctr">
-                        <a:defRPr sz="1200"/>
-                      </a:pPr>
-                      <a:r>
-                        <a:t>속도 이득 대비 품질 손실 과도</a:t>
-                      </a:r>
-                    </a:p>
-                  </a:txBody>
-                  <a:tcPr/>
-                </a:tc>
-              </a:tr>
-              <a:tr h="514350">
-                <a:tc>
-                  <a:txBody>
-                    <a:bodyPr/>
-                    <a:lstStyle/>
-                    <a:p>
-                      <a:pPr algn="ctr">
-                        <a:defRPr sz="1200"/>
-                      </a:pPr>
-                      <a:r>
-                        <a:t>FFN 폭 프루닝 (25%)</a:t>
+                <a:tc>
+                  <a:txBody>
+                    <a:bodyPr/>
+                    <a:lstStyle/>
+                    <a:p>
+                      <a:pPr algn="ctr">
+                        <a:defRPr sz="1100">
+                          <a:solidFill>
+                            <a:srgbClr val="2C3E50"/>
+                          </a:solidFill>
+                          <a:latin typeface="맑은 고딕"/>
+                        </a:defRPr>
+                      </a:pPr>
+                      <a:r>
+                        <a:t>L4 FP8 커널 최적화 부족</a:t>
                       </a:r>
                     </a:p>
                   </a:txBody>
@@ -4884,16 +6741,105 @@
                     </a:solidFill>
                   </a:tcPr>
                 </a:tc>
-                <a:tc>
-                  <a:txBody>
-                    <a:bodyPr/>
-                    <a:lstStyle/>
-                    <a:p>
-                      <a:pPr algn="ctr">
-                        <a:defRPr sz="1200"/>
-                      </a:pPr>
-                      <a:r>
-                        <a:t>perf 0.273</a:t>
+              </a:tr>
+              <a:tr h="378822">
+                <a:tc>
+                  <a:txBody>
+                    <a:bodyPr/>
+                    <a:lstStyle/>
+                    <a:p>
+                      <a:pPr algn="ctr">
+                        <a:defRPr sz="1100">
+                          <a:solidFill>
+                            <a:srgbClr val="2C3E50"/>
+                          </a:solidFill>
+                          <a:latin typeface="맑은 고딕"/>
+                        </a:defRPr>
+                      </a:pPr>
+                      <a:r>
+                        <a:t>SFT (미세조정)</a:t>
+                      </a:r>
+                    </a:p>
+                  </a:txBody>
+                  <a:tcPr/>
+                </a:tc>
+                <a:tc>
+                  <a:txBody>
+                    <a:bodyPr/>
+                    <a:lstStyle/>
+                    <a:p>
+                      <a:pPr algn="ctr">
+                        <a:defRPr sz="1100">
+                          <a:solidFill>
+                            <a:srgbClr val="2C3E50"/>
+                          </a:solidFill>
+                          <a:latin typeface="맑은 고딕"/>
+                        </a:defRPr>
+                      </a:pPr>
+                      <a:r>
+                        <a:t>LoRA SFT → 양자화</a:t>
+                      </a:r>
+                    </a:p>
+                  </a:txBody>
+                  <a:tcPr/>
+                </a:tc>
+                <a:tc>
+                  <a:txBody>
+                    <a:bodyPr/>
+                    <a:lstStyle/>
+                    <a:p>
+                      <a:pPr algn="ctr">
+                        <a:defRPr sz="1100">
+                          <a:solidFill>
+                            <a:srgbClr val="2C3E50"/>
+                          </a:solidFill>
+                          <a:latin typeface="맑은 고딕"/>
+                        </a:defRPr>
+                      </a:pPr>
+                      <a:r>
+                        <a:t>Score 0.32~0.48</a:t>
+                      </a:r>
+                    </a:p>
+                  </a:txBody>
+                  <a:tcPr/>
+                </a:tc>
+                <a:tc>
+                  <a:txBody>
+                    <a:bodyPr/>
+                    <a:lstStyle/>
+                    <a:p>
+                      <a:pPr algn="ctr">
+                        <a:defRPr sz="1100">
+                          <a:solidFill>
+                            <a:srgbClr val="2C3E50"/>
+                          </a:solidFill>
+                          <a:latin typeface="맑은 고딕"/>
+                        </a:defRPr>
+                      </a:pPr>
+                      <a:r>
+                        <a:t>MANTA SFT가 1.2B 성능 저하</a:t>
+                      </a:r>
+                    </a:p>
+                  </a:txBody>
+                  <a:tcPr/>
+                </a:tc>
+              </a:tr>
+              <a:tr h="378822">
+                <a:tc>
+                  <a:txBody>
+                    <a:bodyPr/>
+                    <a:lstStyle/>
+                    <a:p>
+                      <a:pPr algn="ctr">
+                        <a:defRPr sz="1100">
+                          <a:solidFill>
+                            <a:srgbClr val="2C3E50"/>
+                          </a:solidFill>
+                          <a:latin typeface="맑은 고딕"/>
+                        </a:defRPr>
+                      </a:pPr>
+                      <a:r>
+                        <a:t>Post-quant SFT</a:t>
                       </a:r>
                     </a:p>
                   </a:txBody>
@@ -4909,10 +6855,15 @@
                     <a:lstStyle/>
                     <a:p>
                       <a:pPr algn="ctr">
-                        <a:defRPr sz="1200"/>
-                      </a:pPr>
-                      <a:r>
-                        <a:t>너무 공격적인 구조 변경</a:t>
+                        <a:defRPr sz="1100">
+                          <a:solidFill>
+                            <a:srgbClr val="2C3E50"/>
+                          </a:solidFill>
+                          <a:latin typeface="맑은 고딕"/>
+                        </a:defRPr>
+                      </a:pPr>
+                      <a:r>
+                        <a:t>양자화 후 norm만 SFT</a:t>
                       </a:r>
                     </a:p>
                   </a:txBody>
@@ -4922,65 +6873,21 @@
                     </a:solidFill>
                   </a:tcPr>
                 </a:tc>
-              </a:tr>
-              <a:tr h="514350">
-                <a:tc>
-                  <a:txBody>
-                    <a:bodyPr/>
-                    <a:lstStyle/>
-                    <a:p>
-                      <a:pPr algn="ctr">
-                        <a:defRPr sz="1200"/>
-                      </a:pPr>
-                      <a:r>
-                        <a:t>Vocab 프루닝 (102k→80k)</a:t>
-                      </a:r>
-                    </a:p>
-                  </a:txBody>
-                  <a:tcPr/>
-                </a:tc>
-                <a:tc>
-                  <a:txBody>
-                    <a:bodyPr/>
-                    <a:lstStyle/>
-                    <a:p>
-                      <a:pPr algn="ctr">
-                        <a:defRPr sz="1200"/>
-                      </a:pPr>
-                      <a:r>
-                        <a:t>서버 0.48</a:t>
-                      </a:r>
-                    </a:p>
-                  </a:txBody>
-                  <a:tcPr/>
-                </a:tc>
-                <a:tc>
-                  <a:txBody>
-                    <a:bodyPr/>
-                    <a:lstStyle/>
-                    <a:p>
-                      <a:pPr algn="ctr">
-                        <a:defRPr sz="1200"/>
-                      </a:pPr>
-                      <a:r>
-                        <a:t>byte-fallback으로 토큰 수 폭증</a:t>
-                      </a:r>
-                    </a:p>
-                  </a:txBody>
-                  <a:tcPr/>
-                </a:tc>
-              </a:tr>
-              <a:tr h="514350">
-                <a:tc>
-                  <a:txBody>
-                    <a:bodyPr/>
-                    <a:lstStyle/>
-                    <a:p>
-                      <a:pPr algn="ctr">
-                        <a:defRPr sz="1200"/>
-                      </a:pPr>
-                      <a:r>
-                        <a:t>Self-KD + QuantMod</a:t>
+                <a:tc>
+                  <a:txBody>
+                    <a:bodyPr/>
+                    <a:lstStyle/>
+                    <a:p>
+                      <a:pPr algn="ctr">
+                        <a:defRPr sz="1100">
+                          <a:solidFill>
+                            <a:srgbClr val="2C3E50"/>
+                          </a:solidFill>
+                          <a:latin typeface="맑은 고딕"/>
+                        </a:defRPr>
+                      </a:pPr>
+                      <a:r>
+                        <a:t>변화 없음</a:t>
                       </a:r>
                     </a:p>
                   </a:txBody>
@@ -4996,10 +6903,15 @@
                     <a:lstStyle/>
                     <a:p>
                       <a:pPr algn="ctr">
-                        <a:defRPr sz="1200"/>
-                      </a:pPr>
-                      <a:r>
-                        <a:t>perf 소폭 하락</a:t>
+                        <a:defRPr sz="1100">
+                          <a:solidFill>
+                            <a:srgbClr val="2C3E50"/>
+                          </a:solidFill>
+                          <a:latin typeface="맑은 고딕"/>
+                        </a:defRPr>
+                      </a:pPr>
+                      <a:r>
+                        <a:t>학습 파라미터 &lt;5% 불충분</a:t>
                       </a:r>
                     </a:p>
                   </a:txBody>
@@ -5009,16 +6921,105 @@
                     </a:solidFill>
                   </a:tcPr>
                 </a:tc>
-                <a:tc>
-                  <a:txBody>
-                    <a:bodyPr/>
-                    <a:lstStyle/>
-                    <a:p>
-                      <a:pPr algn="ctr">
-                        <a:defRPr sz="1200"/>
-                      </a:pPr>
-                      <a:r>
-                        <a:t>minmax에 KD 가중치 민감</a:t>
+              </a:tr>
+              <a:tr h="378822">
+                <a:tc>
+                  <a:txBody>
+                    <a:bodyPr/>
+                    <a:lstStyle/>
+                    <a:p>
+                      <a:pPr algn="ctr">
+                        <a:defRPr sz="1100">
+                          <a:solidFill>
+                            <a:srgbClr val="2C3E50"/>
+                          </a:solidFill>
+                          <a:latin typeface="맑은 고딕"/>
+                        </a:defRPr>
+                      </a:pPr>
+                      <a:r>
+                        <a:t>레이어 프루닝</a:t>
+                      </a:r>
+                    </a:p>
+                  </a:txBody>
+                  <a:tcPr/>
+                </a:tc>
+                <a:tc>
+                  <a:txBody>
+                    <a:bodyPr/>
+                    <a:lstStyle/>
+                    <a:p>
+                      <a:pPr algn="ctr">
+                        <a:defRPr sz="1100">
+                          <a:solidFill>
+                            <a:srgbClr val="2C3E50"/>
+                          </a:solidFill>
+                          <a:latin typeface="맑은 고딕"/>
+                        </a:defRPr>
+                      </a:pPr>
+                      <a:r>
+                        <a:t>30L → 28L/26L + KD</a:t>
+                      </a:r>
+                    </a:p>
+                  </a:txBody>
+                  <a:tcPr/>
+                </a:tc>
+                <a:tc>
+                  <a:txBody>
+                    <a:bodyPr/>
+                    <a:lstStyle/>
+                    <a:p>
+                      <a:pPr algn="ctr">
+                        <a:defRPr sz="1100">
+                          <a:solidFill>
+                            <a:srgbClr val="2C3E50"/>
+                          </a:solidFill>
+                          <a:latin typeface="맑은 고딕"/>
+                        </a:defRPr>
+                      </a:pPr>
+                      <a:r>
+                        <a:t>Score 0.47</a:t>
+                      </a:r>
+                    </a:p>
+                  </a:txBody>
+                  <a:tcPr/>
+                </a:tc>
+                <a:tc>
+                  <a:txBody>
+                    <a:bodyPr/>
+                    <a:lstStyle/>
+                    <a:p>
+                      <a:pPr algn="ctr">
+                        <a:defRPr sz="1100">
+                          <a:solidFill>
+                            <a:srgbClr val="2C3E50"/>
+                          </a:solidFill>
+                          <a:latin typeface="맑은 고딕"/>
+                        </a:defRPr>
+                      </a:pPr>
+                      <a:r>
+                        <a:t>속도 이득 대비 품질 손실 과도</a:t>
+                      </a:r>
+                    </a:p>
+                  </a:txBody>
+                  <a:tcPr/>
+                </a:tc>
+              </a:tr>
+              <a:tr h="378822">
+                <a:tc>
+                  <a:txBody>
+                    <a:bodyPr/>
+                    <a:lstStyle/>
+                    <a:p>
+                      <a:pPr algn="ctr">
+                        <a:defRPr sz="1100">
+                          <a:solidFill>
+                            <a:srgbClr val="2C3E50"/>
+                          </a:solidFill>
+                          <a:latin typeface="맑은 고딕"/>
+                        </a:defRPr>
+                      </a:pPr>
+                      <a:r>
+                        <a:t>FFN 프루닝</a:t>
                       </a:r>
                     </a:p>
                   </a:txBody>
@@ -5028,18 +7029,95 @@
                     </a:solidFill>
                   </a:tcPr>
                 </a:tc>
+                <a:tc>
+                  <a:txBody>
+                    <a:bodyPr/>
+                    <a:lstStyle/>
+                    <a:p>
+                      <a:pPr algn="ctr">
+                        <a:defRPr sz="1100">
+                          <a:solidFill>
+                            <a:srgbClr val="2C3E50"/>
+                          </a:solidFill>
+                          <a:latin typeface="맑은 고딕"/>
+                        </a:defRPr>
+                      </a:pPr>
+                      <a:r>
+                        <a:t>25% FFN 폭 축소</a:t>
+                      </a:r>
+                    </a:p>
+                  </a:txBody>
+                  <a:tcPr>
+                    <a:solidFill>
+                      <a:srgbClr val="F0F0F5"/>
+                    </a:solidFill>
+                  </a:tcPr>
+                </a:tc>
+                <a:tc>
+                  <a:txBody>
+                    <a:bodyPr/>
+                    <a:lstStyle/>
+                    <a:p>
+                      <a:pPr algn="ctr">
+                        <a:defRPr sz="1100">
+                          <a:solidFill>
+                            <a:srgbClr val="2C3E50"/>
+                          </a:solidFill>
+                          <a:latin typeface="맑은 고딕"/>
+                        </a:defRPr>
+                      </a:pPr>
+                      <a:r>
+                        <a:t>perf 0.273</a:t>
+                      </a:r>
+                    </a:p>
+                  </a:txBody>
+                  <a:tcPr>
+                    <a:solidFill>
+                      <a:srgbClr val="F0F0F5"/>
+                    </a:solidFill>
+                  </a:tcPr>
+                </a:tc>
+                <a:tc>
+                  <a:txBody>
+                    <a:bodyPr/>
+                    <a:lstStyle/>
+                    <a:p>
+                      <a:pPr algn="ctr">
+                        <a:defRPr sz="1100">
+                          <a:solidFill>
+                            <a:srgbClr val="2C3E50"/>
+                          </a:solidFill>
+                          <a:latin typeface="맑은 고딕"/>
+                        </a:defRPr>
+                      </a:pPr>
+                      <a:r>
+                        <a:t>너무 공격적, 복구 불가</a:t>
+                      </a:r>
+                    </a:p>
+                  </a:txBody>
+                  <a:tcPr>
+                    <a:solidFill>
+                      <a:srgbClr val="F0F0F5"/>
+                    </a:solidFill>
+                  </a:tcPr>
+                </a:tc>
               </a:tr>
-              <a:tr h="514350">
-                <a:tc>
-                  <a:txBody>
-                    <a:bodyPr/>
-                    <a:lstStyle/>
-                    <a:p>
-                      <a:pPr algn="ctr">
-                        <a:defRPr sz="1200"/>
-                      </a:pPr>
-                      <a:r>
-                        <a:t>KV Cache FP8</a:t>
+              <a:tr h="378822">
+                <a:tc>
+                  <a:txBody>
+                    <a:bodyPr/>
+                    <a:lstStyle/>
+                    <a:p>
+                      <a:pPr algn="ctr">
+                        <a:defRPr sz="1100">
+                          <a:solidFill>
+                            <a:srgbClr val="2C3E50"/>
+                          </a:solidFill>
+                          <a:latin typeface="맑은 고딕"/>
+                        </a:defRPr>
+                      </a:pPr>
+                      <a:r>
+                        <a:t>Vocab 프루닝</a:t>
                       </a:r>
                     </a:p>
                   </a:txBody>
@@ -5051,7 +7129,572 @@
                     <a:lstStyle/>
                     <a:p>
                       <a:pPr algn="ctr">
-                        <a:defRPr sz="1200"/>
+                        <a:defRPr sz="1100">
+                          <a:solidFill>
+                            <a:srgbClr val="2C3E50"/>
+                          </a:solidFill>
+                          <a:latin typeface="맑은 고딕"/>
+                        </a:defRPr>
+                      </a:pPr>
+                      <a:r>
+                        <a:t>102k → 80k 토큰</a:t>
+                      </a:r>
+                    </a:p>
+                  </a:txBody>
+                  <a:tcPr/>
+                </a:tc>
+                <a:tc>
+                  <a:txBody>
+                    <a:bodyPr/>
+                    <a:lstStyle/>
+                    <a:p>
+                      <a:pPr algn="ctr">
+                        <a:defRPr sz="1100">
+                          <a:solidFill>
+                            <a:srgbClr val="2C3E50"/>
+                          </a:solidFill>
+                          <a:latin typeface="맑은 고딕"/>
+                        </a:defRPr>
+                      </a:pPr>
+                      <a:r>
+                        <a:t>Score 0.48</a:t>
+                      </a:r>
+                    </a:p>
+                  </a:txBody>
+                  <a:tcPr/>
+                </a:tc>
+                <a:tc>
+                  <a:txBody>
+                    <a:bodyPr/>
+                    <a:lstStyle/>
+                    <a:p>
+                      <a:pPr algn="ctr">
+                        <a:defRPr sz="1100">
+                          <a:solidFill>
+                            <a:srgbClr val="2C3E50"/>
+                          </a:solidFill>
+                          <a:latin typeface="맑은 고딕"/>
+                        </a:defRPr>
+                      </a:pPr>
+                      <a:r>
+                        <a:t>byte-fallback으로 토큰 폭증</a:t>
+                      </a:r>
+                    </a:p>
+                  </a:txBody>
+                  <a:tcPr/>
+                </a:tc>
+              </a:tr>
+              <a:tr h="378822">
+                <a:tc>
+                  <a:txBody>
+                    <a:bodyPr/>
+                    <a:lstStyle/>
+                    <a:p>
+                      <a:pPr algn="ctr">
+                        <a:defRPr sz="1100">
+                          <a:solidFill>
+                            <a:srgbClr val="2C3E50"/>
+                          </a:solidFill>
+                          <a:latin typeface="맑은 고딕"/>
+                        </a:defRPr>
+                      </a:pPr>
+                      <a:r>
+                        <a:t>지식증류 (KD)</a:t>
+                      </a:r>
+                    </a:p>
+                  </a:txBody>
+                  <a:tcPr>
+                    <a:solidFill>
+                      <a:srgbClr val="F0F0F5"/>
+                    </a:solidFill>
+                  </a:tcPr>
+                </a:tc>
+                <a:tc>
+                  <a:txBody>
+                    <a:bodyPr/>
+                    <a:lstStyle/>
+                    <a:p>
+                      <a:pPr algn="ctr">
+                        <a:defRPr sz="1100">
+                          <a:solidFill>
+                            <a:srgbClr val="2C3E50"/>
+                          </a:solidFill>
+                          <a:latin typeface="맑은 고딕"/>
+                        </a:defRPr>
+                      </a:pPr>
+                      <a:r>
+                        <a:t>32B/7.8B teacher → 1.2B</a:t>
+                      </a:r>
+                    </a:p>
+                  </a:txBody>
+                  <a:tcPr>
+                    <a:solidFill>
+                      <a:srgbClr val="F0F0F5"/>
+                    </a:solidFill>
+                  </a:tcPr>
+                </a:tc>
+                <a:tc>
+                  <a:txBody>
+                    <a:bodyPr/>
+                    <a:lstStyle/>
+                    <a:p>
+                      <a:pPr algn="ctr">
+                        <a:defRPr sz="1100">
+                          <a:solidFill>
+                            <a:srgbClr val="2C3E50"/>
+                          </a:solidFill>
+                          <a:latin typeface="맑은 고딕"/>
+                        </a:defRPr>
+                      </a:pPr>
+                      <a:r>
+                        <a:t>Score 0.26</a:t>
+                      </a:r>
+                    </a:p>
+                  </a:txBody>
+                  <a:tcPr>
+                    <a:solidFill>
+                      <a:srgbClr val="F0F0F5"/>
+                    </a:solidFill>
+                  </a:tcPr>
+                </a:tc>
+                <a:tc>
+                  <a:txBody>
+                    <a:bodyPr/>
+                    <a:lstStyle/>
+                    <a:p>
+                      <a:pPr algn="ctr">
+                        <a:defRPr sz="1100">
+                          <a:solidFill>
+                            <a:srgbClr val="2C3E50"/>
+                          </a:solidFill>
+                          <a:latin typeface="맑은 고딕"/>
+                        </a:defRPr>
+                      </a:pPr>
+                      <a:r>
+                        <a:t>가중치 변경 → 양자화 에러 증가</a:t>
+                      </a:r>
+                    </a:p>
+                  </a:txBody>
+                  <a:tcPr>
+                    <a:solidFill>
+                      <a:srgbClr val="F0F0F5"/>
+                    </a:solidFill>
+                  </a:tcPr>
+                </a:tc>
+              </a:tr>
+              <a:tr h="378822">
+                <a:tc>
+                  <a:txBody>
+                    <a:bodyPr/>
+                    <a:lstStyle/>
+                    <a:p>
+                      <a:pPr algn="ctr">
+                        <a:defRPr sz="1100">
+                          <a:solidFill>
+                            <a:srgbClr val="2C3E50"/>
+                          </a:solidFill>
+                          <a:latin typeface="맑은 고딕"/>
+                        </a:defRPr>
+                      </a:pPr>
+                      <a:r>
+                        <a:t>SmoothQuant</a:t>
+                      </a:r>
+                    </a:p>
+                  </a:txBody>
+                  <a:tcPr/>
+                </a:tc>
+                <a:tc>
+                  <a:txBody>
+                    <a:bodyPr/>
+                    <a:lstStyle/>
+                    <a:p>
+                      <a:pPr algn="ctr">
+                        <a:defRPr sz="1100">
+                          <a:solidFill>
+                            <a:srgbClr val="2C3E50"/>
+                          </a:solidFill>
+                          <a:latin typeface="맑은 고딕"/>
+                        </a:defRPr>
+                      </a:pPr>
+                      <a:r>
+                        <a:t>활성화 분포 평탄화</a:t>
+                      </a:r>
+                    </a:p>
+                  </a:txBody>
+                  <a:tcPr/>
+                </a:tc>
+                <a:tc>
+                  <a:txBody>
+                    <a:bodyPr/>
+                    <a:lstStyle/>
+                    <a:p>
+                      <a:pPr algn="ctr">
+                        <a:defRPr sz="1100">
+                          <a:solidFill>
+                            <a:srgbClr val="2C3E50"/>
+                          </a:solidFill>
+                          <a:latin typeface="맑은 고딕"/>
+                        </a:defRPr>
+                      </a:pPr>
+                      <a:r>
+                        <a:t>실행 불가</a:t>
+                      </a:r>
+                    </a:p>
+                  </a:txBody>
+                  <a:tcPr/>
+                </a:tc>
+                <a:tc>
+                  <a:txBody>
+                    <a:bodyPr/>
+                    <a:lstStyle/>
+                    <a:p>
+                      <a:pPr algn="ctr">
+                        <a:defRPr sz="1100">
+                          <a:solidFill>
+                            <a:srgbClr val="2C3E50"/>
+                          </a:solidFill>
+                          <a:latin typeface="맑은 고딕"/>
+                        </a:defRPr>
+                      </a:pPr>
+                      <a:r>
+                        <a:t>EXAONE 아키텍처 미지원</a:t>
+                      </a:r>
+                    </a:p>
+                  </a:txBody>
+                  <a:tcPr/>
+                </a:tc>
+              </a:tr>
+              <a:tr h="378822">
+                <a:tc>
+                  <a:txBody>
+                    <a:bodyPr/>
+                    <a:lstStyle/>
+                    <a:p>
+                      <a:pPr algn="ctr">
+                        <a:defRPr sz="1100">
+                          <a:solidFill>
+                            <a:srgbClr val="2C3E50"/>
+                          </a:solidFill>
+                          <a:latin typeface="맑은 고딕"/>
+                        </a:defRPr>
+                      </a:pPr>
+                      <a:r>
+                        <a:t>2:4 Sparsity</a:t>
+                      </a:r>
+                    </a:p>
+                  </a:txBody>
+                  <a:tcPr>
+                    <a:solidFill>
+                      <a:srgbClr val="F0F0F5"/>
+                    </a:solidFill>
+                  </a:tcPr>
+                </a:tc>
+                <a:tc>
+                  <a:txBody>
+                    <a:bodyPr/>
+                    <a:lstStyle/>
+                    <a:p>
+                      <a:pPr algn="ctr">
+                        <a:defRPr sz="1100">
+                          <a:solidFill>
+                            <a:srgbClr val="2C3E50"/>
+                          </a:solidFill>
+                          <a:latin typeface="맑은 고딕"/>
+                        </a:defRPr>
+                      </a:pPr>
+                      <a:r>
+                        <a:t>Wanda 구조적 스파시티</a:t>
+                      </a:r>
+                    </a:p>
+                  </a:txBody>
+                  <a:tcPr>
+                    <a:solidFill>
+                      <a:srgbClr val="F0F0F5"/>
+                    </a:solidFill>
+                  </a:tcPr>
+                </a:tc>
+                <a:tc>
+                  <a:txBody>
+                    <a:bodyPr/>
+                    <a:lstStyle/>
+                    <a:p>
+                      <a:pPr algn="ctr">
+                        <a:defRPr sz="1100">
+                          <a:solidFill>
+                            <a:srgbClr val="2C3E50"/>
+                          </a:solidFill>
+                          <a:latin typeface="맑은 고딕"/>
+                        </a:defRPr>
+                      </a:pPr>
+                      <a:r>
+                        <a:t>실행 불가</a:t>
+                      </a:r>
+                    </a:p>
+                  </a:txBody>
+                  <a:tcPr>
+                    <a:solidFill>
+                      <a:srgbClr val="F0F0F5"/>
+                    </a:solidFill>
+                  </a:tcPr>
+                </a:tc>
+                <a:tc>
+                  <a:txBody>
+                    <a:bodyPr/>
+                    <a:lstStyle/>
+                    <a:p>
+                      <a:pPr algn="ctr">
+                        <a:defRPr sz="1100">
+                          <a:solidFill>
+                            <a:srgbClr val="2C3E50"/>
+                          </a:solidFill>
+                          <a:latin typeface="맑은 고딕"/>
+                        </a:defRPr>
+                      </a:pPr>
+                      <a:r>
+                        <a:t>compute cap &gt;= 90 필요 (L4=89)</a:t>
+                      </a:r>
+                    </a:p>
+                  </a:txBody>
+                  <a:tcPr>
+                    <a:solidFill>
+                      <a:srgbClr val="F0F0F5"/>
+                    </a:solidFill>
+                  </a:tcPr>
+                </a:tc>
+              </a:tr>
+              <a:tr h="378822">
+                <a:tc>
+                  <a:txBody>
+                    <a:bodyPr/>
+                    <a:lstStyle/>
+                    <a:p>
+                      <a:pPr algn="ctr">
+                        <a:defRPr sz="1100">
+                          <a:solidFill>
+                            <a:srgbClr val="2C3E50"/>
+                          </a:solidFill>
+                          <a:latin typeface="맑은 고딕"/>
+                        </a:defRPr>
+                      </a:pPr>
+                      <a:r>
+                        <a:t>Selective Quant</a:t>
+                      </a:r>
+                    </a:p>
+                  </a:txBody>
+                  <a:tcPr/>
+                </a:tc>
+                <a:tc>
+                  <a:txBody>
+                    <a:bodyPr/>
+                    <a:lstStyle/>
+                    <a:p>
+                      <a:pPr algn="ctr">
+                        <a:defRPr sz="1100">
+                          <a:solidFill>
+                            <a:srgbClr val="2C3E50"/>
+                          </a:solidFill>
+                          <a:latin typeface="맑은 고딕"/>
+                        </a:defRPr>
+                      </a:pPr>
+                      <a:r>
+                        <a:t>후반 5개 레이어 BF16 유지</a:t>
+                      </a:r>
+                    </a:p>
+                  </a:txBody>
+                  <a:tcPr/>
+                </a:tc>
+                <a:tc>
+                  <a:txBody>
+                    <a:bodyPr/>
+                    <a:lstStyle/>
+                    <a:p>
+                      <a:pPr algn="ctr">
+                        <a:defRPr sz="1100">
+                          <a:solidFill>
+                            <a:srgbClr val="2C3E50"/>
+                          </a:solidFill>
+                          <a:latin typeface="맑은 고딕"/>
+                        </a:defRPr>
+                      </a:pPr>
+                      <a:r>
+                        <a:t>Score 0.47</a:t>
+                      </a:r>
+                    </a:p>
+                  </a:txBody>
+                  <a:tcPr/>
+                </a:tc>
+                <a:tc>
+                  <a:txBody>
+                    <a:bodyPr/>
+                    <a:lstStyle/>
+                    <a:p>
+                      <a:pPr algn="ctr">
+                        <a:defRPr sz="1100">
+                          <a:solidFill>
+                            <a:srgbClr val="2C3E50"/>
+                          </a:solidFill>
+                          <a:latin typeface="맑은 고딕"/>
+                        </a:defRPr>
+                      </a:pPr>
+                      <a:r>
+                        <a:t>혼합 정밀도 → INT8 커널 이탈</a:t>
+                      </a:r>
+                    </a:p>
+                  </a:txBody>
+                  <a:tcPr/>
+                </a:tc>
+              </a:tr>
+              <a:tr h="378822">
+                <a:tc>
+                  <a:txBody>
+                    <a:bodyPr/>
+                    <a:lstStyle/>
+                    <a:p>
+                      <a:pPr algn="ctr">
+                        <a:defRPr sz="1100">
+                          <a:solidFill>
+                            <a:srgbClr val="2C3E50"/>
+                          </a:solidFill>
+                          <a:latin typeface="맑은 고딕"/>
+                        </a:defRPr>
+                      </a:pPr>
+                      <a:r>
+                        <a:t>GPTQ Advanced</a:t>
+                      </a:r>
+                    </a:p>
+                  </a:txBody>
+                  <a:tcPr>
+                    <a:solidFill>
+                      <a:srgbClr val="F0F0F5"/>
+                    </a:solidFill>
+                  </a:tcPr>
+                </a:tc>
+                <a:tc>
+                  <a:txBody>
+                    <a:bodyPr/>
+                    <a:lstStyle/>
+                    <a:p>
+                      <a:pPr algn="ctr">
+                        <a:defRPr sz="1100">
+                          <a:solidFill>
+                            <a:srgbClr val="2C3E50"/>
+                          </a:solidFill>
+                          <a:latin typeface="맑은 고딕"/>
+                        </a:defRPr>
+                      </a:pPr>
+                      <a:r>
+                        <a:t>actorder=group, block=128</a:t>
+                      </a:r>
+                    </a:p>
+                  </a:txBody>
+                  <a:tcPr>
+                    <a:solidFill>
+                      <a:srgbClr val="F0F0F5"/>
+                    </a:solidFill>
+                  </a:tcPr>
+                </a:tc>
+                <a:tc>
+                  <a:txBody>
+                    <a:bodyPr/>
+                    <a:lstStyle/>
+                    <a:p>
+                      <a:pPr algn="ctr">
+                        <a:defRPr sz="1100">
+                          <a:solidFill>
+                            <a:srgbClr val="2C3E50"/>
+                          </a:solidFill>
+                          <a:latin typeface="맑은 고딕"/>
+                        </a:defRPr>
+                      </a:pPr>
+                      <a:r>
+                        <a:t>Score 0.51</a:t>
+                      </a:r>
+                    </a:p>
+                  </a:txBody>
+                  <a:tcPr>
+                    <a:solidFill>
+                      <a:srgbClr val="F0F0F5"/>
+                    </a:solidFill>
+                  </a:tcPr>
+                </a:tc>
+                <a:tc>
+                  <a:txBody>
+                    <a:bodyPr/>
+                    <a:lstStyle/>
+                    <a:p>
+                      <a:pPr algn="ctr">
+                        <a:defRPr sz="1100">
+                          <a:solidFill>
+                            <a:srgbClr val="2C3E50"/>
+                          </a:solidFill>
+                          <a:latin typeface="맑은 고딕"/>
+                        </a:defRPr>
+                      </a:pPr>
+                      <a:r>
+                        <a:t>그룹 양자화 CUTLASS 비효율</a:t>
+                      </a:r>
+                    </a:p>
+                  </a:txBody>
+                  <a:tcPr>
+                    <a:solidFill>
+                      <a:srgbClr val="F0F0F5"/>
+                    </a:solidFill>
+                  </a:tcPr>
+                </a:tc>
+              </a:tr>
+              <a:tr h="378834">
+                <a:tc>
+                  <a:txBody>
+                    <a:bodyPr/>
+                    <a:lstStyle/>
+                    <a:p>
+                      <a:pPr algn="ctr">
+                        <a:defRPr sz="1100">
+                          <a:solidFill>
+                            <a:srgbClr val="2C3E50"/>
+                          </a:solidFill>
+                          <a:latin typeface="맑은 고딕"/>
+                        </a:defRPr>
+                      </a:pPr>
+                      <a:r>
+                        <a:t>FP8 KV Cache</a:t>
+                      </a:r>
+                    </a:p>
+                  </a:txBody>
+                  <a:tcPr/>
+                </a:tc>
+                <a:tc>
+                  <a:txBody>
+                    <a:bodyPr/>
+                    <a:lstStyle/>
+                    <a:p>
+                      <a:pPr algn="ctr">
+                        <a:defRPr sz="1100">
+                          <a:solidFill>
+                            <a:srgbClr val="2C3E50"/>
+                          </a:solidFill>
+                          <a:latin typeface="맑은 고딕"/>
+                        </a:defRPr>
+                      </a:pPr>
+                      <a:r>
+                        <a:t>KV Cache FP8 양자화</a:t>
+                      </a:r>
+                    </a:p>
+                  </a:txBody>
+                  <a:tcPr/>
+                </a:tc>
+                <a:tc>
+                  <a:txBody>
+                    <a:bodyPr/>
+                    <a:lstStyle/>
+                    <a:p>
+                      <a:pPr algn="ctr">
+                        <a:defRPr sz="1100">
+                          <a:solidFill>
+                            <a:srgbClr val="2C3E50"/>
+                          </a:solidFill>
+                          <a:latin typeface="맑은 고딕"/>
+                        </a:defRPr>
                       </a:pPr>
                       <a:r>
                         <a:t>변화 없음</a:t>
@@ -5066,10 +7709,15 @@
                     <a:lstStyle/>
                     <a:p>
                       <a:pPr algn="ctr">
-                        <a:defRPr sz="1200"/>
-                      </a:pPr>
-                      <a:r>
-                        <a:t>L4에서 메모리가 병목 아님</a:t>
+                        <a:defRPr sz="1100">
+                          <a:solidFill>
+                            <a:srgbClr val="2C3E50"/>
+                          </a:solidFill>
+                          <a:latin typeface="맑은 고딕"/>
+                        </a:defRPr>
+                      </a:pPr>
+                      <a:r>
+                        <a:t>vLLM이 설정 무시</a:t>
                       </a:r>
                     </a:p>
                   </a:txBody>
@@ -5080,50 +7728,6 @@
           </a:graphicData>
         </a:graphic>
       </p:graphicFrame>
-      <p:sp>
-        <p:nvSpPr>
-          <p:cNvPr id="4" name="TextBox 3"/>
-          <p:cNvSpPr txBox="1"/>
-          <p:nvPr/>
-        </p:nvSpPr>
-        <p:spPr>
-          <a:xfrm>
-            <a:off x="914400" y="5760720"/>
-            <a:ext cx="10058400" cy="731520"/>
-          </a:xfrm>
-          <a:prstGeom prst="rect">
-            <a:avLst/>
-          </a:prstGeom>
-          <a:noFill/>
-        </p:spPr>
-        <p:txBody>
-          <a:bodyPr wrap="square">
-            <a:spAutoFit/>
-          </a:bodyPr>
-          <a:lstStyle/>
-          <a:p>
-            <a:pPr algn="l">
-              <a:defRPr sz="1300" b="0">
-                <a:solidFill>
-                  <a:srgbClr val="1A1A2E"/>
-                </a:solidFill>
-              </a:defRPr>
-            </a:pPr>
-          </a:p>
-          <a:p>
-            <a:pPr algn="l">
-              <a:defRPr sz="1400" b="0">
-                <a:solidFill>
-                  <a:srgbClr val="666666"/>
-                </a:solidFill>
-              </a:defRPr>
-            </a:pPr>
-            <a:r>
-              <a:t>총 110+ 모델 실험, 다양한 양자화/프루닝/파인튜닝 조합 탐색</a:t>
-            </a:r>
-          </a:p>
-        </p:txBody>
-      </p:sp>
     </p:spTree>
   </p:cSld>
   <p:clrMapOvr>
@@ -5150,8 +7754,8 @@
         </p:nvSpPr>
         <p:spPr>
           <a:xfrm>
-            <a:off x="731520" y="365760"/>
-            <a:ext cx="10058400" cy="731520"/>
+            <a:off x="457200" y="274320"/>
+            <a:ext cx="10972800" cy="548640"/>
           </a:xfrm>
           <a:prstGeom prst="rect">
             <a:avLst/>
@@ -5165,28 +7769,115 @@
           <a:lstStyle/>
           <a:p>
             <a:pPr algn="l">
-              <a:defRPr sz="3200" b="1">
-                <a:solidFill>
-                  <a:srgbClr val="0066FF"/>
-                </a:solidFill>
-              </a:defRPr>
-            </a:pPr>
-            <a:r>
-              <a:t>핵심 인사이트</a:t>
-            </a:r>
-          </a:p>
-        </p:txBody>
-      </p:sp>
-      <p:sp>
-        <p:nvSpPr>
-          <p:cNvPr id="3" name="TextBox 2"/>
+              <a:defRPr sz="3000" b="1">
+                <a:solidFill>
+                  <a:srgbClr val="2D5AA0"/>
+                </a:solidFill>
+                <a:latin typeface="맑은 고딕"/>
+              </a:defRPr>
+            </a:pPr>
+            <a:r>
+              <a:t>핵심 인사이트 4가지</a:t>
+            </a:r>
+          </a:p>
+        </p:txBody>
+      </p:sp>
+      <p:sp>
+        <p:nvSpPr>
+          <p:cNvPr id="3" name="Rectangle 2"/>
+          <p:cNvSpPr/>
+          <p:nvPr/>
+        </p:nvSpPr>
+        <p:spPr>
+          <a:xfrm>
+            <a:off x="457200" y="868680"/>
+            <a:ext cx="11247120" cy="38100"/>
+          </a:xfrm>
+          <a:prstGeom prst="rect">
+            <a:avLst/>
+          </a:prstGeom>
+          <a:solidFill>
+            <a:srgbClr val="2D5AA0"/>
+          </a:solidFill>
+          <a:ln>
+            <a:noFill/>
+          </a:ln>
+        </p:spPr>
+        <p:style>
+          <a:lnRef idx="1">
+            <a:schemeClr val="accent1"/>
+          </a:lnRef>
+          <a:fillRef idx="3">
+            <a:schemeClr val="accent1"/>
+          </a:fillRef>
+          <a:effectRef idx="2">
+            <a:schemeClr val="accent1"/>
+          </a:effectRef>
+          <a:fontRef idx="minor">
+            <a:schemeClr val="lt1"/>
+          </a:fontRef>
+        </p:style>
+        <p:txBody>
+          <a:bodyPr rtlCol="0" anchor="ctr"/>
+          <a:lstStyle/>
+          <a:p>
+            <a:pPr algn="ctr"/>
+          </a:p>
+        </p:txBody>
+      </p:sp>
+      <p:sp>
+        <p:nvSpPr>
+          <p:cNvPr id="4" name="Rounded Rectangle 3"/>
+          <p:cNvSpPr/>
+          <p:nvPr/>
+        </p:nvSpPr>
+        <p:spPr>
+          <a:xfrm>
+            <a:off x="457200" y="1188720"/>
+            <a:ext cx="5303520" cy="2377440"/>
+          </a:xfrm>
+          <a:prstGeom prst="roundRect">
+            <a:avLst/>
+          </a:prstGeom>
+          <a:solidFill>
+            <a:srgbClr val="F0F0F5"/>
+          </a:solidFill>
+          <a:ln>
+            <a:noFill/>
+          </a:ln>
+        </p:spPr>
+        <p:style>
+          <a:lnRef idx="1">
+            <a:schemeClr val="accent1"/>
+          </a:lnRef>
+          <a:fillRef idx="3">
+            <a:schemeClr val="accent1"/>
+          </a:fillRef>
+          <a:effectRef idx="2">
+            <a:schemeClr val="accent1"/>
+          </a:effectRef>
+          <a:fontRef idx="minor">
+            <a:schemeClr val="lt1"/>
+          </a:fontRef>
+        </p:style>
+        <p:txBody>
+          <a:bodyPr rtlCol="0" anchor="ctr"/>
+          <a:lstStyle/>
+          <a:p>
+            <a:pPr algn="ctr"/>
+          </a:p>
+        </p:txBody>
+      </p:sp>
+      <p:sp>
+        <p:nvSpPr>
+          <p:cNvPr id="5" name="TextBox 4"/>
           <p:cNvSpPr txBox="1"/>
           <p:nvPr/>
         </p:nvSpPr>
         <p:spPr>
           <a:xfrm>
-            <a:off x="731520" y="1371600"/>
-            <a:ext cx="5029200" cy="4572000"/>
+            <a:off x="640080" y="1325880"/>
+            <a:ext cx="4937760" cy="365760"/>
           </a:xfrm>
           <a:prstGeom prst="rect">
             <a:avLst/>
@@ -5200,139 +7891,29 @@
           <a:lstStyle/>
           <a:p>
             <a:pPr algn="l">
-              <a:defRPr sz="2200" b="1">
-                <a:solidFill>
-                  <a:srgbClr val="1A1A2E"/>
-                </a:solidFill>
-              </a:defRPr>
-            </a:pPr>
-            <a:r>
-              <a:t>1. 로컬 ≠ 서버</a:t>
-            </a:r>
-          </a:p>
-          <a:p>
-            <a:pPr algn="l">
-              <a:defRPr sz="1600" b="0">
-                <a:solidFill>
-                  <a:srgbClr val="1A1A2E"/>
-                </a:solidFill>
-              </a:defRPr>
-            </a:pPr>
-          </a:p>
-          <a:p>
-            <a:pPr algn="l">
-              <a:defRPr sz="1400" b="0">
-                <a:solidFill>
-                  <a:srgbClr val="1A1A2E"/>
-                </a:solidFill>
-              </a:defRPr>
-            </a:pPr>
-            <a:r>
-              <a:t>• RTX 4090: Marlin 커널 → W4A16 최적</a:t>
-            </a:r>
-          </a:p>
-          <a:p>
-            <a:pPr algn="l">
-              <a:defRPr sz="1400" b="0">
-                <a:solidFill>
-                  <a:srgbClr val="1A1A2E"/>
-                </a:solidFill>
-              </a:defRPr>
-            </a:pPr>
-            <a:r>
-              <a:t>• L4: Cutlass INT8 커널 → W8A8 최적</a:t>
-            </a:r>
-          </a:p>
-          <a:p>
-            <a:pPr algn="l">
-              <a:defRPr sz="1400" b="0">
-                <a:solidFill>
-                  <a:srgbClr val="CC3333"/>
-                </a:solidFill>
-              </a:defRPr>
-            </a:pPr>
-            <a:r>
-              <a:t>• 로컬 점수만 보고 제출하면 실패</a:t>
-            </a:r>
-          </a:p>
-          <a:p>
-            <a:pPr algn="l">
-              <a:defRPr sz="1600" b="0">
-                <a:solidFill>
-                  <a:srgbClr val="1A1A2E"/>
-                </a:solidFill>
-              </a:defRPr>
-            </a:pPr>
-          </a:p>
-          <a:p>
-            <a:pPr algn="l">
-              <a:defRPr sz="2200" b="1">
-                <a:solidFill>
-                  <a:srgbClr val="1A1A2E"/>
-                </a:solidFill>
-              </a:defRPr>
-            </a:pPr>
-            <a:r>
-              <a:t>2. 소형 모델의 양자화 한계</a:t>
-            </a:r>
-          </a:p>
-          <a:p>
-            <a:pPr algn="l">
-              <a:defRPr sz="1600" b="0">
-                <a:solidFill>
-                  <a:srgbClr val="1A1A2E"/>
-                </a:solidFill>
-              </a:defRPr>
-            </a:pPr>
-          </a:p>
-          <a:p>
-            <a:pPr algn="l">
-              <a:defRPr sz="1400" b="0">
-                <a:solidFill>
-                  <a:srgbClr val="1A1A2E"/>
-                </a:solidFill>
-              </a:defRPr>
-            </a:pPr>
-            <a:r>
-              <a:t>• 1.2B 파라미터 = INT4에 너무 민감</a:t>
-            </a:r>
-          </a:p>
-          <a:p>
-            <a:pPr algn="l">
-              <a:defRPr sz="1400" b="0">
-                <a:solidFill>
-                  <a:srgbClr val="1A1A2E"/>
-                </a:solidFill>
-              </a:defRPr>
-            </a:pPr>
-            <a:r>
-              <a:t>• INT8 (W8A8)이 품질/속도 최적점</a:t>
-            </a:r>
-          </a:p>
-          <a:p>
-            <a:pPr algn="l">
-              <a:defRPr sz="1400" b="0">
-                <a:solidFill>
-                  <a:srgbClr val="1A1A2E"/>
-                </a:solidFill>
-              </a:defRPr>
-            </a:pPr>
-            <a:r>
-              <a:t>• SFT/KD로 복구 시도도 한계</a:t>
-            </a:r>
-          </a:p>
-        </p:txBody>
-      </p:sp>
-      <p:sp>
-        <p:nvSpPr>
-          <p:cNvPr id="4" name="TextBox 3"/>
+              <a:defRPr sz="1600" b="1">
+                <a:solidFill>
+                  <a:srgbClr val="2D5AA0"/>
+                </a:solidFill>
+                <a:latin typeface="맑은 고딕"/>
+              </a:defRPr>
+            </a:pPr>
+            <a:r>
+              <a:t>1. L4 GPU에서 W8A8 (INT8)만 유효</a:t>
+            </a:r>
+          </a:p>
+        </p:txBody>
+      </p:sp>
+      <p:sp>
+        <p:nvSpPr>
+          <p:cNvPr id="6" name="TextBox 5"/>
           <p:cNvSpPr txBox="1"/>
           <p:nvPr/>
         </p:nvSpPr>
         <p:spPr>
           <a:xfrm>
-            <a:off x="6400800" y="1371600"/>
-            <a:ext cx="5029200" cy="4572000"/>
+            <a:off x="640080" y="1737360"/>
+            <a:ext cx="4937760" cy="1645920"/>
           </a:xfrm>
           <a:prstGeom prst="rect">
             <a:avLst/>
@@ -5346,43 +7927,198 @@
           <a:lstStyle/>
           <a:p>
             <a:pPr algn="l">
-              <a:defRPr sz="2200" b="1">
-                <a:solidFill>
-                  <a:srgbClr val="1A1A2E"/>
-                </a:solidFill>
-              </a:defRPr>
-            </a:pPr>
-            <a:r>
-              <a:t>3. 단순함의 승리</a:t>
-            </a:r>
+              <a:defRPr sz="1200" b="0">
+                <a:solidFill>
+                  <a:srgbClr val="2C3E50"/>
+                </a:solidFill>
+                <a:latin typeface="맑은 고딕"/>
+              </a:defRPr>
+            </a:pPr>
           </a:p>
           <a:p>
             <a:pPr algn="l">
-              <a:defRPr sz="1600" b="0">
-                <a:solidFill>
-                  <a:srgbClr val="1A1A2E"/>
-                </a:solidFill>
-              </a:defRPr>
-            </a:pPr>
+              <a:defRPr sz="1200" b="0">
+                <a:solidFill>
+                  <a:srgbClr val="2C3E50"/>
+                </a:solidFill>
+                <a:latin typeface="맑은 고딕"/>
+              </a:defRPr>
+            </a:pPr>
+            <a:r>
+              <a:t>• CutlassScaledMM 커널로 INT8 연산 가속 (~24%)</a:t>
+            </a:r>
           </a:p>
           <a:p>
             <a:pPr algn="l">
-              <a:defRPr sz="1400" b="0">
-                <a:solidFill>
-                  <a:srgbClr val="1A1A2E"/>
-                </a:solidFill>
-              </a:defRPr>
-            </a:pPr>
-            <a:r>
-              <a:t>• QuantMod(minmax) &gt; GPTQ(Hessian)</a:t>
+              <a:defRPr sz="1200" b="0">
+                <a:solidFill>
+                  <a:srgbClr val="2C3E50"/>
+                </a:solidFill>
+                <a:latin typeface="맑은 고딕"/>
+              </a:defRPr>
+            </a:pPr>
+            <a:r>
+              <a:t>• W8A16은 AllSpark 커널 → 느림</a:t>
             </a:r>
           </a:p>
           <a:p>
             <a:pPr algn="l">
-              <a:defRPr sz="1400" b="0">
-                <a:solidFill>
-                  <a:srgbClr val="1A1A2E"/>
-                </a:solidFill>
+              <a:defRPr sz="1200" b="0">
+                <a:solidFill>
+                  <a:srgbClr val="2C3E50"/>
+                </a:solidFill>
+                <a:latin typeface="맑은 고딕"/>
+              </a:defRPr>
+            </a:pPr>
+            <a:r>
+              <a:t>• FP8은 vLLM 커널 최적화 부족</a:t>
+            </a:r>
+          </a:p>
+          <a:p>
+            <a:pPr algn="l">
+              <a:defRPr sz="1200" b="1">
+                <a:solidFill>
+                  <a:srgbClr val="E84D3D"/>
+                </a:solidFill>
+                <a:latin typeface="맑은 고딕"/>
+              </a:defRPr>
+            </a:pPr>
+            <a:r>
+              <a:t>→ 하드웨어별 최적 커널 확인 필수</a:t>
+            </a:r>
+          </a:p>
+        </p:txBody>
+      </p:sp>
+      <p:sp>
+        <p:nvSpPr>
+          <p:cNvPr id="7" name="Rounded Rectangle 6"/>
+          <p:cNvSpPr/>
+          <p:nvPr/>
+        </p:nvSpPr>
+        <p:spPr>
+          <a:xfrm>
+            <a:off x="6217920" y="1188720"/>
+            <a:ext cx="5303520" cy="2377440"/>
+          </a:xfrm>
+          <a:prstGeom prst="roundRect">
+            <a:avLst/>
+          </a:prstGeom>
+          <a:solidFill>
+            <a:srgbClr val="F0F0F5"/>
+          </a:solidFill>
+          <a:ln>
+            <a:noFill/>
+          </a:ln>
+        </p:spPr>
+        <p:style>
+          <a:lnRef idx="1">
+            <a:schemeClr val="accent1"/>
+          </a:lnRef>
+          <a:fillRef idx="3">
+            <a:schemeClr val="accent1"/>
+          </a:fillRef>
+          <a:effectRef idx="2">
+            <a:schemeClr val="accent1"/>
+          </a:effectRef>
+          <a:fontRef idx="minor">
+            <a:schemeClr val="lt1"/>
+          </a:fontRef>
+        </p:style>
+        <p:txBody>
+          <a:bodyPr rtlCol="0" anchor="ctr"/>
+          <a:lstStyle/>
+          <a:p>
+            <a:pPr algn="ctr"/>
+          </a:p>
+        </p:txBody>
+      </p:sp>
+      <p:sp>
+        <p:nvSpPr>
+          <p:cNvPr id="8" name="TextBox 7"/>
+          <p:cNvSpPr txBox="1"/>
+          <p:nvPr/>
+        </p:nvSpPr>
+        <p:spPr>
+          <a:xfrm>
+            <a:off x="6400800" y="1325880"/>
+            <a:ext cx="4937760" cy="365760"/>
+          </a:xfrm>
+          <a:prstGeom prst="rect">
+            <a:avLst/>
+          </a:prstGeom>
+          <a:noFill/>
+        </p:spPr>
+        <p:txBody>
+          <a:bodyPr wrap="square">
+            <a:spAutoFit/>
+          </a:bodyPr>
+          <a:lstStyle/>
+          <a:p>
+            <a:pPr algn="l">
+              <a:defRPr sz="1600" b="1">
+                <a:solidFill>
+                  <a:srgbClr val="2D5AA0"/>
+                </a:solidFill>
+                <a:latin typeface="맑은 고딕"/>
+              </a:defRPr>
+            </a:pPr>
+            <a:r>
+              <a:t>2. 단순한 양자화가 최고 성능</a:t>
+            </a:r>
+          </a:p>
+        </p:txBody>
+      </p:sp>
+      <p:sp>
+        <p:nvSpPr>
+          <p:cNvPr id="9" name="TextBox 8"/>
+          <p:cNvSpPr txBox="1"/>
+          <p:nvPr/>
+        </p:nvSpPr>
+        <p:spPr>
+          <a:xfrm>
+            <a:off x="6400800" y="1737360"/>
+            <a:ext cx="4937760" cy="1645920"/>
+          </a:xfrm>
+          <a:prstGeom prst="rect">
+            <a:avLst/>
+          </a:prstGeom>
+          <a:noFill/>
+        </p:spPr>
+        <p:txBody>
+          <a:bodyPr wrap="square">
+            <a:spAutoFit/>
+          </a:bodyPr>
+          <a:lstStyle/>
+          <a:p>
+            <a:pPr algn="l">
+              <a:defRPr sz="1200" b="0">
+                <a:solidFill>
+                  <a:srgbClr val="2C3E50"/>
+                </a:solidFill>
+                <a:latin typeface="맑은 고딕"/>
+              </a:defRPr>
+            </a:pPr>
+          </a:p>
+          <a:p>
+            <a:pPr algn="l">
+              <a:defRPr sz="1200" b="0">
+                <a:solidFill>
+                  <a:srgbClr val="2C3E50"/>
+                </a:solidFill>
+                <a:latin typeface="맑은 고딕"/>
+              </a:defRPr>
+            </a:pPr>
+            <a:r>
+              <a:t>• QuantMod(min-max) &gt; GPTQ(Hessian)</a:t>
+            </a:r>
+          </a:p>
+          <a:p>
+            <a:pPr algn="l">
+              <a:defRPr sz="1200" b="0">
+                <a:solidFill>
+                  <a:srgbClr val="2C3E50"/>
+                </a:solidFill>
+                <a:latin typeface="맑은 고딕"/>
               </a:defRPr>
             </a:pPr>
             <a:r>
@@ -5391,10 +8127,11 @@
           </a:p>
           <a:p>
             <a:pPr algn="l">
-              <a:defRPr sz="1400" b="0">
-                <a:solidFill>
-                  <a:srgbClr val="1A1A2E"/>
-                </a:solidFill>
+              <a:defRPr sz="1200" b="0">
+                <a:solidFill>
+                  <a:srgbClr val="2C3E50"/>
+                </a:solidFill>
+                <a:latin typeface="맑은 고딕"/>
               </a:defRPr>
             </a:pPr>
             <a:r>
@@ -5403,68 +8140,343 @@
           </a:p>
           <a:p>
             <a:pPr algn="l">
-              <a:defRPr sz="1600" b="0">
-                <a:solidFill>
-                  <a:srgbClr val="1A1A2E"/>
-                </a:solidFill>
-              </a:defRPr>
-            </a:pPr>
-          </a:p>
+              <a:defRPr sz="1200" b="1">
+                <a:solidFill>
+                  <a:srgbClr val="E84D3D"/>
+                </a:solidFill>
+                <a:latin typeface="맑은 고딕"/>
+              </a:defRPr>
+            </a:pPr>
+            <a:r>
+              <a:t>→ vLLM INT8 CUTLASS 커널 경로 유지가 핵심</a:t>
+            </a:r>
+          </a:p>
+        </p:txBody>
+      </p:sp>
+      <p:sp>
+        <p:nvSpPr>
+          <p:cNvPr id="10" name="Rounded Rectangle 9"/>
+          <p:cNvSpPr/>
+          <p:nvPr/>
+        </p:nvSpPr>
+        <p:spPr>
+          <a:xfrm>
+            <a:off x="457200" y="3840480"/>
+            <a:ext cx="5303520" cy="2377440"/>
+          </a:xfrm>
+          <a:prstGeom prst="roundRect">
+            <a:avLst/>
+          </a:prstGeom>
+          <a:solidFill>
+            <a:srgbClr val="F0F0F5"/>
+          </a:solidFill>
+          <a:ln>
+            <a:noFill/>
+          </a:ln>
+        </p:spPr>
+        <p:style>
+          <a:lnRef idx="1">
+            <a:schemeClr val="accent1"/>
+          </a:lnRef>
+          <a:fillRef idx="3">
+            <a:schemeClr val="accent1"/>
+          </a:fillRef>
+          <a:effectRef idx="2">
+            <a:schemeClr val="accent1"/>
+          </a:effectRef>
+          <a:fontRef idx="minor">
+            <a:schemeClr val="lt1"/>
+          </a:fontRef>
+        </p:style>
+        <p:txBody>
+          <a:bodyPr rtlCol="0" anchor="ctr"/>
+          <a:lstStyle/>
+          <a:p>
+            <a:pPr algn="ctr"/>
+          </a:p>
+        </p:txBody>
+      </p:sp>
+      <p:sp>
+        <p:nvSpPr>
+          <p:cNvPr id="11" name="TextBox 10"/>
+          <p:cNvSpPr txBox="1"/>
+          <p:nvPr/>
+        </p:nvSpPr>
+        <p:spPr>
+          <a:xfrm>
+            <a:off x="640080" y="3977640"/>
+            <a:ext cx="4937760" cy="365760"/>
+          </a:xfrm>
+          <a:prstGeom prst="rect">
+            <a:avLst/>
+          </a:prstGeom>
+          <a:noFill/>
+        </p:spPr>
+        <p:txBody>
+          <a:bodyPr wrap="square">
+            <a:spAutoFit/>
+          </a:bodyPr>
+          <a:lstStyle/>
           <a:p>
             <a:pPr algn="l">
-              <a:defRPr sz="2200" b="1">
-                <a:solidFill>
-                  <a:srgbClr val="1A1A2E"/>
-                </a:solidFill>
-              </a:defRPr>
-            </a:pPr>
-            <a:r>
-              <a:t>4. Context Window = 숨은 속도 변수</a:t>
-            </a:r>
-          </a:p>
+              <a:defRPr sz="1600" b="1">
+                <a:solidFill>
+                  <a:srgbClr val="2D5AA0"/>
+                </a:solidFill>
+                <a:latin typeface="맑은 고딕"/>
+              </a:defRPr>
+            </a:pPr>
+            <a:r>
+              <a:t>3. 로컬 vs 서버 결과 괴리</a:t>
+            </a:r>
+          </a:p>
+        </p:txBody>
+      </p:sp>
+      <p:sp>
+        <p:nvSpPr>
+          <p:cNvPr id="12" name="TextBox 11"/>
+          <p:cNvSpPr txBox="1"/>
+          <p:nvPr/>
+        </p:nvSpPr>
+        <p:spPr>
+          <a:xfrm>
+            <a:off x="640080" y="4389120"/>
+            <a:ext cx="4937760" cy="1645920"/>
+          </a:xfrm>
+          <a:prstGeom prst="rect">
+            <a:avLst/>
+          </a:prstGeom>
+          <a:noFill/>
+        </p:spPr>
+        <p:txBody>
+          <a:bodyPr wrap="square">
+            <a:spAutoFit/>
+          </a:bodyPr>
+          <a:lstStyle/>
           <a:p>
             <a:pPr algn="l">
-              <a:defRPr sz="1600" b="0">
-                <a:solidFill>
-                  <a:srgbClr val="1A1A2E"/>
-                </a:solidFill>
+              <a:defRPr sz="1200" b="0">
+                <a:solidFill>
+                  <a:srgbClr val="2C3E50"/>
+                </a:solidFill>
+                <a:latin typeface="맑은 고딕"/>
               </a:defRPr>
             </a:pPr>
           </a:p>
           <a:p>
             <a:pPr algn="l">
-              <a:defRPr sz="1400" b="0">
-                <a:solidFill>
-                  <a:srgbClr val="1A1A2E"/>
-                </a:solidFill>
-              </a:defRPr>
-            </a:pPr>
-            <a:r>
-              <a:t>• 65536 → 16384 축소</a:t>
+              <a:defRPr sz="1200" b="0">
+                <a:solidFill>
+                  <a:srgbClr val="2C3E50"/>
+                </a:solidFill>
+                <a:latin typeface="맑은 고딕"/>
+              </a:defRPr>
+            </a:pPr>
+            <a:r>
+              <a:t>• RTX 5060Ti와 L4: 최적 양자화 방식 다름</a:t>
             </a:r>
           </a:p>
           <a:p>
             <a:pPr algn="l">
-              <a:defRPr sz="1400" b="0">
-                <a:solidFill>
-                  <a:srgbClr val="1A1A2E"/>
-                </a:solidFill>
-              </a:defRPr>
-            </a:pPr>
-            <a:r>
-              <a:t>• KV Cache 4배 절감 → 배치 효율 향상</a:t>
+              <a:defRPr sz="1200" b="0">
+                <a:solidFill>
+                  <a:srgbClr val="2C3E50"/>
+                </a:solidFill>
+                <a:latin typeface="맑은 고딕"/>
+              </a:defRPr>
+            </a:pPr>
+            <a:r>
+              <a:t>• 양자화에 따라 vLLM 커널 선택 달라짐</a:t>
             </a:r>
           </a:p>
           <a:p>
             <a:pPr algn="l">
-              <a:defRPr sz="1400" b="0">
-                <a:solidFill>
-                  <a:srgbClr val="1A1A2E"/>
-                </a:solidFill>
-              </a:defRPr>
-            </a:pPr>
-            <a:r>
-              <a:t>• 벤치마크 최대 ~16k이므로 품질 무손실</a:t>
+              <a:defRPr sz="1200" b="0">
+                <a:solidFill>
+                  <a:srgbClr val="2C3E50"/>
+                </a:solidFill>
+                <a:latin typeface="맑은 고딕"/>
+              </a:defRPr>
+            </a:pPr>
+            <a:r>
+              <a:t>• 로컬에서 비슷해도 서버에서 큰 차이</a:t>
+            </a:r>
+          </a:p>
+          <a:p>
+            <a:pPr algn="l">
+              <a:defRPr sz="1200" b="1">
+                <a:solidFill>
+                  <a:srgbClr val="E84D3D"/>
+                </a:solidFill>
+                <a:latin typeface="맑은 고딕"/>
+              </a:defRPr>
+            </a:pPr>
+            <a:r>
+              <a:t>→ 반드시 서버 제출 기준으로 최종 판단</a:t>
+            </a:r>
+          </a:p>
+        </p:txBody>
+      </p:sp>
+      <p:sp>
+        <p:nvSpPr>
+          <p:cNvPr id="13" name="Rounded Rectangle 12"/>
+          <p:cNvSpPr/>
+          <p:nvPr/>
+        </p:nvSpPr>
+        <p:spPr>
+          <a:xfrm>
+            <a:off x="6217920" y="3840480"/>
+            <a:ext cx="5303520" cy="2377440"/>
+          </a:xfrm>
+          <a:prstGeom prst="roundRect">
+            <a:avLst/>
+          </a:prstGeom>
+          <a:solidFill>
+            <a:srgbClr val="F0F0F5"/>
+          </a:solidFill>
+          <a:ln>
+            <a:noFill/>
+          </a:ln>
+        </p:spPr>
+        <p:style>
+          <a:lnRef idx="1">
+            <a:schemeClr val="accent1"/>
+          </a:lnRef>
+          <a:fillRef idx="3">
+            <a:schemeClr val="accent1"/>
+          </a:fillRef>
+          <a:effectRef idx="2">
+            <a:schemeClr val="accent1"/>
+          </a:effectRef>
+          <a:fontRef idx="minor">
+            <a:schemeClr val="lt1"/>
+          </a:fontRef>
+        </p:style>
+        <p:txBody>
+          <a:bodyPr rtlCol="0" anchor="ctr"/>
+          <a:lstStyle/>
+          <a:p>
+            <a:pPr algn="ctr"/>
+          </a:p>
+        </p:txBody>
+      </p:sp>
+      <p:sp>
+        <p:nvSpPr>
+          <p:cNvPr id="14" name="TextBox 13"/>
+          <p:cNvSpPr txBox="1"/>
+          <p:nvPr/>
+        </p:nvSpPr>
+        <p:spPr>
+          <a:xfrm>
+            <a:off x="6400800" y="3977640"/>
+            <a:ext cx="4937760" cy="365760"/>
+          </a:xfrm>
+          <a:prstGeom prst="rect">
+            <a:avLst/>
+          </a:prstGeom>
+          <a:noFill/>
+        </p:spPr>
+        <p:txBody>
+          <a:bodyPr wrap="square">
+            <a:spAutoFit/>
+          </a:bodyPr>
+          <a:lstStyle/>
+          <a:p>
+            <a:pPr algn="l">
+              <a:defRPr sz="1600" b="1">
+                <a:solidFill>
+                  <a:srgbClr val="2D5AA0"/>
+                </a:solidFill>
+                <a:latin typeface="맑은 고딕"/>
+              </a:defRPr>
+            </a:pPr>
+            <a:r>
+              <a:t>4. 소형 모델(1.2B)의 양자화 특성</a:t>
+            </a:r>
+          </a:p>
+        </p:txBody>
+      </p:sp>
+      <p:sp>
+        <p:nvSpPr>
+          <p:cNvPr id="15" name="TextBox 14"/>
+          <p:cNvSpPr txBox="1"/>
+          <p:nvPr/>
+        </p:nvSpPr>
+        <p:spPr>
+          <a:xfrm>
+            <a:off x="6400800" y="4389120"/>
+            <a:ext cx="4937760" cy="1645920"/>
+          </a:xfrm>
+          <a:prstGeom prst="rect">
+            <a:avLst/>
+          </a:prstGeom>
+          <a:noFill/>
+        </p:spPr>
+        <p:txBody>
+          <a:bodyPr wrap="square">
+            <a:spAutoFit/>
+          </a:bodyPr>
+          <a:lstStyle/>
+          <a:p>
+            <a:pPr algn="l">
+              <a:defRPr sz="1200" b="0">
+                <a:solidFill>
+                  <a:srgbClr val="2C3E50"/>
+                </a:solidFill>
+                <a:latin typeface="맑은 고딕"/>
+              </a:defRPr>
+            </a:pPr>
+          </a:p>
+          <a:p>
+            <a:pPr algn="l">
+              <a:defRPr sz="1200" b="0">
+                <a:solidFill>
+                  <a:srgbClr val="2C3E50"/>
+                </a:solidFill>
+                <a:latin typeface="맑은 고딕"/>
+              </a:defRPr>
+            </a:pPr>
+            <a:r>
+              <a:t>• INT4는 7B+에서 효과적, 1.2B는 품질 손실 과도</a:t>
+            </a:r>
+          </a:p>
+          <a:p>
+            <a:pPr algn="l">
+              <a:defRPr sz="1200" b="0">
+                <a:solidFill>
+                  <a:srgbClr val="2C3E50"/>
+                </a:solidFill>
+                <a:latin typeface="맑은 고딕"/>
+              </a:defRPr>
+            </a:pPr>
+            <a:r>
+              <a:t>• KD 가중치 변경 시 양자화 에러 급증 (최대 94.65)</a:t>
+            </a:r>
+          </a:p>
+          <a:p>
+            <a:pPr algn="l">
+              <a:defRPr sz="1200" b="0">
+                <a:solidFill>
+                  <a:srgbClr val="2C3E50"/>
+                </a:solidFill>
+                <a:latin typeface="맑은 고딕"/>
+              </a:defRPr>
+            </a:pPr>
+            <a:r>
+              <a:t>• SFT도 소형 모델에서 오히려 성능 저하</a:t>
+            </a:r>
+          </a:p>
+          <a:p>
+            <a:pPr algn="l">
+              <a:defRPr sz="1200" b="1">
+                <a:solidFill>
+                  <a:srgbClr val="E84D3D"/>
+                </a:solidFill>
+                <a:latin typeface="맑은 고딕"/>
+              </a:defRPr>
+            </a:pPr>
+            <a:r>
+              <a:t>→ 소형 모델은 최소한의 변형(W8A8)이 최적</a:t>
             </a:r>
           </a:p>
         </p:txBody>
@@ -5495,8 +8507,8 @@
         </p:nvSpPr>
         <p:spPr>
           <a:xfrm>
-            <a:off x="731520" y="365760"/>
-            <a:ext cx="10058400" cy="731520"/>
+            <a:off x="457200" y="274320"/>
+            <a:ext cx="10972800" cy="548640"/>
           </a:xfrm>
           <a:prstGeom prst="rect">
             <a:avLst/>
@@ -5510,29 +8522,109 @@
           <a:lstStyle/>
           <a:p>
             <a:pPr algn="l">
-              <a:defRPr sz="3200" b="1">
-                <a:solidFill>
-                  <a:srgbClr val="0066FF"/>
-                </a:solidFill>
-              </a:defRPr>
-            </a:pPr>
-            <a:r>
-              <a:t>모델 크기 비교</a:t>
+              <a:defRPr sz="3000" b="1">
+                <a:solidFill>
+                  <a:srgbClr val="2D5AA0"/>
+                </a:solidFill>
+                <a:latin typeface="맑은 고딕"/>
+              </a:defRPr>
+            </a:pPr>
+            <a:r>
+              <a:t>모델 크기 비교 + 재현 방법</a:t>
+            </a:r>
+          </a:p>
+        </p:txBody>
+      </p:sp>
+      <p:sp>
+        <p:nvSpPr>
+          <p:cNvPr id="3" name="Rectangle 2"/>
+          <p:cNvSpPr/>
+          <p:nvPr/>
+        </p:nvSpPr>
+        <p:spPr>
+          <a:xfrm>
+            <a:off x="457200" y="868680"/>
+            <a:ext cx="11247120" cy="38100"/>
+          </a:xfrm>
+          <a:prstGeom prst="rect">
+            <a:avLst/>
+          </a:prstGeom>
+          <a:solidFill>
+            <a:srgbClr val="2D5AA0"/>
+          </a:solidFill>
+          <a:ln>
+            <a:noFill/>
+          </a:ln>
+        </p:spPr>
+        <p:style>
+          <a:lnRef idx="1">
+            <a:schemeClr val="accent1"/>
+          </a:lnRef>
+          <a:fillRef idx="3">
+            <a:schemeClr val="accent1"/>
+          </a:fillRef>
+          <a:effectRef idx="2">
+            <a:schemeClr val="accent1"/>
+          </a:effectRef>
+          <a:fontRef idx="minor">
+            <a:schemeClr val="lt1"/>
+          </a:fontRef>
+        </p:style>
+        <p:txBody>
+          <a:bodyPr rtlCol="0" anchor="ctr"/>
+          <a:lstStyle/>
+          <a:p>
+            <a:pPr algn="ctr"/>
+          </a:p>
+        </p:txBody>
+      </p:sp>
+      <p:sp>
+        <p:nvSpPr>
+          <p:cNvPr id="4" name="TextBox 3"/>
+          <p:cNvSpPr txBox="1"/>
+          <p:nvPr/>
+        </p:nvSpPr>
+        <p:spPr>
+          <a:xfrm>
+            <a:off x="457200" y="1097280"/>
+            <a:ext cx="5486400" cy="365760"/>
+          </a:xfrm>
+          <a:prstGeom prst="rect">
+            <a:avLst/>
+          </a:prstGeom>
+          <a:noFill/>
+        </p:spPr>
+        <p:txBody>
+          <a:bodyPr wrap="square">
+            <a:spAutoFit/>
+          </a:bodyPr>
+          <a:lstStyle/>
+          <a:p>
+            <a:pPr algn="l">
+              <a:defRPr sz="1800" b="1">
+                <a:solidFill>
+                  <a:srgbClr val="2D5AA0"/>
+                </a:solidFill>
+                <a:latin typeface="맑은 고딕"/>
+              </a:defRPr>
+            </a:pPr>
+            <a:r>
+              <a:t>성능 비교</a:t>
             </a:r>
           </a:p>
         </p:txBody>
       </p:sp>
       <p:graphicFrame>
         <p:nvGraphicFramePr>
-          <p:cNvPr id="3" name="Table 2"/>
+          <p:cNvPr id="5" name="Table 4"/>
           <p:cNvGraphicFramePr>
             <a:graphicFrameLocks noGrp="1"/>
           </p:cNvGraphicFramePr>
           <p:nvPr/>
         </p:nvGraphicFramePr>
         <p:xfrm>
-          <a:off x="2286000" y="1371600"/>
-          <a:ext cx="7315200" cy="3200400"/>
+          <a:off x="457200" y="1554480"/>
+          <a:ext cx="5486400" cy="3200400"/>
         </p:xfrm>
         <a:graphic>
           <a:graphicData uri="http://schemas.openxmlformats.org/drawingml/2006/table">
@@ -5541,28 +8633,32 @@
                 <a:tableStyleId>{5C22544A-7EE6-4342-B048-85BDC9FD1C3A}</a:tableStyleId>
               </a:tblPr>
               <a:tblGrid>
-                <a:gridCol w="2438400"/>
-                <a:gridCol w="2438400"/>
-                <a:gridCol w="2438400"/>
+                <a:gridCol w="1828800"/>
+                <a:gridCol w="1828800"/>
+                <a:gridCol w="1828800"/>
               </a:tblGrid>
-              <a:tr h="533400">
-                <a:tc>
-                  <a:txBody>
-                    <a:bodyPr/>
-                    <a:lstStyle/>
-                    <a:p>
-                      <a:pPr algn="ctr">
-                        <a:defRPr sz="1300" b="1">
+              <a:tr h="400050">
+                <a:tc>
+                  <a:txBody>
+                    <a:bodyPr/>
+                    <a:lstStyle/>
+                    <a:p>
+                      <a:pPr algn="ctr">
+                        <a:defRPr sz="1200" b="1">
                           <a:solidFill>
                             <a:srgbClr val="FFFFFF"/>
                           </a:solidFill>
-                        </a:defRPr>
-                      </a:pPr>
+                          <a:latin typeface="맑은 고딕"/>
+                        </a:defRPr>
+                      </a:pPr>
+                      <a:r>
+                        <a:t>항목</a:t>
+                      </a:r>
                     </a:p>
                   </a:txBody>
                   <a:tcPr>
                     <a:solidFill>
-                      <a:srgbClr val="0066FF"/>
+                      <a:srgbClr val="2D5AA0"/>
                     </a:solidFill>
                   </a:tcPr>
                 </a:tc>
@@ -5572,10 +8668,11 @@
                     <a:lstStyle/>
                     <a:p>
                       <a:pPr algn="ctr">
-                        <a:defRPr sz="1300" b="1">
+                        <a:defRPr sz="1200" b="1">
                           <a:solidFill>
                             <a:srgbClr val="FFFFFF"/>
                           </a:solidFill>
+                          <a:latin typeface="맑은 고딕"/>
                         </a:defRPr>
                       </a:pPr>
                       <a:r>
@@ -5585,7 +8682,7 @@
                   </a:txBody>
                   <a:tcPr>
                     <a:solidFill>
-                      <a:srgbClr val="0066FF"/>
+                      <a:srgbClr val="2D5AA0"/>
                     </a:solidFill>
                   </a:tcPr>
                 </a:tc>
@@ -5595,10 +8692,11 @@
                     <a:lstStyle/>
                     <a:p>
                       <a:pPr algn="ctr">
-                        <a:defRPr sz="1300" b="1">
+                        <a:defRPr sz="1200" b="1">
                           <a:solidFill>
                             <a:srgbClr val="FFFFFF"/>
                           </a:solidFill>
+                          <a:latin typeface="맑은 고딕"/>
                         </a:defRPr>
                       </a:pPr>
                       <a:r>
@@ -5608,19 +8706,24 @@
                   </a:txBody>
                   <a:tcPr>
                     <a:solidFill>
-                      <a:srgbClr val="0066FF"/>
+                      <a:srgbClr val="2D5AA0"/>
                     </a:solidFill>
                   </a:tcPr>
                 </a:tc>
               </a:tr>
-              <a:tr h="533400">
-                <a:tc>
-                  <a:txBody>
-                    <a:bodyPr/>
-                    <a:lstStyle/>
-                    <a:p>
-                      <a:pPr algn="ctr">
-                        <a:defRPr sz="1200"/>
+              <a:tr h="400050">
+                <a:tc>
+                  <a:txBody>
+                    <a:bodyPr/>
+                    <a:lstStyle/>
+                    <a:p>
+                      <a:pPr algn="ctr">
+                        <a:defRPr sz="1100">
+                          <a:solidFill>
+                            <a:srgbClr val="2C3E50"/>
+                          </a:solidFill>
+                          <a:latin typeface="맑은 고딕"/>
+                        </a:defRPr>
                       </a:pPr>
                       <a:r>
                         <a:t>정밀도</a:t>
@@ -5635,10 +8738,15 @@
                     <a:lstStyle/>
                     <a:p>
                       <a:pPr algn="ctr">
-                        <a:defRPr sz="1200"/>
-                      </a:pPr>
-                      <a:r>
-                        <a:t>BF16</a:t>
+                        <a:defRPr sz="1100">
+                          <a:solidFill>
+                            <a:srgbClr val="2C3E50"/>
+                          </a:solidFill>
+                          <a:latin typeface="맑은 고딕"/>
+                        </a:defRPr>
+                      </a:pPr>
+                      <a:r>
+                        <a:t>BF16 (16비트)</a:t>
                       </a:r>
                     </a:p>
                   </a:txBody>
@@ -5650,7 +8758,12 @@
                     <a:lstStyle/>
                     <a:p>
                       <a:pPr algn="ctr">
-                        <a:defRPr sz="1200"/>
+                        <a:defRPr sz="1100">
+                          <a:solidFill>
+                            <a:srgbClr val="2C3E50"/>
+                          </a:solidFill>
+                          <a:latin typeface="맑은 고딕"/>
+                        </a:defRPr>
                       </a:pPr>
                       <a:r>
                         <a:t>INT8 (W8A8)</a:t>
@@ -5660,14 +8773,19 @@
                   <a:tcPr/>
                 </a:tc>
               </a:tr>
-              <a:tr h="533400">
-                <a:tc>
-                  <a:txBody>
-                    <a:bodyPr/>
-                    <a:lstStyle/>
-                    <a:p>
-                      <a:pPr algn="ctr">
-                        <a:defRPr sz="1200"/>
+              <a:tr h="400050">
+                <a:tc>
+                  <a:txBody>
+                    <a:bodyPr/>
+                    <a:lstStyle/>
+                    <a:p>
+                      <a:pPr algn="ctr">
+                        <a:defRPr sz="1100">
+                          <a:solidFill>
+                            <a:srgbClr val="2C3E50"/>
+                          </a:solidFill>
+                          <a:latin typeface="맑은 고딕"/>
+                        </a:defRPr>
                       </a:pPr>
                       <a:r>
                         <a:t>모델 크기</a:t>
@@ -5686,7 +8804,12 @@
                     <a:lstStyle/>
                     <a:p>
                       <a:pPr algn="ctr">
-                        <a:defRPr sz="1200"/>
+                        <a:defRPr sz="1100">
+                          <a:solidFill>
+                            <a:srgbClr val="2C3E50"/>
+                          </a:solidFill>
+                          <a:latin typeface="맑은 고딕"/>
+                        </a:defRPr>
                       </a:pPr>
                       <a:r>
                         <a:t>2.4 GB</a:t>
@@ -5705,10 +8828,15 @@
                     <a:lstStyle/>
                     <a:p>
                       <a:pPr algn="ctr">
-                        <a:defRPr sz="1200"/>
-                      </a:pPr>
-                      <a:r>
-                        <a:t>1.4 GB</a:t>
+                        <a:defRPr sz="1100">
+                          <a:solidFill>
+                            <a:srgbClr val="2C3E50"/>
+                          </a:solidFill>
+                          <a:latin typeface="맑은 고딕"/>
+                        </a:defRPr>
+                      </a:pPr>
+                      <a:r>
+                        <a:t>1.4 GB (42% 감소)</a:t>
                       </a:r>
                     </a:p>
                   </a:txBody>
@@ -5719,17 +8847,22 @@
                   </a:tcPr>
                 </a:tc>
               </a:tr>
-              <a:tr h="533400">
-                <a:tc>
-                  <a:txBody>
-                    <a:bodyPr/>
-                    <a:lstStyle/>
-                    <a:p>
-                      <a:pPr algn="ctr">
-                        <a:defRPr sz="1200"/>
-                      </a:pPr>
-                      <a:r>
-                        <a:t>압축률</a:t>
+              <a:tr h="400050">
+                <a:tc>
+                  <a:txBody>
+                    <a:bodyPr/>
+                    <a:lstStyle/>
+                    <a:p>
+                      <a:pPr algn="ctr">
+                        <a:defRPr sz="1100">
+                          <a:solidFill>
+                            <a:srgbClr val="2C3E50"/>
+                          </a:solidFill>
+                          <a:latin typeface="맑은 고딕"/>
+                        </a:defRPr>
+                      </a:pPr>
+                      <a:r>
+                        <a:t>max_position</a:t>
                       </a:r>
                     </a:p>
                   </a:txBody>
@@ -5741,10 +8874,15 @@
                     <a:lstStyle/>
                     <a:p>
                       <a:pPr algn="ctr">
-                        <a:defRPr sz="1200"/>
-                      </a:pPr>
-                      <a:r>
-                        <a:t>-</a:t>
+                        <a:defRPr sz="1100">
+                          <a:solidFill>
+                            <a:srgbClr val="2C3E50"/>
+                          </a:solidFill>
+                          <a:latin typeface="맑은 고딕"/>
+                        </a:defRPr>
+                      </a:pPr>
+                      <a:r>
+                        <a:t>65,536</a:t>
                       </a:r>
                     </a:p>
                   </a:txBody>
@@ -5756,27 +8894,37 @@
                     <a:lstStyle/>
                     <a:p>
                       <a:pPr algn="ctr">
-                        <a:defRPr sz="1200"/>
-                      </a:pPr>
-                      <a:r>
-                        <a:t>42% 감소</a:t>
+                        <a:defRPr sz="1100">
+                          <a:solidFill>
+                            <a:srgbClr val="2C3E50"/>
+                          </a:solidFill>
+                          <a:latin typeface="맑은 고딕"/>
+                        </a:defRPr>
+                      </a:pPr>
+                      <a:r>
+                        <a:t>16,384</a:t>
                       </a:r>
                     </a:p>
                   </a:txBody>
                   <a:tcPr/>
                 </a:tc>
               </a:tr>
-              <a:tr h="533400">
-                <a:tc>
-                  <a:txBody>
-                    <a:bodyPr/>
-                    <a:lstStyle/>
-                    <a:p>
-                      <a:pPr algn="ctr">
-                        <a:defRPr sz="1200"/>
-                      </a:pPr>
-                      <a:r>
-                        <a:t>max_position</a:t>
+              <a:tr h="400050">
+                <a:tc>
+                  <a:txBody>
+                    <a:bodyPr/>
+                    <a:lstStyle/>
+                    <a:p>
+                      <a:pPr algn="ctr">
+                        <a:defRPr sz="1100">
+                          <a:solidFill>
+                            <a:srgbClr val="2C3E50"/>
+                          </a:solidFill>
+                          <a:latin typeface="맑은 고딕"/>
+                        </a:defRPr>
+                      </a:pPr>
+                      <a:r>
+                        <a:t>추론 속도 (L4)</a:t>
                       </a:r>
                     </a:p>
                   </a:txBody>
@@ -5792,10 +8940,15 @@
                     <a:lstStyle/>
                     <a:p>
                       <a:pPr algn="ctr">
-                        <a:defRPr sz="1200"/>
-                      </a:pPr>
-                      <a:r>
-                        <a:t>65536</a:t>
+                        <a:defRPr sz="1100">
+                          <a:solidFill>
+                            <a:srgbClr val="2C3E50"/>
+                          </a:solidFill>
+                          <a:latin typeface="맑은 고딕"/>
+                        </a:defRPr>
+                      </a:pPr>
+                      <a:r>
+                        <a:t>1,811 tok/s</a:t>
                       </a:r>
                     </a:p>
                   </a:txBody>
@@ -5811,10 +8964,15 @@
                     <a:lstStyle/>
                     <a:p>
                       <a:pPr algn="ctr">
-                        <a:defRPr sz="1200"/>
-                      </a:pPr>
-                      <a:r>
-                        <a:t>16384</a:t>
+                        <a:defRPr sz="1100">
+                          <a:solidFill>
+                            <a:srgbClr val="2C3E50"/>
+                          </a:solidFill>
+                          <a:latin typeface="맑은 고딕"/>
+                        </a:defRPr>
+                      </a:pPr>
+                      <a:r>
+                        <a:t>2,435 tok/s</a:t>
                       </a:r>
                     </a:p>
                   </a:txBody>
@@ -5825,17 +8983,22 @@
                   </a:tcPr>
                 </a:tc>
               </a:tr>
-              <a:tr h="533400">
-                <a:tc>
-                  <a:txBody>
-                    <a:bodyPr/>
-                    <a:lstStyle/>
-                    <a:p>
-                      <a:pPr algn="ctr">
-                        <a:defRPr sz="1200"/>
-                      </a:pPr>
-                      <a:r>
-                        <a:t>서버 Score</a:t>
+              <a:tr h="400050">
+                <a:tc>
+                  <a:txBody>
+                    <a:bodyPr/>
+                    <a:lstStyle/>
+                    <a:p>
+                      <a:pPr algn="ctr">
+                        <a:defRPr sz="1100">
+                          <a:solidFill>
+                            <a:srgbClr val="2C3E50"/>
+                          </a:solidFill>
+                          <a:latin typeface="맑은 고딕"/>
+                        </a:defRPr>
+                      </a:pPr>
+                      <a:r>
+                        <a:t>PerfNorm</a:t>
                       </a:r>
                     </a:p>
                   </a:txBody>
@@ -5847,10 +9010,15 @@
                     <a:lstStyle/>
                     <a:p>
                       <a:pPr algn="ctr">
-                        <a:defRPr sz="1200"/>
-                      </a:pPr>
-                      <a:r>
-                        <a:t>0.5 (기준)</a:t>
+                        <a:defRPr sz="1100">
+                          <a:solidFill>
+                            <a:srgbClr val="2C3E50"/>
+                          </a:solidFill>
+                          <a:latin typeface="맑은 고딕"/>
+                        </a:defRPr>
+                      </a:pPr>
+                      <a:r>
+                        <a:t>1.000</a:t>
                       </a:r>
                     </a:p>
                   </a:txBody>
@@ -5862,14 +9030,167 @@
                     <a:lstStyle/>
                     <a:p>
                       <a:pPr algn="ctr">
-                        <a:defRPr sz="1200"/>
+                        <a:defRPr sz="1100">
+                          <a:solidFill>
+                            <a:srgbClr val="2C3E50"/>
+                          </a:solidFill>
+                          <a:latin typeface="맑은 고딕"/>
+                        </a:defRPr>
+                      </a:pPr>
+                      <a:r>
+                        <a:t>0.990</a:t>
+                      </a:r>
+                    </a:p>
+                  </a:txBody>
+                  <a:tcPr/>
+                </a:tc>
+              </a:tr>
+              <a:tr h="400050">
+                <a:tc>
+                  <a:txBody>
+                    <a:bodyPr/>
+                    <a:lstStyle/>
+                    <a:p>
+                      <a:pPr algn="ctr">
+                        <a:defRPr sz="1100">
+                          <a:solidFill>
+                            <a:srgbClr val="2C3E50"/>
+                          </a:solidFill>
+                          <a:latin typeface="맑은 고딕"/>
+                        </a:defRPr>
+                      </a:pPr>
+                      <a:r>
+                        <a:t>SpeedNorm</a:t>
+                      </a:r>
+                    </a:p>
+                  </a:txBody>
+                  <a:tcPr>
+                    <a:solidFill>
+                      <a:srgbClr val="F0F0F5"/>
+                    </a:solidFill>
+                  </a:tcPr>
+                </a:tc>
+                <a:tc>
+                  <a:txBody>
+                    <a:bodyPr/>
+                    <a:lstStyle/>
+                    <a:p>
+                      <a:pPr algn="ctr">
+                        <a:defRPr sz="1100">
+                          <a:solidFill>
+                            <a:srgbClr val="2C3E50"/>
+                          </a:solidFill>
+                          <a:latin typeface="맑은 고딕"/>
+                        </a:defRPr>
+                      </a:pPr>
+                      <a:r>
+                        <a:t>0.000</a:t>
+                      </a:r>
+                    </a:p>
+                  </a:txBody>
+                  <a:tcPr>
+                    <a:solidFill>
+                      <a:srgbClr val="F0F0F5"/>
+                    </a:solidFill>
+                  </a:tcPr>
+                </a:tc>
+                <a:tc>
+                  <a:txBody>
+                    <a:bodyPr/>
+                    <a:lstStyle/>
+                    <a:p>
+                      <a:pPr algn="ctr">
+                        <a:defRPr sz="1100">
+                          <a:solidFill>
+                            <a:srgbClr val="2C3E50"/>
+                          </a:solidFill>
+                          <a:latin typeface="맑은 고딕"/>
+                        </a:defRPr>
+                      </a:pPr>
+                      <a:r>
+                        <a:t>0.121</a:t>
+                      </a:r>
+                    </a:p>
+                  </a:txBody>
+                  <a:tcPr>
+                    <a:solidFill>
+                      <a:srgbClr val="F0F0F5"/>
+                    </a:solidFill>
+                  </a:tcPr>
+                </a:tc>
+              </a:tr>
+              <a:tr h="400050">
+                <a:tc>
+                  <a:txBody>
+                    <a:bodyPr/>
+                    <a:lstStyle/>
+                    <a:p>
+                      <a:pPr algn="ctr">
+                        <a:defRPr sz="1100" b="1">
+                          <a:solidFill>
+                            <a:srgbClr val="2D5AA0"/>
+                          </a:solidFill>
+                          <a:latin typeface="맑은 고딕"/>
+                        </a:defRPr>
+                      </a:pPr>
+                      <a:r>
+                        <a:t>Score</a:t>
+                      </a:r>
+                    </a:p>
+                  </a:txBody>
+                  <a:tcPr>
+                    <a:solidFill>
+                      <a:srgbClr val="E8F4FD"/>
+                    </a:solidFill>
+                  </a:tcPr>
+                </a:tc>
+                <a:tc>
+                  <a:txBody>
+                    <a:bodyPr/>
+                    <a:lstStyle/>
+                    <a:p>
+                      <a:pPr algn="ctr">
+                        <a:defRPr sz="1100" b="1">
+                          <a:solidFill>
+                            <a:srgbClr val="2D5AA0"/>
+                          </a:solidFill>
+                          <a:latin typeface="맑은 고딕"/>
+                        </a:defRPr>
+                      </a:pPr>
+                      <a:r>
+                        <a:t>0.500</a:t>
+                      </a:r>
+                    </a:p>
+                  </a:txBody>
+                  <a:tcPr>
+                    <a:solidFill>
+                      <a:srgbClr val="E8F4FD"/>
+                    </a:solidFill>
+                  </a:tcPr>
+                </a:tc>
+                <a:tc>
+                  <a:txBody>
+                    <a:bodyPr/>
+                    <a:lstStyle/>
+                    <a:p>
+                      <a:pPr algn="ctr">
+                        <a:defRPr sz="1100" b="1">
+                          <a:solidFill>
+                            <a:srgbClr val="2D5AA0"/>
+                          </a:solidFill>
+                          <a:latin typeface="맑은 고딕"/>
+                        </a:defRPr>
                       </a:pPr>
                       <a:r>
                         <a:t>0.6295</a:t>
                       </a:r>
                     </a:p>
                   </a:txBody>
-                  <a:tcPr/>
+                  <a:tcPr>
+                    <a:solidFill>
+                      <a:srgbClr val="E8F4FD"/>
+                    </a:solidFill>
+                  </a:tcPr>
                 </a:tc>
               </a:tr>
             </a:tbl>
@@ -5878,14 +9199,14 @@
       </p:graphicFrame>
       <p:sp>
         <p:nvSpPr>
-          <p:cNvPr id="4" name="TextBox 3"/>
+          <p:cNvPr id="6" name="TextBox 5"/>
           <p:cNvSpPr txBox="1"/>
           <p:nvPr/>
         </p:nvSpPr>
         <p:spPr>
           <a:xfrm>
-            <a:off x="914400" y="5029200"/>
-            <a:ext cx="10058400" cy="1371600"/>
+            <a:off x="6400800" y="1097280"/>
+            <a:ext cx="5029200" cy="365760"/>
           </a:xfrm>
           <a:prstGeom prst="rect">
             <a:avLst/>
@@ -5899,47 +9220,369 @@
           <a:lstStyle/>
           <a:p>
             <a:pPr algn="l">
-              <a:defRPr sz="1600" b="0">
-                <a:solidFill>
-                  <a:srgbClr val="1A1A2E"/>
-                </a:solidFill>
-              </a:defRPr>
-            </a:pPr>
-          </a:p>
+              <a:defRPr sz="1800" b="1">
+                <a:solidFill>
+                  <a:srgbClr val="2D5AA0"/>
+                </a:solidFill>
+                <a:latin typeface="맑은 고딕"/>
+              </a:defRPr>
+            </a:pPr>
+            <a:r>
+              <a:t>재현 방법</a:t>
+            </a:r>
+          </a:p>
+        </p:txBody>
+      </p:sp>
+      <p:sp>
+        <p:nvSpPr>
+          <p:cNvPr id="7" name="Rounded Rectangle 6"/>
+          <p:cNvSpPr/>
+          <p:nvPr/>
+        </p:nvSpPr>
+        <p:spPr>
+          <a:xfrm>
+            <a:off x="6400800" y="1554480"/>
+            <a:ext cx="5303520" cy="4114800"/>
+          </a:xfrm>
+          <a:prstGeom prst="roundRect">
+            <a:avLst/>
+          </a:prstGeom>
+          <a:solidFill>
+            <a:srgbClr val="2D2D2D"/>
+          </a:solidFill>
+          <a:ln>
+            <a:noFill/>
+          </a:ln>
+        </p:spPr>
+        <p:style>
+          <a:lnRef idx="1">
+            <a:schemeClr val="accent1"/>
+          </a:lnRef>
+          <a:fillRef idx="3">
+            <a:schemeClr val="accent1"/>
+          </a:fillRef>
+          <a:effectRef idx="2">
+            <a:schemeClr val="accent1"/>
+          </a:effectRef>
+          <a:fontRef idx="minor">
+            <a:schemeClr val="lt1"/>
+          </a:fontRef>
+        </p:style>
+        <p:txBody>
+          <a:bodyPr rtlCol="0" anchor="ctr"/>
+          <a:lstStyle/>
+          <a:p>
+            <a:pPr algn="ctr"/>
+          </a:p>
+        </p:txBody>
+      </p:sp>
+      <p:sp>
+        <p:nvSpPr>
+          <p:cNvPr id="8" name="TextBox 7"/>
+          <p:cNvSpPr txBox="1"/>
+          <p:nvPr/>
+        </p:nvSpPr>
+        <p:spPr>
+          <a:xfrm>
+            <a:off x="6583680" y="1645920"/>
+            <a:ext cx="4937760" cy="3931920"/>
+          </a:xfrm>
+          <a:prstGeom prst="rect">
+            <a:avLst/>
+          </a:prstGeom>
+          <a:noFill/>
+        </p:spPr>
+        <p:txBody>
+          <a:bodyPr wrap="square">
+            <a:spAutoFit/>
+          </a:bodyPr>
+          <a:lstStyle/>
           <a:p>
             <a:pPr algn="l">
-              <a:defRPr sz="1800" b="1">
-                <a:solidFill>
-                  <a:srgbClr val="1A1A2E"/>
-                </a:solidFill>
-              </a:defRPr>
-            </a:pPr>
-            <a:r>
-              <a:t>재현 방법:</a:t>
-            </a:r>
+              <a:defRPr sz="1100" b="0">
+                <a:solidFill>
+                  <a:srgbClr val="27AE60"/>
+                </a:solidFill>
+                <a:latin typeface="Consolas"/>
+              </a:defRPr>
+            </a:pPr>
           </a:p>
           <a:p>
             <a:pPr algn="l">
-              <a:defRPr sz="1400" b="0">
-                <a:solidFill>
-                  <a:srgbClr val="666666"/>
-                </a:solidFill>
-              </a:defRPr>
-            </a:pPr>
-            <a:r>
-              <a:t>pip install torch vllm llmcompressor transformers</a:t>
+              <a:defRPr sz="1100" b="1">
+                <a:solidFill>
+                  <a:srgbClr val="6A9955"/>
+                </a:solidFill>
+                <a:latin typeface="Consolas"/>
+              </a:defRPr>
+            </a:pPr>
+            <a:r>
+              <a:t># 1. 환경 설정</a:t>
             </a:r>
           </a:p>
           <a:p>
             <a:pPr algn="l">
-              <a:defRPr sz="1400" b="0">
-                <a:solidFill>
-                  <a:srgbClr val="666666"/>
-                </a:solidFill>
-              </a:defRPr>
-            </a:pPr>
-            <a:r>
-              <a:t>python reproduce.py  # ~10초, 12GB GPU</a:t>
+              <a:defRPr sz="1100" b="0">
+                <a:solidFill>
+                  <a:srgbClr val="FFFFFF"/>
+                </a:solidFill>
+                <a:latin typeface="Consolas"/>
+              </a:defRPr>
+            </a:pPr>
+            <a:r>
+              <a:t>conda create -n lgaimers python=3.10</a:t>
+            </a:r>
+          </a:p>
+          <a:p>
+            <a:pPr algn="l">
+              <a:defRPr sz="1100" b="0">
+                <a:solidFill>
+                  <a:srgbClr val="FFFFFF"/>
+                </a:solidFill>
+                <a:latin typeface="Consolas"/>
+              </a:defRPr>
+            </a:pPr>
+            <a:r>
+              <a:t>conda activate lgaimers</a:t>
+            </a:r>
+          </a:p>
+          <a:p>
+            <a:pPr algn="l">
+              <a:defRPr sz="1100" b="0">
+                <a:solidFill>
+                  <a:srgbClr val="FFFFFF"/>
+                </a:solidFill>
+                <a:latin typeface="Consolas"/>
+              </a:defRPr>
+            </a:pPr>
+            <a:r>
+              <a:t>pip install -r requirements.txt</a:t>
+            </a:r>
+          </a:p>
+          <a:p>
+            <a:pPr algn="l">
+              <a:defRPr sz="1100" b="0">
+                <a:solidFill>
+                  <a:srgbClr val="FFFFFF"/>
+                </a:solidFill>
+                <a:latin typeface="Consolas"/>
+              </a:defRPr>
+            </a:pPr>
+          </a:p>
+          <a:p>
+            <a:pPr algn="l">
+              <a:defRPr sz="1100" b="1">
+                <a:solidFill>
+                  <a:srgbClr val="6A9955"/>
+                </a:solidFill>
+                <a:latin typeface="Consolas"/>
+              </a:defRPr>
+            </a:pPr>
+            <a:r>
+              <a:t># 2. 경량화 실행 (~10초)</a:t>
+            </a:r>
+          </a:p>
+          <a:p>
+            <a:pPr algn="l">
+              <a:defRPr sz="1100" b="0">
+                <a:solidFill>
+                  <a:srgbClr val="85C1E9"/>
+                </a:solidFill>
+                <a:latin typeface="Consolas"/>
+              </a:defRPr>
+            </a:pPr>
+            <a:r>
+              <a:t>python reproduce.py</a:t>
+            </a:r>
+          </a:p>
+          <a:p>
+            <a:pPr algn="l">
+              <a:defRPr sz="1100" b="0">
+                <a:solidFill>
+                  <a:srgbClr val="FFFFFF"/>
+                </a:solidFill>
+                <a:latin typeface="Consolas"/>
+              </a:defRPr>
+            </a:pPr>
+          </a:p>
+          <a:p>
+            <a:pPr algn="l">
+              <a:defRPr sz="1100" b="1">
+                <a:solidFill>
+                  <a:srgbClr val="6A9955"/>
+                </a:solidFill>
+                <a:latin typeface="Consolas"/>
+              </a:defRPr>
+            </a:pPr>
+            <a:r>
+              <a:t># 핵심 코드 (reproduce.py):</a:t>
+            </a:r>
+          </a:p>
+          <a:p>
+            <a:pPr algn="l">
+              <a:defRPr sz="1100" b="0">
+                <a:solidFill>
+                  <a:srgbClr val="DCDCAA"/>
+                </a:solidFill>
+                <a:latin typeface="Consolas"/>
+              </a:defRPr>
+            </a:pPr>
+            <a:r>
+              <a:t>QuantizationModifier(</a:t>
+            </a:r>
+          </a:p>
+          <a:p>
+            <a:pPr algn="l">
+              <a:defRPr sz="1100" b="0">
+                <a:solidFill>
+                  <a:srgbClr val="CE9178"/>
+                </a:solidFill>
+                <a:latin typeface="Consolas"/>
+              </a:defRPr>
+            </a:pPr>
+            <a:r>
+              <a:t>    scheme="W8A8",</a:t>
+            </a:r>
+          </a:p>
+          <a:p>
+            <a:pPr algn="l">
+              <a:defRPr sz="1100" b="0">
+                <a:solidFill>
+                  <a:srgbClr val="CE9178"/>
+                </a:solidFill>
+                <a:latin typeface="Consolas"/>
+              </a:defRPr>
+            </a:pPr>
+            <a:r>
+              <a:t>    targets=["Linear"],</a:t>
+            </a:r>
+          </a:p>
+          <a:p>
+            <a:pPr algn="l">
+              <a:defRPr sz="1100" b="0">
+                <a:solidFill>
+                  <a:srgbClr val="CE9178"/>
+                </a:solidFill>
+                <a:latin typeface="Consolas"/>
+              </a:defRPr>
+            </a:pPr>
+            <a:r>
+              <a:t>    ignore=["embed_tokens",</a:t>
+            </a:r>
+          </a:p>
+          <a:p>
+            <a:pPr algn="l">
+              <a:defRPr sz="1100" b="0">
+                <a:solidFill>
+                  <a:srgbClr val="CE9178"/>
+                </a:solidFill>
+                <a:latin typeface="Consolas"/>
+              </a:defRPr>
+            </a:pPr>
+            <a:r>
+              <a:t>           "lm_head"]</a:t>
+            </a:r>
+          </a:p>
+          <a:p>
+            <a:pPr algn="l">
+              <a:defRPr sz="1100" b="0">
+                <a:solidFill>
+                  <a:srgbClr val="DCDCAA"/>
+                </a:solidFill>
+                <a:latin typeface="Consolas"/>
+              </a:defRPr>
+            </a:pPr>
+            <a:r>
+              <a:t>)</a:t>
+            </a:r>
+          </a:p>
+          <a:p>
+            <a:pPr algn="l">
+              <a:defRPr sz="1100" b="0">
+                <a:solidFill>
+                  <a:srgbClr val="FFFFFF"/>
+                </a:solidFill>
+                <a:latin typeface="Consolas"/>
+              </a:defRPr>
+            </a:pPr>
+          </a:p>
+          <a:p>
+            <a:pPr algn="l">
+              <a:defRPr sz="1100" b="1">
+                <a:solidFill>
+                  <a:srgbClr val="6A9955"/>
+                </a:solidFill>
+                <a:latin typeface="Consolas"/>
+              </a:defRPr>
+            </a:pPr>
+            <a:r>
+              <a:t># config.json 수정:</a:t>
+            </a:r>
+          </a:p>
+          <a:p>
+            <a:pPr algn="l">
+              <a:defRPr sz="1100" b="0">
+                <a:solidFill>
+                  <a:srgbClr val="6A9955"/>
+                </a:solidFill>
+                <a:latin typeface="Consolas"/>
+              </a:defRPr>
+            </a:pPr>
+            <a:r>
+              <a:t># max_position: 65536 → 16384</a:t>
+            </a:r>
+          </a:p>
+        </p:txBody>
+      </p:sp>
+      <p:sp>
+        <p:nvSpPr>
+          <p:cNvPr id="9" name="Rounded Rectangle 8"/>
+          <p:cNvSpPr/>
+          <p:nvPr/>
+        </p:nvSpPr>
+        <p:spPr>
+          <a:xfrm>
+            <a:off x="457200" y="5760720"/>
+            <a:ext cx="11247120" cy="640080"/>
+          </a:xfrm>
+          <a:prstGeom prst="roundRect">
+            <a:avLst/>
+          </a:prstGeom>
+          <a:solidFill>
+            <a:srgbClr val="E8F4FD"/>
+          </a:solidFill>
+          <a:ln>
+            <a:noFill/>
+          </a:ln>
+        </p:spPr>
+        <p:style>
+          <a:lnRef idx="1">
+            <a:schemeClr val="accent1"/>
+          </a:lnRef>
+          <a:fillRef idx="3">
+            <a:schemeClr val="accent1"/>
+          </a:fillRef>
+          <a:effectRef idx="2">
+            <a:schemeClr val="accent1"/>
+          </a:effectRef>
+          <a:fontRef idx="minor">
+            <a:schemeClr val="lt1"/>
+          </a:fontRef>
+        </p:style>
+        <p:txBody>
+          <a:bodyPr rtlCol="0" anchor="ctr" wrap="square"/>
+          <a:lstStyle/>
+          <a:p>
+            <a:pPr algn="ctr">
+              <a:defRPr sz="1300">
+                <a:solidFill>
+                  <a:srgbClr val="2D5AA0"/>
+                </a:solidFill>
+                <a:latin typeface="맑은 고딕"/>
+              </a:defRPr>
+            </a:pPr>
+            <a:r>
+              <a:t>   GPU: 12GB+  |  양자화: ~10초  |  외부 데이터: MANTA-1M (LG AI Research 공개)  |  결과: submit.zip (1.2GB)</a:t>
             </a:r>
           </a:p>
         </p:txBody>
